--- a/Жизненный.pptx
+++ b/Жизненный.pptx
@@ -2,7 +2,7 @@
 <file path=ppt/presentation.xml><?xml version="1.0" encoding="utf-8"?>
 <p:presentation xmlns:a="http://schemas.openxmlformats.org/drawingml/2006/main" xmlns:r="http://schemas.openxmlformats.org/officeDocument/2006/relationships" xmlns:p="http://schemas.openxmlformats.org/presentationml/2006/main" saveSubsetFonts="1">
   <p:sldMasterIdLst>
-    <p:sldMasterId id="2147483846" r:id="rId1"/>
+    <p:sldMasterId id="2147483971" r:id="rId1"/>
   </p:sldMasterIdLst>
   <p:sldIdLst>
     <p:sldId id="256" r:id="rId2"/>
@@ -120,6 +120,11 @@
       </a:defRPr>
     </a:lvl9pPr>
   </p:defaultTextStyle>
+  <p:extLst>
+    <p:ext uri="{EFAFB233-063F-42B5-8137-9DF3F51BA10A}">
+      <p15:sldGuideLst xmlns:p15="http://schemas.microsoft.com/office/powerpoint/2012/main"/>
+    </p:ext>
+  </p:extLst>
 </p:presentation>
 </file>
 
@@ -142,18 +147,94 @@
       </p:grpSpPr>
       <p:sp>
         <p:nvSpPr>
-          <p:cNvPr id="2" name="Title 1"/>
-          <p:cNvSpPr>
-            <a:spLocks noGrp="1"/>
-          </p:cNvSpPr>
-          <p:nvPr>
-            <p:ph type="ctrTitle"/>
-          </p:nvPr>
+          <p:cNvPr id="7" name="Rectangle 6"/>
+          <p:cNvSpPr/>
+          <p:nvPr/>
         </p:nvSpPr>
         <p:spPr>
           <a:xfrm>
-            <a:off x="684212" y="685799"/>
-            <a:ext cx="8001000" cy="2971801"/>
+            <a:off x="3175" y="6400800"/>
+            <a:ext cx="12188825" cy="457200"/>
+          </a:xfrm>
+          <a:prstGeom prst="rect">
+            <a:avLst/>
+          </a:prstGeom>
+          <a:solidFill>
+            <a:schemeClr val="accent2"/>
+          </a:solidFill>
+          <a:ln>
+            <a:noFill/>
+          </a:ln>
+        </p:spPr>
+        <p:style>
+          <a:lnRef idx="2">
+            <a:schemeClr val="accent1">
+              <a:shade val="50000"/>
+            </a:schemeClr>
+          </a:lnRef>
+          <a:fillRef idx="1">
+            <a:schemeClr val="accent1"/>
+          </a:fillRef>
+          <a:effectRef idx="0">
+            <a:schemeClr val="accent1"/>
+          </a:effectRef>
+          <a:fontRef idx="minor">
+            <a:schemeClr val="lt1"/>
+          </a:fontRef>
+        </p:style>
+      </p:sp>
+      <p:sp>
+        <p:nvSpPr>
+          <p:cNvPr id="8" name="Rectangle 7"/>
+          <p:cNvSpPr/>
+          <p:nvPr/>
+        </p:nvSpPr>
+        <p:spPr>
+          <a:xfrm>
+            <a:off x="15" y="6334316"/>
+            <a:ext cx="12188825" cy="64008"/>
+          </a:xfrm>
+          <a:prstGeom prst="rect">
+            <a:avLst/>
+          </a:prstGeom>
+          <a:solidFill>
+            <a:schemeClr val="accent1"/>
+          </a:solidFill>
+          <a:ln>
+            <a:noFill/>
+          </a:ln>
+        </p:spPr>
+        <p:style>
+          <a:lnRef idx="2">
+            <a:schemeClr val="accent1">
+              <a:shade val="50000"/>
+            </a:schemeClr>
+          </a:lnRef>
+          <a:fillRef idx="1">
+            <a:schemeClr val="accent1"/>
+          </a:fillRef>
+          <a:effectRef idx="0">
+            <a:schemeClr val="accent1"/>
+          </a:effectRef>
+          <a:fontRef idx="minor">
+            <a:schemeClr val="lt1"/>
+          </a:fontRef>
+        </p:style>
+      </p:sp>
+      <p:sp>
+        <p:nvSpPr>
+          <p:cNvPr id="2" name="Title 1"/>
+          <p:cNvSpPr>
+            <a:spLocks noGrp="1"/>
+          </p:cNvSpPr>
+          <p:nvPr>
+            <p:ph type="ctrTitle"/>
+          </p:nvPr>
+        </p:nvSpPr>
+        <p:spPr>
+          <a:xfrm>
+            <a:off x="1097280" y="758952"/>
+            <a:ext cx="10058400" cy="3566160"/>
           </a:xfrm>
         </p:spPr>
         <p:txBody>
@@ -162,8 +243,16 @@
           </a:bodyPr>
           <a:lstStyle>
             <a:lvl1pPr algn="l">
-              <a:defRPr sz="4800">
-                <a:effectLst/>
+              <a:lnSpc>
+                <a:spcPct val="85000"/>
+              </a:lnSpc>
+              <a:defRPr sz="8000" spc="-50" baseline="0">
+                <a:solidFill>
+                  <a:schemeClr val="tx1">
+                    <a:lumMod val="85000"/>
+                    <a:lumOff val="15000"/>
+                  </a:schemeClr>
+                </a:solidFill>
               </a:defRPr>
             </a:lvl1pPr>
           </a:lstStyle>
@@ -188,102 +277,55 @@
         </p:nvSpPr>
         <p:spPr>
           <a:xfrm>
-            <a:off x="684212" y="3843867"/>
-            <a:ext cx="6400800" cy="1947333"/>
+            <a:off x="1100051" y="4455620"/>
+            <a:ext cx="10058400" cy="1143000"/>
           </a:xfrm>
         </p:spPr>
         <p:txBody>
-          <a:bodyPr anchor="t">
+          <a:bodyPr lIns="91440" rIns="91440">
             <a:normAutofit/>
           </a:bodyPr>
           <a:lstStyle>
             <a:lvl1pPr marL="0" indent="0" algn="l">
               <a:buNone/>
-              <a:defRPr sz="2100">
+              <a:defRPr sz="2400" cap="all" spc="200" baseline="0">
                 <a:solidFill>
-                  <a:schemeClr val="tx1"/>
+                  <a:schemeClr val="tx2"/>
                 </a:solidFill>
+                <a:latin typeface="+mj-lt"/>
               </a:defRPr>
             </a:lvl1pPr>
             <a:lvl2pPr marL="457200" indent="0" algn="ctr">
               <a:buNone/>
-              <a:defRPr>
-                <a:solidFill>
-                  <a:schemeClr val="tx1">
-                    <a:tint val="75000"/>
-                  </a:schemeClr>
-                </a:solidFill>
-              </a:defRPr>
+              <a:defRPr sz="2400"/>
             </a:lvl2pPr>
             <a:lvl3pPr marL="914400" indent="0" algn="ctr">
               <a:buNone/>
-              <a:defRPr>
-                <a:solidFill>
-                  <a:schemeClr val="tx1">
-                    <a:tint val="75000"/>
-                  </a:schemeClr>
-                </a:solidFill>
-              </a:defRPr>
+              <a:defRPr sz="2400"/>
             </a:lvl3pPr>
             <a:lvl4pPr marL="1371600" indent="0" algn="ctr">
               <a:buNone/>
-              <a:defRPr>
-                <a:solidFill>
-                  <a:schemeClr val="tx1">
-                    <a:tint val="75000"/>
-                  </a:schemeClr>
-                </a:solidFill>
-              </a:defRPr>
+              <a:defRPr sz="2000"/>
             </a:lvl4pPr>
             <a:lvl5pPr marL="1828800" indent="0" algn="ctr">
               <a:buNone/>
-              <a:defRPr>
-                <a:solidFill>
-                  <a:schemeClr val="tx1">
-                    <a:tint val="75000"/>
-                  </a:schemeClr>
-                </a:solidFill>
-              </a:defRPr>
+              <a:defRPr sz="2000"/>
             </a:lvl5pPr>
             <a:lvl6pPr marL="2286000" indent="0" algn="ctr">
               <a:buNone/>
-              <a:defRPr>
-                <a:solidFill>
-                  <a:schemeClr val="tx1">
-                    <a:tint val="75000"/>
-                  </a:schemeClr>
-                </a:solidFill>
-              </a:defRPr>
+              <a:defRPr sz="2000"/>
             </a:lvl6pPr>
             <a:lvl7pPr marL="2743200" indent="0" algn="ctr">
               <a:buNone/>
-              <a:defRPr>
-                <a:solidFill>
-                  <a:schemeClr val="tx1">
-                    <a:tint val="75000"/>
-                  </a:schemeClr>
-                </a:solidFill>
-              </a:defRPr>
+              <a:defRPr sz="2000"/>
             </a:lvl7pPr>
             <a:lvl8pPr marL="3200400" indent="0" algn="ctr">
               <a:buNone/>
-              <a:defRPr>
-                <a:solidFill>
-                  <a:schemeClr val="tx1">
-                    <a:tint val="75000"/>
-                  </a:schemeClr>
-                </a:solidFill>
-              </a:defRPr>
+              <a:defRPr sz="2000"/>
             </a:lvl8pPr>
             <a:lvl9pPr marL="3657600" indent="0" algn="ctr">
               <a:buNone/>
-              <a:defRPr>
-                <a:solidFill>
-                  <a:schemeClr val="tx1">
-                    <a:tint val="75000"/>
-                  </a:schemeClr>
-                </a:solidFill>
-              </a:defRPr>
+              <a:defRPr sz="2000"/>
             </a:lvl9pPr>
           </a:lstStyle>
           <a:p>
@@ -362,172 +404,35 @@
       </p:sp>
       <p:cxnSp>
         <p:nvCxnSpPr>
-          <p:cNvPr id="16" name="Straight Connector 15"/>
+          <p:cNvPr id="9" name="Straight Connector 8"/>
           <p:cNvCxnSpPr/>
           <p:nvPr/>
         </p:nvCxnSpPr>
         <p:spPr>
-          <a:xfrm flipH="1">
-            <a:off x="8228012" y="8467"/>
-            <a:ext cx="3810000" cy="3810000"/>
+          <a:xfrm>
+            <a:off x="1207658" y="4343400"/>
+            <a:ext cx="9875520" cy="0"/>
           </a:xfrm>
           <a:prstGeom prst="line">
             <a:avLst/>
           </a:prstGeom>
-          <a:ln w="12700">
+          <a:ln w="6350">
             <a:solidFill>
-              <a:schemeClr val="tx1"/>
+              <a:schemeClr val="tx1">
+                <a:lumMod val="50000"/>
+                <a:lumOff val="50000"/>
+              </a:schemeClr>
             </a:solidFill>
           </a:ln>
         </p:spPr>
         <p:style>
-          <a:lnRef idx="2">
+          <a:lnRef idx="1">
             <a:schemeClr val="accent1"/>
           </a:lnRef>
           <a:fillRef idx="0">
             <a:schemeClr val="accent1"/>
           </a:fillRef>
-          <a:effectRef idx="1">
-            <a:schemeClr val="accent1"/>
-          </a:effectRef>
-          <a:fontRef idx="minor">
-            <a:schemeClr val="tx1"/>
-          </a:fontRef>
-        </p:style>
-      </p:cxnSp>
-      <p:cxnSp>
-        <p:nvCxnSpPr>
-          <p:cNvPr id="17" name="Straight Connector 16"/>
-          <p:cNvCxnSpPr/>
-          <p:nvPr/>
-        </p:nvCxnSpPr>
-        <p:spPr>
-          <a:xfrm flipH="1">
-            <a:off x="6108170" y="91545"/>
-            <a:ext cx="6080655" cy="6080655"/>
-          </a:xfrm>
-          <a:prstGeom prst="line">
-            <a:avLst/>
-          </a:prstGeom>
-          <a:ln w="12700">
-            <a:solidFill>
-              <a:schemeClr val="tx1"/>
-            </a:solidFill>
-          </a:ln>
-        </p:spPr>
-        <p:style>
-          <a:lnRef idx="2">
-            <a:schemeClr val="accent1"/>
-          </a:lnRef>
-          <a:fillRef idx="0">
-            <a:schemeClr val="accent1"/>
-          </a:fillRef>
-          <a:effectRef idx="1">
-            <a:schemeClr val="accent1"/>
-          </a:effectRef>
-          <a:fontRef idx="minor">
-            <a:schemeClr val="tx1"/>
-          </a:fontRef>
-        </p:style>
-      </p:cxnSp>
-      <p:cxnSp>
-        <p:nvCxnSpPr>
-          <p:cNvPr id="19" name="Straight Connector 18"/>
-          <p:cNvCxnSpPr/>
-          <p:nvPr/>
-        </p:nvCxnSpPr>
-        <p:spPr>
-          <a:xfrm flipH="1">
-            <a:off x="7235825" y="228600"/>
-            <a:ext cx="4953000" cy="4953000"/>
-          </a:xfrm>
-          <a:prstGeom prst="line">
-            <a:avLst/>
-          </a:prstGeom>
-          <a:ln w="12700">
-            <a:solidFill>
-              <a:schemeClr val="tx1"/>
-            </a:solidFill>
-          </a:ln>
-        </p:spPr>
-        <p:style>
-          <a:lnRef idx="2">
-            <a:schemeClr val="accent1"/>
-          </a:lnRef>
-          <a:fillRef idx="0">
-            <a:schemeClr val="accent1"/>
-          </a:fillRef>
-          <a:effectRef idx="1">
-            <a:schemeClr val="accent1"/>
-          </a:effectRef>
-          <a:fontRef idx="minor">
-            <a:schemeClr val="tx1"/>
-          </a:fontRef>
-        </p:style>
-      </p:cxnSp>
-      <p:cxnSp>
-        <p:nvCxnSpPr>
-          <p:cNvPr id="21" name="Straight Connector 20"/>
-          <p:cNvCxnSpPr/>
-          <p:nvPr/>
-        </p:nvCxnSpPr>
-        <p:spPr>
-          <a:xfrm flipH="1">
-            <a:off x="7335837" y="32278"/>
-            <a:ext cx="4852989" cy="4852989"/>
-          </a:xfrm>
-          <a:prstGeom prst="line">
-            <a:avLst/>
-          </a:prstGeom>
-          <a:ln w="31750">
-            <a:solidFill>
-              <a:schemeClr val="tx1"/>
-            </a:solidFill>
-          </a:ln>
-        </p:spPr>
-        <p:style>
-          <a:lnRef idx="2">
-            <a:schemeClr val="accent1"/>
-          </a:lnRef>
-          <a:fillRef idx="0">
-            <a:schemeClr val="accent1"/>
-          </a:fillRef>
-          <a:effectRef idx="1">
-            <a:schemeClr val="accent1"/>
-          </a:effectRef>
-          <a:fontRef idx="minor">
-            <a:schemeClr val="tx1"/>
-          </a:fontRef>
-        </p:style>
-      </p:cxnSp>
-      <p:cxnSp>
-        <p:nvCxnSpPr>
-          <p:cNvPr id="23" name="Straight Connector 22"/>
-          <p:cNvCxnSpPr/>
-          <p:nvPr/>
-        </p:nvCxnSpPr>
-        <p:spPr>
-          <a:xfrm flipH="1">
-            <a:off x="7845426" y="609601"/>
-            <a:ext cx="4343399" cy="4343399"/>
-          </a:xfrm>
-          <a:prstGeom prst="line">
-            <a:avLst/>
-          </a:prstGeom>
-          <a:ln w="31750">
-            <a:solidFill>
-              <a:schemeClr val="tx1"/>
-            </a:solidFill>
-          </a:ln>
-        </p:spPr>
-        <p:style>
-          <a:lnRef idx="2">
-            <a:schemeClr val="accent1"/>
-          </a:lnRef>
-          <a:fillRef idx="0">
-            <a:schemeClr val="accent1"/>
-          </a:fillRef>
-          <a:effectRef idx="1">
+          <a:effectRef idx="0">
             <a:schemeClr val="accent1"/>
           </a:effectRef>
           <a:fontRef idx="minor">
@@ -538,7 +443,7 @@
     </p:spTree>
     <p:extLst>
       <p:ext uri="{BB962C8B-B14F-4D97-AF65-F5344CB8AC3E}">
-        <p14:creationId xmlns:p14="http://schemas.microsoft.com/office/powerpoint/2010/main" val="744439643"/>
+        <p14:creationId xmlns:p14="http://schemas.microsoft.com/office/powerpoint/2010/main" val="1535023179"/>
       </p:ext>
     </p:extLst>
   </p:cSld>
@@ -549,1802 +454,6 @@
 </file>
 
 <file path=ppt/slideLayouts/slideLayout10.xml><?xml version="1.0" encoding="utf-8"?>
-<p:sldLayout xmlns:a="http://schemas.openxmlformats.org/drawingml/2006/main" xmlns:r="http://schemas.openxmlformats.org/officeDocument/2006/relationships" xmlns:p="http://schemas.openxmlformats.org/presentationml/2006/main" preserve="1">
-  <p:cSld name="Панорамная фотография с подписью">
-    <p:spTree>
-      <p:nvGrpSpPr>
-        <p:cNvPr id="1" name=""/>
-        <p:cNvGrpSpPr/>
-        <p:nvPr/>
-      </p:nvGrpSpPr>
-      <p:grpSpPr>
-        <a:xfrm>
-          <a:off x="0" y="0"/>
-          <a:ext cx="0" cy="0"/>
-          <a:chOff x="0" y="0"/>
-          <a:chExt cx="0" cy="0"/>
-        </a:xfrm>
-      </p:grpSpPr>
-      <p:sp>
-        <p:nvSpPr>
-          <p:cNvPr id="2" name="Title 1"/>
-          <p:cNvSpPr>
-            <a:spLocks noGrp="1"/>
-          </p:cNvSpPr>
-          <p:nvPr>
-            <p:ph type="title"/>
-          </p:nvPr>
-        </p:nvSpPr>
-        <p:spPr/>
-        <p:txBody>
-          <a:bodyPr/>
-          <a:lstStyle/>
-          <a:p>
-            <a:r>
-              <a:rPr lang="ru-RU" smtClean="0"/>
-              <a:t>Образец заголовка</a:t>
-            </a:r>
-            <a:endParaRPr lang="en-US" dirty="0"/>
-          </a:p>
-        </p:txBody>
-      </p:sp>
-      <p:sp>
-        <p:nvSpPr>
-          <p:cNvPr id="17" name="Picture Placeholder 2"/>
-          <p:cNvSpPr>
-            <a:spLocks noGrp="1" noChangeAspect="1"/>
-          </p:cNvSpPr>
-          <p:nvPr>
-            <p:ph type="pic" idx="13"/>
-          </p:nvPr>
-        </p:nvSpPr>
-        <p:spPr>
-          <a:xfrm>
-            <a:off x="685800" y="533400"/>
-            <a:ext cx="10818812" cy="3124200"/>
-          </a:xfrm>
-          <a:prstGeom prst="snip2DiagRect">
-            <a:avLst>
-              <a:gd name="adj1" fmla="val 10815"/>
-              <a:gd name="adj2" fmla="val 0"/>
-            </a:avLst>
-          </a:prstGeom>
-          <a:ln w="15875">
-            <a:solidFill>
-              <a:schemeClr val="tx1">
-                <a:alpha val="40000"/>
-              </a:schemeClr>
-            </a:solidFill>
-          </a:ln>
-          <a:effectLst>
-            <a:innerShdw blurRad="57150" dist="38100" dir="14460000">
-              <a:srgbClr val="000000">
-                <a:alpha val="70000"/>
-              </a:srgbClr>
-            </a:innerShdw>
-          </a:effectLst>
-        </p:spPr>
-        <p:txBody>
-          <a:bodyPr anchor="t">
-            <a:normAutofit/>
-          </a:bodyPr>
-          <a:lstStyle>
-            <a:lvl1pPr marL="0" indent="0" algn="ctr">
-              <a:buNone/>
-              <a:defRPr sz="1600"/>
-            </a:lvl1pPr>
-            <a:lvl2pPr marL="457200" indent="0">
-              <a:buNone/>
-              <a:defRPr sz="1600"/>
-            </a:lvl2pPr>
-            <a:lvl3pPr marL="914400" indent="0">
-              <a:buNone/>
-              <a:defRPr sz="1600"/>
-            </a:lvl3pPr>
-            <a:lvl4pPr marL="1371600" indent="0">
-              <a:buNone/>
-              <a:defRPr sz="1600"/>
-            </a:lvl4pPr>
-            <a:lvl5pPr marL="1828800" indent="0">
-              <a:buNone/>
-              <a:defRPr sz="1600"/>
-            </a:lvl5pPr>
-            <a:lvl6pPr marL="2286000" indent="0">
-              <a:buNone/>
-              <a:defRPr sz="1600"/>
-            </a:lvl6pPr>
-            <a:lvl7pPr marL="2743200" indent="0">
-              <a:buNone/>
-              <a:defRPr sz="1600"/>
-            </a:lvl7pPr>
-            <a:lvl8pPr marL="3200400" indent="0">
-              <a:buNone/>
-              <a:defRPr sz="1600"/>
-            </a:lvl8pPr>
-            <a:lvl9pPr marL="3657600" indent="0">
-              <a:buNone/>
-              <a:defRPr sz="1600"/>
-            </a:lvl9pPr>
-          </a:lstStyle>
-          <a:p>
-            <a:r>
-              <a:rPr lang="ru-RU" smtClean="0"/>
-              <a:t>Вставка рисунка</a:t>
-            </a:r>
-            <a:endParaRPr lang="en-US" dirty="0"/>
-          </a:p>
-        </p:txBody>
-      </p:sp>
-      <p:sp>
-        <p:nvSpPr>
-          <p:cNvPr id="16" name="Text Placeholder 9"/>
-          <p:cNvSpPr>
-            <a:spLocks noGrp="1"/>
-          </p:cNvSpPr>
-          <p:nvPr>
-            <p:ph type="body" sz="quarter" idx="14"/>
-          </p:nvPr>
-        </p:nvSpPr>
-        <p:spPr>
-          <a:xfrm>
-            <a:off x="914402" y="3843867"/>
-            <a:ext cx="8304210" cy="457200"/>
-          </a:xfrm>
-        </p:spPr>
-        <p:txBody>
-          <a:bodyPr anchor="t">
-            <a:normAutofit/>
-          </a:bodyPr>
-          <a:lstStyle>
-            <a:lvl1pPr marL="0" indent="0">
-              <a:buFontTx/>
-              <a:buNone/>
-              <a:defRPr sz="1600"/>
-            </a:lvl1pPr>
-            <a:lvl2pPr marL="457200" indent="0">
-              <a:buFontTx/>
-              <a:buNone/>
-              <a:defRPr/>
-            </a:lvl2pPr>
-            <a:lvl3pPr marL="914400" indent="0">
-              <a:buFontTx/>
-              <a:buNone/>
-              <a:defRPr/>
-            </a:lvl3pPr>
-            <a:lvl4pPr marL="1371600" indent="0">
-              <a:buFontTx/>
-              <a:buNone/>
-              <a:defRPr/>
-            </a:lvl4pPr>
-            <a:lvl5pPr marL="1828800" indent="0">
-              <a:buFontTx/>
-              <a:buNone/>
-              <a:defRPr/>
-            </a:lvl5pPr>
-          </a:lstStyle>
-          <a:p>
-            <a:pPr lvl="0"/>
-            <a:r>
-              <a:rPr lang="ru-RU" smtClean="0"/>
-              <a:t>Образец текста</a:t>
-            </a:r>
-          </a:p>
-        </p:txBody>
-      </p:sp>
-      <p:sp>
-        <p:nvSpPr>
-          <p:cNvPr id="3" name="Date Placeholder 2"/>
-          <p:cNvSpPr>
-            <a:spLocks noGrp="1"/>
-          </p:cNvSpPr>
-          <p:nvPr>
-            <p:ph type="dt" sz="half" idx="10"/>
-          </p:nvPr>
-        </p:nvSpPr>
-        <p:spPr/>
-        <p:txBody>
-          <a:bodyPr/>
-          <a:lstStyle/>
-          <a:p>
-            <a:fld id="{67E61FDA-2067-495C-9275-88CBF639CEF9}" type="datetimeFigureOut">
-              <a:rPr lang="ru-RU" smtClean="0"/>
-              <a:t>09.04.2026</a:t>
-            </a:fld>
-            <a:endParaRPr lang="ru-RU"/>
-          </a:p>
-        </p:txBody>
-      </p:sp>
-      <p:sp>
-        <p:nvSpPr>
-          <p:cNvPr id="4" name="Footer Placeholder 3"/>
-          <p:cNvSpPr>
-            <a:spLocks noGrp="1"/>
-          </p:cNvSpPr>
-          <p:nvPr>
-            <p:ph type="ftr" sz="quarter" idx="11"/>
-          </p:nvPr>
-        </p:nvSpPr>
-        <p:spPr/>
-        <p:txBody>
-          <a:bodyPr/>
-          <a:lstStyle/>
-          <a:p>
-            <a:endParaRPr lang="ru-RU"/>
-          </a:p>
-        </p:txBody>
-      </p:sp>
-      <p:sp>
-        <p:nvSpPr>
-          <p:cNvPr id="5" name="Slide Number Placeholder 4"/>
-          <p:cNvSpPr>
-            <a:spLocks noGrp="1"/>
-          </p:cNvSpPr>
-          <p:nvPr>
-            <p:ph type="sldNum" sz="quarter" idx="12"/>
-          </p:nvPr>
-        </p:nvSpPr>
-        <p:spPr/>
-        <p:txBody>
-          <a:bodyPr/>
-          <a:lstStyle/>
-          <a:p>
-            <a:fld id="{5747A71D-55D4-4A3B-88E7-51FB5CB450FE}" type="slidenum">
-              <a:rPr lang="ru-RU" smtClean="0"/>
-              <a:t>‹#›</a:t>
-            </a:fld>
-            <a:endParaRPr lang="ru-RU"/>
-          </a:p>
-        </p:txBody>
-      </p:sp>
-    </p:spTree>
-    <p:extLst>
-      <p:ext uri="{BB962C8B-B14F-4D97-AF65-F5344CB8AC3E}">
-        <p14:creationId xmlns:p14="http://schemas.microsoft.com/office/powerpoint/2010/main" val="4189480690"/>
-      </p:ext>
-    </p:extLst>
-  </p:cSld>
-  <p:clrMapOvr>
-    <a:masterClrMapping/>
-  </p:clrMapOvr>
-</p:sldLayout>
-</file>
-
-<file path=ppt/slideLayouts/slideLayout11.xml><?xml version="1.0" encoding="utf-8"?>
-<p:sldLayout xmlns:a="http://schemas.openxmlformats.org/drawingml/2006/main" xmlns:r="http://schemas.openxmlformats.org/officeDocument/2006/relationships" xmlns:p="http://schemas.openxmlformats.org/presentationml/2006/main" preserve="1">
-  <p:cSld name="Заголовок и подпись">
-    <p:spTree>
-      <p:nvGrpSpPr>
-        <p:cNvPr id="1" name=""/>
-        <p:cNvGrpSpPr/>
-        <p:nvPr/>
-      </p:nvGrpSpPr>
-      <p:grpSpPr>
-        <a:xfrm>
-          <a:off x="0" y="0"/>
-          <a:ext cx="0" cy="0"/>
-          <a:chOff x="0" y="0"/>
-          <a:chExt cx="0" cy="0"/>
-        </a:xfrm>
-      </p:grpSpPr>
-      <p:sp>
-        <p:nvSpPr>
-          <p:cNvPr id="2" name="Title 1"/>
-          <p:cNvSpPr>
-            <a:spLocks noGrp="1"/>
-          </p:cNvSpPr>
-          <p:nvPr>
-            <p:ph type="title"/>
-          </p:nvPr>
-        </p:nvSpPr>
-        <p:spPr>
-          <a:xfrm>
-            <a:off x="684213" y="685800"/>
-            <a:ext cx="10058400" cy="2743200"/>
-          </a:xfrm>
-        </p:spPr>
-        <p:txBody>
-          <a:bodyPr anchor="ctr">
-            <a:normAutofit/>
-          </a:bodyPr>
-          <a:lstStyle>
-            <a:lvl1pPr algn="l">
-              <a:defRPr sz="3200" b="0" cap="all"/>
-            </a:lvl1pPr>
-          </a:lstStyle>
-          <a:p>
-            <a:r>
-              <a:rPr lang="ru-RU" smtClean="0"/>
-              <a:t>Образец заголовка</a:t>
-            </a:r>
-            <a:endParaRPr lang="en-US" dirty="0"/>
-          </a:p>
-        </p:txBody>
-      </p:sp>
-      <p:sp>
-        <p:nvSpPr>
-          <p:cNvPr id="3" name="Text Placeholder 2"/>
-          <p:cNvSpPr>
-            <a:spLocks noGrp="1"/>
-          </p:cNvSpPr>
-          <p:nvPr>
-            <p:ph type="body" idx="1"/>
-          </p:nvPr>
-        </p:nvSpPr>
-        <p:spPr>
-          <a:xfrm>
-            <a:off x="684212" y="4114800"/>
-            <a:ext cx="8535988" cy="1879600"/>
-          </a:xfrm>
-        </p:spPr>
-        <p:txBody>
-          <a:bodyPr anchor="ctr">
-            <a:normAutofit/>
-          </a:bodyPr>
-          <a:lstStyle>
-            <a:lvl1pPr marL="0" indent="0" algn="l">
-              <a:buNone/>
-              <a:defRPr sz="2000">
-                <a:solidFill>
-                  <a:schemeClr val="tx1"/>
-                </a:solidFill>
-              </a:defRPr>
-            </a:lvl1pPr>
-            <a:lvl2pPr marL="457200" indent="0">
-              <a:buNone/>
-              <a:defRPr sz="1800">
-                <a:solidFill>
-                  <a:schemeClr val="tx1">
-                    <a:tint val="75000"/>
-                  </a:schemeClr>
-                </a:solidFill>
-              </a:defRPr>
-            </a:lvl2pPr>
-            <a:lvl3pPr marL="914400" indent="0">
-              <a:buNone/>
-              <a:defRPr sz="1600">
-                <a:solidFill>
-                  <a:schemeClr val="tx1">
-                    <a:tint val="75000"/>
-                  </a:schemeClr>
-                </a:solidFill>
-              </a:defRPr>
-            </a:lvl3pPr>
-            <a:lvl4pPr marL="1371600" indent="0">
-              <a:buNone/>
-              <a:defRPr sz="1400">
-                <a:solidFill>
-                  <a:schemeClr val="tx1">
-                    <a:tint val="75000"/>
-                  </a:schemeClr>
-                </a:solidFill>
-              </a:defRPr>
-            </a:lvl4pPr>
-            <a:lvl5pPr marL="1828800" indent="0">
-              <a:buNone/>
-              <a:defRPr sz="1400">
-                <a:solidFill>
-                  <a:schemeClr val="tx1">
-                    <a:tint val="75000"/>
-                  </a:schemeClr>
-                </a:solidFill>
-              </a:defRPr>
-            </a:lvl5pPr>
-            <a:lvl6pPr marL="2286000" indent="0">
-              <a:buNone/>
-              <a:defRPr sz="1400">
-                <a:solidFill>
-                  <a:schemeClr val="tx1">
-                    <a:tint val="75000"/>
-                  </a:schemeClr>
-                </a:solidFill>
-              </a:defRPr>
-            </a:lvl6pPr>
-            <a:lvl7pPr marL="2743200" indent="0">
-              <a:buNone/>
-              <a:defRPr sz="1400">
-                <a:solidFill>
-                  <a:schemeClr val="tx1">
-                    <a:tint val="75000"/>
-                  </a:schemeClr>
-                </a:solidFill>
-              </a:defRPr>
-            </a:lvl7pPr>
-            <a:lvl8pPr marL="3200400" indent="0">
-              <a:buNone/>
-              <a:defRPr sz="1400">
-                <a:solidFill>
-                  <a:schemeClr val="tx1">
-                    <a:tint val="75000"/>
-                  </a:schemeClr>
-                </a:solidFill>
-              </a:defRPr>
-            </a:lvl8pPr>
-            <a:lvl9pPr marL="3657600" indent="0">
-              <a:buNone/>
-              <a:defRPr sz="1400">
-                <a:solidFill>
-                  <a:schemeClr val="tx1">
-                    <a:tint val="75000"/>
-                  </a:schemeClr>
-                </a:solidFill>
-              </a:defRPr>
-            </a:lvl9pPr>
-          </a:lstStyle>
-          <a:p>
-            <a:pPr lvl="0"/>
-            <a:r>
-              <a:rPr lang="ru-RU" smtClean="0"/>
-              <a:t>Образец текста</a:t>
-            </a:r>
-          </a:p>
-        </p:txBody>
-      </p:sp>
-      <p:sp>
-        <p:nvSpPr>
-          <p:cNvPr id="4" name="Date Placeholder 3"/>
-          <p:cNvSpPr>
-            <a:spLocks noGrp="1"/>
-          </p:cNvSpPr>
-          <p:nvPr>
-            <p:ph type="dt" sz="half" idx="10"/>
-          </p:nvPr>
-        </p:nvSpPr>
-        <p:spPr/>
-        <p:txBody>
-          <a:bodyPr/>
-          <a:lstStyle/>
-          <a:p>
-            <a:fld id="{67E61FDA-2067-495C-9275-88CBF639CEF9}" type="datetimeFigureOut">
-              <a:rPr lang="ru-RU" smtClean="0"/>
-              <a:t>09.04.2026</a:t>
-            </a:fld>
-            <a:endParaRPr lang="ru-RU"/>
-          </a:p>
-        </p:txBody>
-      </p:sp>
-      <p:sp>
-        <p:nvSpPr>
-          <p:cNvPr id="5" name="Footer Placeholder 4"/>
-          <p:cNvSpPr>
-            <a:spLocks noGrp="1"/>
-          </p:cNvSpPr>
-          <p:nvPr>
-            <p:ph type="ftr" sz="quarter" idx="11"/>
-          </p:nvPr>
-        </p:nvSpPr>
-        <p:spPr/>
-        <p:txBody>
-          <a:bodyPr/>
-          <a:lstStyle/>
-          <a:p>
-            <a:endParaRPr lang="ru-RU"/>
-          </a:p>
-        </p:txBody>
-      </p:sp>
-      <p:sp>
-        <p:nvSpPr>
-          <p:cNvPr id="6" name="Slide Number Placeholder 5"/>
-          <p:cNvSpPr>
-            <a:spLocks noGrp="1"/>
-          </p:cNvSpPr>
-          <p:nvPr>
-            <p:ph type="sldNum" sz="quarter" idx="12"/>
-          </p:nvPr>
-        </p:nvSpPr>
-        <p:spPr/>
-        <p:txBody>
-          <a:bodyPr/>
-          <a:lstStyle/>
-          <a:p>
-            <a:fld id="{5747A71D-55D4-4A3B-88E7-51FB5CB450FE}" type="slidenum">
-              <a:rPr lang="ru-RU" smtClean="0"/>
-              <a:t>‹#›</a:t>
-            </a:fld>
-            <a:endParaRPr lang="ru-RU"/>
-          </a:p>
-        </p:txBody>
-      </p:sp>
-    </p:spTree>
-    <p:extLst>
-      <p:ext uri="{BB962C8B-B14F-4D97-AF65-F5344CB8AC3E}">
-        <p14:creationId xmlns:p14="http://schemas.microsoft.com/office/powerpoint/2010/main" val="686084119"/>
-      </p:ext>
-    </p:extLst>
-  </p:cSld>
-  <p:clrMapOvr>
-    <a:masterClrMapping/>
-  </p:clrMapOvr>
-</p:sldLayout>
-</file>
-
-<file path=ppt/slideLayouts/slideLayout12.xml><?xml version="1.0" encoding="utf-8"?>
-<p:sldLayout xmlns:a="http://schemas.openxmlformats.org/drawingml/2006/main" xmlns:r="http://schemas.openxmlformats.org/officeDocument/2006/relationships" xmlns:p="http://schemas.openxmlformats.org/presentationml/2006/main" preserve="1">
-  <p:cSld name="Цитата с подписью">
-    <p:spTree>
-      <p:nvGrpSpPr>
-        <p:cNvPr id="1" name=""/>
-        <p:cNvGrpSpPr/>
-        <p:nvPr/>
-      </p:nvGrpSpPr>
-      <p:grpSpPr>
-        <a:xfrm>
-          <a:off x="0" y="0"/>
-          <a:ext cx="0" cy="0"/>
-          <a:chOff x="0" y="0"/>
-          <a:chExt cx="0" cy="0"/>
-        </a:xfrm>
-      </p:grpSpPr>
-      <p:sp>
-        <p:nvSpPr>
-          <p:cNvPr id="2" name="Title 1"/>
-          <p:cNvSpPr>
-            <a:spLocks noGrp="1"/>
-          </p:cNvSpPr>
-          <p:nvPr>
-            <p:ph type="title"/>
-          </p:nvPr>
-        </p:nvSpPr>
-        <p:spPr>
-          <a:xfrm>
-            <a:off x="1141411" y="685800"/>
-            <a:ext cx="9144001" cy="2743200"/>
-          </a:xfrm>
-        </p:spPr>
-        <p:txBody>
-          <a:bodyPr anchor="ctr">
-            <a:normAutofit/>
-          </a:bodyPr>
-          <a:lstStyle>
-            <a:lvl1pPr algn="l">
-              <a:defRPr sz="3200" b="0" cap="all">
-                <a:solidFill>
-                  <a:schemeClr val="tx1"/>
-                </a:solidFill>
-              </a:defRPr>
-            </a:lvl1pPr>
-          </a:lstStyle>
-          <a:p>
-            <a:r>
-              <a:rPr lang="ru-RU" smtClean="0"/>
-              <a:t>Образец заголовка</a:t>
-            </a:r>
-            <a:endParaRPr lang="en-US" dirty="0"/>
-          </a:p>
-        </p:txBody>
-      </p:sp>
-      <p:sp>
-        <p:nvSpPr>
-          <p:cNvPr id="10" name="Text Placeholder 9"/>
-          <p:cNvSpPr>
-            <a:spLocks noGrp="1"/>
-          </p:cNvSpPr>
-          <p:nvPr>
-            <p:ph type="body" sz="quarter" idx="13"/>
-          </p:nvPr>
-        </p:nvSpPr>
-        <p:spPr>
-          <a:xfrm>
-            <a:off x="1446212" y="3429000"/>
-            <a:ext cx="8534400" cy="381000"/>
-          </a:xfrm>
-        </p:spPr>
-        <p:txBody>
-          <a:bodyPr anchor="ctr"/>
-          <a:lstStyle>
-            <a:lvl1pPr marL="0" indent="0">
-              <a:buFontTx/>
-              <a:buNone/>
-              <a:defRPr/>
-            </a:lvl1pPr>
-            <a:lvl2pPr marL="457200" indent="0">
-              <a:buFontTx/>
-              <a:buNone/>
-              <a:defRPr/>
-            </a:lvl2pPr>
-            <a:lvl3pPr marL="914400" indent="0">
-              <a:buFontTx/>
-              <a:buNone/>
-              <a:defRPr/>
-            </a:lvl3pPr>
-            <a:lvl4pPr marL="1371600" indent="0">
-              <a:buFontTx/>
-              <a:buNone/>
-              <a:defRPr/>
-            </a:lvl4pPr>
-            <a:lvl5pPr marL="1828800" indent="0">
-              <a:buFontTx/>
-              <a:buNone/>
-              <a:defRPr/>
-            </a:lvl5pPr>
-          </a:lstStyle>
-          <a:p>
-            <a:pPr lvl="0"/>
-            <a:r>
-              <a:rPr lang="ru-RU" smtClean="0"/>
-              <a:t>Образец текста</a:t>
-            </a:r>
-          </a:p>
-        </p:txBody>
-      </p:sp>
-      <p:sp>
-        <p:nvSpPr>
-          <p:cNvPr id="3" name="Text Placeholder 2"/>
-          <p:cNvSpPr>
-            <a:spLocks noGrp="1"/>
-          </p:cNvSpPr>
-          <p:nvPr>
-            <p:ph type="body" idx="1"/>
-          </p:nvPr>
-        </p:nvSpPr>
-        <p:spPr>
-          <a:xfrm>
-            <a:off x="684213" y="4301067"/>
-            <a:ext cx="8534400" cy="1684865"/>
-          </a:xfrm>
-        </p:spPr>
-        <p:txBody>
-          <a:bodyPr anchor="ctr">
-            <a:normAutofit/>
-          </a:bodyPr>
-          <a:lstStyle>
-            <a:lvl1pPr marL="0" indent="0" algn="l">
-              <a:buNone/>
-              <a:defRPr sz="2000">
-                <a:solidFill>
-                  <a:schemeClr val="tx1"/>
-                </a:solidFill>
-              </a:defRPr>
-            </a:lvl1pPr>
-            <a:lvl2pPr marL="457200" indent="0">
-              <a:buNone/>
-              <a:defRPr sz="1800">
-                <a:solidFill>
-                  <a:schemeClr val="tx1">
-                    <a:tint val="75000"/>
-                  </a:schemeClr>
-                </a:solidFill>
-              </a:defRPr>
-            </a:lvl2pPr>
-            <a:lvl3pPr marL="914400" indent="0">
-              <a:buNone/>
-              <a:defRPr sz="1600">
-                <a:solidFill>
-                  <a:schemeClr val="tx1">
-                    <a:tint val="75000"/>
-                  </a:schemeClr>
-                </a:solidFill>
-              </a:defRPr>
-            </a:lvl3pPr>
-            <a:lvl4pPr marL="1371600" indent="0">
-              <a:buNone/>
-              <a:defRPr sz="1400">
-                <a:solidFill>
-                  <a:schemeClr val="tx1">
-                    <a:tint val="75000"/>
-                  </a:schemeClr>
-                </a:solidFill>
-              </a:defRPr>
-            </a:lvl4pPr>
-            <a:lvl5pPr marL="1828800" indent="0">
-              <a:buNone/>
-              <a:defRPr sz="1400">
-                <a:solidFill>
-                  <a:schemeClr val="tx1">
-                    <a:tint val="75000"/>
-                  </a:schemeClr>
-                </a:solidFill>
-              </a:defRPr>
-            </a:lvl5pPr>
-            <a:lvl6pPr marL="2286000" indent="0">
-              <a:buNone/>
-              <a:defRPr sz="1400">
-                <a:solidFill>
-                  <a:schemeClr val="tx1">
-                    <a:tint val="75000"/>
-                  </a:schemeClr>
-                </a:solidFill>
-              </a:defRPr>
-            </a:lvl6pPr>
-            <a:lvl7pPr marL="2743200" indent="0">
-              <a:buNone/>
-              <a:defRPr sz="1400">
-                <a:solidFill>
-                  <a:schemeClr val="tx1">
-                    <a:tint val="75000"/>
-                  </a:schemeClr>
-                </a:solidFill>
-              </a:defRPr>
-            </a:lvl7pPr>
-            <a:lvl8pPr marL="3200400" indent="0">
-              <a:buNone/>
-              <a:defRPr sz="1400">
-                <a:solidFill>
-                  <a:schemeClr val="tx1">
-                    <a:tint val="75000"/>
-                  </a:schemeClr>
-                </a:solidFill>
-              </a:defRPr>
-            </a:lvl8pPr>
-            <a:lvl9pPr marL="3657600" indent="0">
-              <a:buNone/>
-              <a:defRPr sz="1400">
-                <a:solidFill>
-                  <a:schemeClr val="tx1">
-                    <a:tint val="75000"/>
-                  </a:schemeClr>
-                </a:solidFill>
-              </a:defRPr>
-            </a:lvl9pPr>
-          </a:lstStyle>
-          <a:p>
-            <a:pPr lvl="0"/>
-            <a:r>
-              <a:rPr lang="ru-RU" smtClean="0"/>
-              <a:t>Образец текста</a:t>
-            </a:r>
-          </a:p>
-        </p:txBody>
-      </p:sp>
-      <p:sp>
-        <p:nvSpPr>
-          <p:cNvPr id="4" name="Date Placeholder 3"/>
-          <p:cNvSpPr>
-            <a:spLocks noGrp="1"/>
-          </p:cNvSpPr>
-          <p:nvPr>
-            <p:ph type="dt" sz="half" idx="10"/>
-          </p:nvPr>
-        </p:nvSpPr>
-        <p:spPr/>
-        <p:txBody>
-          <a:bodyPr/>
-          <a:lstStyle/>
-          <a:p>
-            <a:fld id="{67E61FDA-2067-495C-9275-88CBF639CEF9}" type="datetimeFigureOut">
-              <a:rPr lang="ru-RU" smtClean="0"/>
-              <a:t>09.04.2026</a:t>
-            </a:fld>
-            <a:endParaRPr lang="ru-RU"/>
-          </a:p>
-        </p:txBody>
-      </p:sp>
-      <p:sp>
-        <p:nvSpPr>
-          <p:cNvPr id="5" name="Footer Placeholder 4"/>
-          <p:cNvSpPr>
-            <a:spLocks noGrp="1"/>
-          </p:cNvSpPr>
-          <p:nvPr>
-            <p:ph type="ftr" sz="quarter" idx="11"/>
-          </p:nvPr>
-        </p:nvSpPr>
-        <p:spPr/>
-        <p:txBody>
-          <a:bodyPr/>
-          <a:lstStyle/>
-          <a:p>
-            <a:endParaRPr lang="ru-RU"/>
-          </a:p>
-        </p:txBody>
-      </p:sp>
-      <p:sp>
-        <p:nvSpPr>
-          <p:cNvPr id="6" name="Slide Number Placeholder 5"/>
-          <p:cNvSpPr>
-            <a:spLocks noGrp="1"/>
-          </p:cNvSpPr>
-          <p:nvPr>
-            <p:ph type="sldNum" sz="quarter" idx="12"/>
-          </p:nvPr>
-        </p:nvSpPr>
-        <p:spPr/>
-        <p:txBody>
-          <a:bodyPr/>
-          <a:lstStyle/>
-          <a:p>
-            <a:fld id="{5747A71D-55D4-4A3B-88E7-51FB5CB450FE}" type="slidenum">
-              <a:rPr lang="ru-RU" smtClean="0"/>
-              <a:t>‹#›</a:t>
-            </a:fld>
-            <a:endParaRPr lang="ru-RU"/>
-          </a:p>
-        </p:txBody>
-      </p:sp>
-      <p:sp>
-        <p:nvSpPr>
-          <p:cNvPr id="14" name="TextBox 13"/>
-          <p:cNvSpPr txBox="1"/>
-          <p:nvPr/>
-        </p:nvSpPr>
-        <p:spPr>
-          <a:xfrm>
-            <a:off x="531812" y="812222"/>
-            <a:ext cx="609600" cy="584776"/>
-          </a:xfrm>
-          <a:prstGeom prst="rect">
-            <a:avLst/>
-          </a:prstGeom>
-        </p:spPr>
-        <p:txBody>
-          <a:bodyPr vert="horz" lIns="91440" tIns="45720" rIns="91440" bIns="45720" rtlCol="0" anchor="ctr">
-            <a:noAutofit/>
-          </a:bodyPr>
-          <a:lstStyle/>
-          <a:p>
-            <a:pPr lvl="0"/>
-            <a:r>
-              <a:rPr lang="en-US" sz="8000" dirty="0">
-                <a:solidFill>
-                  <a:schemeClr val="tx1"/>
-                </a:solidFill>
-                <a:effectLst/>
-              </a:rPr>
-              <a:t>“</a:t>
-            </a:r>
-          </a:p>
-        </p:txBody>
-      </p:sp>
-      <p:sp>
-        <p:nvSpPr>
-          <p:cNvPr id="15" name="TextBox 14"/>
-          <p:cNvSpPr txBox="1"/>
-          <p:nvPr/>
-        </p:nvSpPr>
-        <p:spPr>
-          <a:xfrm>
-            <a:off x="10285412" y="2768601"/>
-            <a:ext cx="609600" cy="584776"/>
-          </a:xfrm>
-          <a:prstGeom prst="rect">
-            <a:avLst/>
-          </a:prstGeom>
-        </p:spPr>
-        <p:txBody>
-          <a:bodyPr vert="horz" lIns="91440" tIns="45720" rIns="91440" bIns="45720" rtlCol="0" anchor="ctr">
-            <a:noAutofit/>
-          </a:bodyPr>
-          <a:lstStyle/>
-          <a:p>
-            <a:pPr lvl="0" algn="r"/>
-            <a:r>
-              <a:rPr lang="en-US" sz="8000" dirty="0">
-                <a:solidFill>
-                  <a:schemeClr val="tx1"/>
-                </a:solidFill>
-                <a:effectLst/>
-              </a:rPr>
-              <a:t>”</a:t>
-            </a:r>
-          </a:p>
-        </p:txBody>
-      </p:sp>
-    </p:spTree>
-    <p:extLst>
-      <p:ext uri="{BB962C8B-B14F-4D97-AF65-F5344CB8AC3E}">
-        <p14:creationId xmlns:p14="http://schemas.microsoft.com/office/powerpoint/2010/main" val="2462068521"/>
-      </p:ext>
-    </p:extLst>
-  </p:cSld>
-  <p:clrMapOvr>
-    <a:masterClrMapping/>
-  </p:clrMapOvr>
-</p:sldLayout>
-</file>
-
-<file path=ppt/slideLayouts/slideLayout13.xml><?xml version="1.0" encoding="utf-8"?>
-<p:sldLayout xmlns:a="http://schemas.openxmlformats.org/drawingml/2006/main" xmlns:r="http://schemas.openxmlformats.org/officeDocument/2006/relationships" xmlns:p="http://schemas.openxmlformats.org/presentationml/2006/main" preserve="1">
-  <p:cSld name="Карточка имени">
-    <p:spTree>
-      <p:nvGrpSpPr>
-        <p:cNvPr id="1" name=""/>
-        <p:cNvGrpSpPr/>
-        <p:nvPr/>
-      </p:nvGrpSpPr>
-      <p:grpSpPr>
-        <a:xfrm>
-          <a:off x="0" y="0"/>
-          <a:ext cx="0" cy="0"/>
-          <a:chOff x="0" y="0"/>
-          <a:chExt cx="0" cy="0"/>
-        </a:xfrm>
-      </p:grpSpPr>
-      <p:sp>
-        <p:nvSpPr>
-          <p:cNvPr id="2" name="Title 1"/>
-          <p:cNvSpPr>
-            <a:spLocks noGrp="1"/>
-          </p:cNvSpPr>
-          <p:nvPr>
-            <p:ph type="title"/>
-          </p:nvPr>
-        </p:nvSpPr>
-        <p:spPr>
-          <a:xfrm>
-            <a:off x="684212" y="3429000"/>
-            <a:ext cx="8534400" cy="1697400"/>
-          </a:xfrm>
-        </p:spPr>
-        <p:txBody>
-          <a:bodyPr anchor="b">
-            <a:normAutofit/>
-          </a:bodyPr>
-          <a:lstStyle>
-            <a:lvl1pPr algn="l">
-              <a:defRPr sz="3200" b="0" cap="all"/>
-            </a:lvl1pPr>
-          </a:lstStyle>
-          <a:p>
-            <a:r>
-              <a:rPr lang="ru-RU" smtClean="0"/>
-              <a:t>Образец заголовка</a:t>
-            </a:r>
-            <a:endParaRPr lang="en-US" dirty="0"/>
-          </a:p>
-        </p:txBody>
-      </p:sp>
-      <p:sp>
-        <p:nvSpPr>
-          <p:cNvPr id="3" name="Text Placeholder 2"/>
-          <p:cNvSpPr>
-            <a:spLocks noGrp="1"/>
-          </p:cNvSpPr>
-          <p:nvPr>
-            <p:ph type="body" idx="1"/>
-          </p:nvPr>
-        </p:nvSpPr>
-        <p:spPr>
-          <a:xfrm>
-            <a:off x="684211" y="5132981"/>
-            <a:ext cx="8535990" cy="860400"/>
-          </a:xfrm>
-        </p:spPr>
-        <p:txBody>
-          <a:bodyPr anchor="t">
-            <a:normAutofit/>
-          </a:bodyPr>
-          <a:lstStyle>
-            <a:lvl1pPr marL="0" indent="0" algn="l">
-              <a:buNone/>
-              <a:defRPr sz="2000">
-                <a:solidFill>
-                  <a:schemeClr val="tx1"/>
-                </a:solidFill>
-              </a:defRPr>
-            </a:lvl1pPr>
-            <a:lvl2pPr marL="457200" indent="0">
-              <a:buNone/>
-              <a:defRPr sz="1800">
-                <a:solidFill>
-                  <a:schemeClr val="tx1">
-                    <a:tint val="75000"/>
-                  </a:schemeClr>
-                </a:solidFill>
-              </a:defRPr>
-            </a:lvl2pPr>
-            <a:lvl3pPr marL="914400" indent="0">
-              <a:buNone/>
-              <a:defRPr sz="1600">
-                <a:solidFill>
-                  <a:schemeClr val="tx1">
-                    <a:tint val="75000"/>
-                  </a:schemeClr>
-                </a:solidFill>
-              </a:defRPr>
-            </a:lvl3pPr>
-            <a:lvl4pPr marL="1371600" indent="0">
-              <a:buNone/>
-              <a:defRPr sz="1400">
-                <a:solidFill>
-                  <a:schemeClr val="tx1">
-                    <a:tint val="75000"/>
-                  </a:schemeClr>
-                </a:solidFill>
-              </a:defRPr>
-            </a:lvl4pPr>
-            <a:lvl5pPr marL="1828800" indent="0">
-              <a:buNone/>
-              <a:defRPr sz="1400">
-                <a:solidFill>
-                  <a:schemeClr val="tx1">
-                    <a:tint val="75000"/>
-                  </a:schemeClr>
-                </a:solidFill>
-              </a:defRPr>
-            </a:lvl5pPr>
-            <a:lvl6pPr marL="2286000" indent="0">
-              <a:buNone/>
-              <a:defRPr sz="1400">
-                <a:solidFill>
-                  <a:schemeClr val="tx1">
-                    <a:tint val="75000"/>
-                  </a:schemeClr>
-                </a:solidFill>
-              </a:defRPr>
-            </a:lvl6pPr>
-            <a:lvl7pPr marL="2743200" indent="0">
-              <a:buNone/>
-              <a:defRPr sz="1400">
-                <a:solidFill>
-                  <a:schemeClr val="tx1">
-                    <a:tint val="75000"/>
-                  </a:schemeClr>
-                </a:solidFill>
-              </a:defRPr>
-            </a:lvl7pPr>
-            <a:lvl8pPr marL="3200400" indent="0">
-              <a:buNone/>
-              <a:defRPr sz="1400">
-                <a:solidFill>
-                  <a:schemeClr val="tx1">
-                    <a:tint val="75000"/>
-                  </a:schemeClr>
-                </a:solidFill>
-              </a:defRPr>
-            </a:lvl8pPr>
-            <a:lvl9pPr marL="3657600" indent="0">
-              <a:buNone/>
-              <a:defRPr sz="1400">
-                <a:solidFill>
-                  <a:schemeClr val="tx1">
-                    <a:tint val="75000"/>
-                  </a:schemeClr>
-                </a:solidFill>
-              </a:defRPr>
-            </a:lvl9pPr>
-          </a:lstStyle>
-          <a:p>
-            <a:pPr lvl="0"/>
-            <a:r>
-              <a:rPr lang="ru-RU" smtClean="0"/>
-              <a:t>Образец текста</a:t>
-            </a:r>
-          </a:p>
-        </p:txBody>
-      </p:sp>
-      <p:sp>
-        <p:nvSpPr>
-          <p:cNvPr id="4" name="Date Placeholder 3"/>
-          <p:cNvSpPr>
-            <a:spLocks noGrp="1"/>
-          </p:cNvSpPr>
-          <p:nvPr>
-            <p:ph type="dt" sz="half" idx="10"/>
-          </p:nvPr>
-        </p:nvSpPr>
-        <p:spPr/>
-        <p:txBody>
-          <a:bodyPr/>
-          <a:lstStyle/>
-          <a:p>
-            <a:fld id="{67E61FDA-2067-495C-9275-88CBF639CEF9}" type="datetimeFigureOut">
-              <a:rPr lang="ru-RU" smtClean="0"/>
-              <a:t>09.04.2026</a:t>
-            </a:fld>
-            <a:endParaRPr lang="ru-RU"/>
-          </a:p>
-        </p:txBody>
-      </p:sp>
-      <p:sp>
-        <p:nvSpPr>
-          <p:cNvPr id="5" name="Footer Placeholder 4"/>
-          <p:cNvSpPr>
-            <a:spLocks noGrp="1"/>
-          </p:cNvSpPr>
-          <p:nvPr>
-            <p:ph type="ftr" sz="quarter" idx="11"/>
-          </p:nvPr>
-        </p:nvSpPr>
-        <p:spPr/>
-        <p:txBody>
-          <a:bodyPr/>
-          <a:lstStyle/>
-          <a:p>
-            <a:endParaRPr lang="ru-RU"/>
-          </a:p>
-        </p:txBody>
-      </p:sp>
-      <p:sp>
-        <p:nvSpPr>
-          <p:cNvPr id="6" name="Slide Number Placeholder 5"/>
-          <p:cNvSpPr>
-            <a:spLocks noGrp="1"/>
-          </p:cNvSpPr>
-          <p:nvPr>
-            <p:ph type="sldNum" sz="quarter" idx="12"/>
-          </p:nvPr>
-        </p:nvSpPr>
-        <p:spPr/>
-        <p:txBody>
-          <a:bodyPr/>
-          <a:lstStyle/>
-          <a:p>
-            <a:fld id="{5747A71D-55D4-4A3B-88E7-51FB5CB450FE}" type="slidenum">
-              <a:rPr lang="ru-RU" smtClean="0"/>
-              <a:t>‹#›</a:t>
-            </a:fld>
-            <a:endParaRPr lang="ru-RU"/>
-          </a:p>
-        </p:txBody>
-      </p:sp>
-    </p:spTree>
-    <p:extLst>
-      <p:ext uri="{BB962C8B-B14F-4D97-AF65-F5344CB8AC3E}">
-        <p14:creationId xmlns:p14="http://schemas.microsoft.com/office/powerpoint/2010/main" val="1556440520"/>
-      </p:ext>
-    </p:extLst>
-  </p:cSld>
-  <p:clrMapOvr>
-    <a:masterClrMapping/>
-  </p:clrMapOvr>
-</p:sldLayout>
-</file>
-
-<file path=ppt/slideLayouts/slideLayout14.xml><?xml version="1.0" encoding="utf-8"?>
-<p:sldLayout xmlns:a="http://schemas.openxmlformats.org/drawingml/2006/main" xmlns:r="http://schemas.openxmlformats.org/officeDocument/2006/relationships" xmlns:p="http://schemas.openxmlformats.org/presentationml/2006/main" preserve="1">
-  <p:cSld name="Цитата карточки имени">
-    <p:spTree>
-      <p:nvGrpSpPr>
-        <p:cNvPr id="1" name=""/>
-        <p:cNvGrpSpPr/>
-        <p:nvPr/>
-      </p:nvGrpSpPr>
-      <p:grpSpPr>
-        <a:xfrm>
-          <a:off x="0" y="0"/>
-          <a:ext cx="0" cy="0"/>
-          <a:chOff x="0" y="0"/>
-          <a:chExt cx="0" cy="0"/>
-        </a:xfrm>
-      </p:grpSpPr>
-      <p:sp>
-        <p:nvSpPr>
-          <p:cNvPr id="2" name="Title 1"/>
-          <p:cNvSpPr>
-            <a:spLocks noGrp="1"/>
-          </p:cNvSpPr>
-          <p:nvPr>
-            <p:ph type="title"/>
-          </p:nvPr>
-        </p:nvSpPr>
-        <p:spPr>
-          <a:xfrm>
-            <a:off x="1141413" y="685800"/>
-            <a:ext cx="9144000" cy="2743200"/>
-          </a:xfrm>
-        </p:spPr>
-        <p:txBody>
-          <a:bodyPr anchor="ctr">
-            <a:normAutofit/>
-          </a:bodyPr>
-          <a:lstStyle>
-            <a:lvl1pPr algn="l">
-              <a:defRPr sz="3200" b="0" cap="all">
-                <a:solidFill>
-                  <a:schemeClr val="tx1"/>
-                </a:solidFill>
-              </a:defRPr>
-            </a:lvl1pPr>
-          </a:lstStyle>
-          <a:p>
-            <a:r>
-              <a:rPr lang="ru-RU" smtClean="0"/>
-              <a:t>Образец заголовка</a:t>
-            </a:r>
-            <a:endParaRPr lang="en-US" dirty="0"/>
-          </a:p>
-        </p:txBody>
-      </p:sp>
-      <p:sp>
-        <p:nvSpPr>
-          <p:cNvPr id="10" name="Text Placeholder 9"/>
-          <p:cNvSpPr>
-            <a:spLocks noGrp="1"/>
-          </p:cNvSpPr>
-          <p:nvPr>
-            <p:ph type="body" sz="quarter" idx="13"/>
-          </p:nvPr>
-        </p:nvSpPr>
-        <p:spPr>
-          <a:xfrm>
-            <a:off x="684212" y="3928534"/>
-            <a:ext cx="8534401" cy="1049866"/>
-          </a:xfrm>
-        </p:spPr>
-        <p:txBody>
-          <a:bodyPr vert="horz" lIns="91440" tIns="45720" rIns="91440" bIns="45720" rtlCol="0" anchor="b">
-            <a:normAutofit/>
-          </a:bodyPr>
-          <a:lstStyle>
-            <a:lvl1pPr>
-              <a:buNone/>
-              <a:defRPr lang="en-US" sz="2400" b="0" cap="all" dirty="0">
-                <a:ln w="3175" cmpd="sng">
-                  <a:noFill/>
-                </a:ln>
-                <a:solidFill>
-                  <a:schemeClr val="tx1"/>
-                </a:solidFill>
-                <a:effectLst/>
-              </a:defRPr>
-            </a:lvl1pPr>
-          </a:lstStyle>
-          <a:p>
-            <a:pPr marL="0" lvl="0">
-              <a:spcBef>
-                <a:spcPct val="0"/>
-              </a:spcBef>
-              <a:buNone/>
-            </a:pPr>
-            <a:r>
-              <a:rPr lang="ru-RU" smtClean="0"/>
-              <a:t>Образец текста</a:t>
-            </a:r>
-          </a:p>
-        </p:txBody>
-      </p:sp>
-      <p:sp>
-        <p:nvSpPr>
-          <p:cNvPr id="3" name="Text Placeholder 2"/>
-          <p:cNvSpPr>
-            <a:spLocks noGrp="1"/>
-          </p:cNvSpPr>
-          <p:nvPr>
-            <p:ph type="body" idx="1"/>
-          </p:nvPr>
-        </p:nvSpPr>
-        <p:spPr>
-          <a:xfrm>
-            <a:off x="684211" y="4978400"/>
-            <a:ext cx="8534401" cy="1016000"/>
-          </a:xfrm>
-        </p:spPr>
-        <p:txBody>
-          <a:bodyPr anchor="t">
-            <a:normAutofit/>
-          </a:bodyPr>
-          <a:lstStyle>
-            <a:lvl1pPr marL="0" indent="0" algn="l">
-              <a:buNone/>
-              <a:defRPr sz="1800">
-                <a:solidFill>
-                  <a:schemeClr val="tx1"/>
-                </a:solidFill>
-              </a:defRPr>
-            </a:lvl1pPr>
-            <a:lvl2pPr marL="457200" indent="0">
-              <a:buNone/>
-              <a:defRPr sz="1800">
-                <a:solidFill>
-                  <a:schemeClr val="tx1">
-                    <a:tint val="75000"/>
-                  </a:schemeClr>
-                </a:solidFill>
-              </a:defRPr>
-            </a:lvl2pPr>
-            <a:lvl3pPr marL="914400" indent="0">
-              <a:buNone/>
-              <a:defRPr sz="1600">
-                <a:solidFill>
-                  <a:schemeClr val="tx1">
-                    <a:tint val="75000"/>
-                  </a:schemeClr>
-                </a:solidFill>
-              </a:defRPr>
-            </a:lvl3pPr>
-            <a:lvl4pPr marL="1371600" indent="0">
-              <a:buNone/>
-              <a:defRPr sz="1400">
-                <a:solidFill>
-                  <a:schemeClr val="tx1">
-                    <a:tint val="75000"/>
-                  </a:schemeClr>
-                </a:solidFill>
-              </a:defRPr>
-            </a:lvl4pPr>
-            <a:lvl5pPr marL="1828800" indent="0">
-              <a:buNone/>
-              <a:defRPr sz="1400">
-                <a:solidFill>
-                  <a:schemeClr val="tx1">
-                    <a:tint val="75000"/>
-                  </a:schemeClr>
-                </a:solidFill>
-              </a:defRPr>
-            </a:lvl5pPr>
-            <a:lvl6pPr marL="2286000" indent="0">
-              <a:buNone/>
-              <a:defRPr sz="1400">
-                <a:solidFill>
-                  <a:schemeClr val="tx1">
-                    <a:tint val="75000"/>
-                  </a:schemeClr>
-                </a:solidFill>
-              </a:defRPr>
-            </a:lvl6pPr>
-            <a:lvl7pPr marL="2743200" indent="0">
-              <a:buNone/>
-              <a:defRPr sz="1400">
-                <a:solidFill>
-                  <a:schemeClr val="tx1">
-                    <a:tint val="75000"/>
-                  </a:schemeClr>
-                </a:solidFill>
-              </a:defRPr>
-            </a:lvl7pPr>
-            <a:lvl8pPr marL="3200400" indent="0">
-              <a:buNone/>
-              <a:defRPr sz="1400">
-                <a:solidFill>
-                  <a:schemeClr val="tx1">
-                    <a:tint val="75000"/>
-                  </a:schemeClr>
-                </a:solidFill>
-              </a:defRPr>
-            </a:lvl8pPr>
-            <a:lvl9pPr marL="3657600" indent="0">
-              <a:buNone/>
-              <a:defRPr sz="1400">
-                <a:solidFill>
-                  <a:schemeClr val="tx1">
-                    <a:tint val="75000"/>
-                  </a:schemeClr>
-                </a:solidFill>
-              </a:defRPr>
-            </a:lvl9pPr>
-          </a:lstStyle>
-          <a:p>
-            <a:pPr lvl="0"/>
-            <a:r>
-              <a:rPr lang="ru-RU" smtClean="0"/>
-              <a:t>Образец текста</a:t>
-            </a:r>
-          </a:p>
-        </p:txBody>
-      </p:sp>
-      <p:sp>
-        <p:nvSpPr>
-          <p:cNvPr id="4" name="Date Placeholder 3"/>
-          <p:cNvSpPr>
-            <a:spLocks noGrp="1"/>
-          </p:cNvSpPr>
-          <p:nvPr>
-            <p:ph type="dt" sz="half" idx="10"/>
-          </p:nvPr>
-        </p:nvSpPr>
-        <p:spPr/>
-        <p:txBody>
-          <a:bodyPr/>
-          <a:lstStyle/>
-          <a:p>
-            <a:fld id="{67E61FDA-2067-495C-9275-88CBF639CEF9}" type="datetimeFigureOut">
-              <a:rPr lang="ru-RU" smtClean="0"/>
-              <a:t>09.04.2026</a:t>
-            </a:fld>
-            <a:endParaRPr lang="ru-RU"/>
-          </a:p>
-        </p:txBody>
-      </p:sp>
-      <p:sp>
-        <p:nvSpPr>
-          <p:cNvPr id="5" name="Footer Placeholder 4"/>
-          <p:cNvSpPr>
-            <a:spLocks noGrp="1"/>
-          </p:cNvSpPr>
-          <p:nvPr>
-            <p:ph type="ftr" sz="quarter" idx="11"/>
-          </p:nvPr>
-        </p:nvSpPr>
-        <p:spPr/>
-        <p:txBody>
-          <a:bodyPr/>
-          <a:lstStyle/>
-          <a:p>
-            <a:endParaRPr lang="ru-RU"/>
-          </a:p>
-        </p:txBody>
-      </p:sp>
-      <p:sp>
-        <p:nvSpPr>
-          <p:cNvPr id="6" name="Slide Number Placeholder 5"/>
-          <p:cNvSpPr>
-            <a:spLocks noGrp="1"/>
-          </p:cNvSpPr>
-          <p:nvPr>
-            <p:ph type="sldNum" sz="quarter" idx="12"/>
-          </p:nvPr>
-        </p:nvSpPr>
-        <p:spPr/>
-        <p:txBody>
-          <a:bodyPr/>
-          <a:lstStyle/>
-          <a:p>
-            <a:fld id="{5747A71D-55D4-4A3B-88E7-51FB5CB450FE}" type="slidenum">
-              <a:rPr lang="ru-RU" smtClean="0"/>
-              <a:t>‹#›</a:t>
-            </a:fld>
-            <a:endParaRPr lang="ru-RU"/>
-          </a:p>
-        </p:txBody>
-      </p:sp>
-      <p:sp>
-        <p:nvSpPr>
-          <p:cNvPr id="11" name="TextBox 10"/>
-          <p:cNvSpPr txBox="1"/>
-          <p:nvPr/>
-        </p:nvSpPr>
-        <p:spPr>
-          <a:xfrm>
-            <a:off x="531812" y="812222"/>
-            <a:ext cx="609600" cy="584776"/>
-          </a:xfrm>
-          <a:prstGeom prst="rect">
-            <a:avLst/>
-          </a:prstGeom>
-        </p:spPr>
-        <p:txBody>
-          <a:bodyPr vert="horz" lIns="91440" tIns="45720" rIns="91440" bIns="45720" rtlCol="0" anchor="ctr">
-            <a:noAutofit/>
-          </a:bodyPr>
-          <a:lstStyle/>
-          <a:p>
-            <a:pPr lvl="0"/>
-            <a:r>
-              <a:rPr lang="en-US" sz="8000" dirty="0">
-                <a:solidFill>
-                  <a:schemeClr val="tx1"/>
-                </a:solidFill>
-                <a:effectLst/>
-              </a:rPr>
-              <a:t>“</a:t>
-            </a:r>
-          </a:p>
-        </p:txBody>
-      </p:sp>
-      <p:sp>
-        <p:nvSpPr>
-          <p:cNvPr id="12" name="TextBox 11"/>
-          <p:cNvSpPr txBox="1"/>
-          <p:nvPr/>
-        </p:nvSpPr>
-        <p:spPr>
-          <a:xfrm>
-            <a:off x="10285412" y="2768601"/>
-            <a:ext cx="609600" cy="584776"/>
-          </a:xfrm>
-          <a:prstGeom prst="rect">
-            <a:avLst/>
-          </a:prstGeom>
-        </p:spPr>
-        <p:txBody>
-          <a:bodyPr vert="horz" lIns="91440" tIns="45720" rIns="91440" bIns="45720" rtlCol="0" anchor="ctr">
-            <a:noAutofit/>
-          </a:bodyPr>
-          <a:lstStyle/>
-          <a:p>
-            <a:pPr lvl="0" algn="r"/>
-            <a:r>
-              <a:rPr lang="en-US" sz="8000" dirty="0">
-                <a:solidFill>
-                  <a:schemeClr val="tx1"/>
-                </a:solidFill>
-                <a:effectLst/>
-              </a:rPr>
-              <a:t>”</a:t>
-            </a:r>
-          </a:p>
-        </p:txBody>
-      </p:sp>
-    </p:spTree>
-    <p:extLst>
-      <p:ext uri="{BB962C8B-B14F-4D97-AF65-F5344CB8AC3E}">
-        <p14:creationId xmlns:p14="http://schemas.microsoft.com/office/powerpoint/2010/main" val="634951715"/>
-      </p:ext>
-    </p:extLst>
-  </p:cSld>
-  <p:clrMapOvr>
-    <a:masterClrMapping/>
-  </p:clrMapOvr>
-</p:sldLayout>
-</file>
-
-<file path=ppt/slideLayouts/slideLayout15.xml><?xml version="1.0" encoding="utf-8"?>
-<p:sldLayout xmlns:a="http://schemas.openxmlformats.org/drawingml/2006/main" xmlns:r="http://schemas.openxmlformats.org/officeDocument/2006/relationships" xmlns:p="http://schemas.openxmlformats.org/presentationml/2006/main" preserve="1">
-  <p:cSld name="Истина или ложь">
-    <p:spTree>
-      <p:nvGrpSpPr>
-        <p:cNvPr id="1" name=""/>
-        <p:cNvGrpSpPr/>
-        <p:nvPr/>
-      </p:nvGrpSpPr>
-      <p:grpSpPr>
-        <a:xfrm>
-          <a:off x="0" y="0"/>
-          <a:ext cx="0" cy="0"/>
-          <a:chOff x="0" y="0"/>
-          <a:chExt cx="0" cy="0"/>
-        </a:xfrm>
-      </p:grpSpPr>
-      <p:sp>
-        <p:nvSpPr>
-          <p:cNvPr id="2" name="Title 1"/>
-          <p:cNvSpPr>
-            <a:spLocks noGrp="1"/>
-          </p:cNvSpPr>
-          <p:nvPr>
-            <p:ph type="title"/>
-          </p:nvPr>
-        </p:nvSpPr>
-        <p:spPr>
-          <a:xfrm>
-            <a:off x="684213" y="685800"/>
-            <a:ext cx="10058400" cy="2743200"/>
-          </a:xfrm>
-        </p:spPr>
-        <p:txBody>
-          <a:bodyPr vert="horz" lIns="91440" tIns="45720" rIns="91440" bIns="45720" rtlCol="0" anchor="ctr">
-            <a:normAutofit/>
-          </a:bodyPr>
-          <a:lstStyle>
-            <a:lvl1pPr>
-              <a:defRPr lang="en-US" b="0" dirty="0"/>
-            </a:lvl1pPr>
-          </a:lstStyle>
-          <a:p>
-            <a:pPr marL="0" lvl="0"/>
-            <a:r>
-              <a:rPr lang="ru-RU" smtClean="0"/>
-              <a:t>Образец заголовка</a:t>
-            </a:r>
-            <a:endParaRPr lang="en-US" dirty="0"/>
-          </a:p>
-        </p:txBody>
-      </p:sp>
-      <p:sp>
-        <p:nvSpPr>
-          <p:cNvPr id="10" name="Text Placeholder 9"/>
-          <p:cNvSpPr>
-            <a:spLocks noGrp="1"/>
-          </p:cNvSpPr>
-          <p:nvPr>
-            <p:ph type="body" sz="quarter" idx="13"/>
-          </p:nvPr>
-        </p:nvSpPr>
-        <p:spPr>
-          <a:xfrm>
-            <a:off x="684212" y="3928534"/>
-            <a:ext cx="8534400" cy="838200"/>
-          </a:xfrm>
-        </p:spPr>
-        <p:txBody>
-          <a:bodyPr vert="horz" lIns="91440" tIns="45720" rIns="91440" bIns="45720" rtlCol="0" anchor="b">
-            <a:normAutofit/>
-          </a:bodyPr>
-          <a:lstStyle>
-            <a:lvl1pPr>
-              <a:buNone/>
-              <a:defRPr lang="en-US" sz="2400" b="0" cap="all" dirty="0">
-                <a:ln w="3175" cmpd="sng">
-                  <a:noFill/>
-                </a:ln>
-                <a:solidFill>
-                  <a:schemeClr val="tx1"/>
-                </a:solidFill>
-                <a:effectLst/>
-              </a:defRPr>
-            </a:lvl1pPr>
-          </a:lstStyle>
-          <a:p>
-            <a:pPr marL="0" lvl="0">
-              <a:spcBef>
-                <a:spcPct val="0"/>
-              </a:spcBef>
-              <a:buNone/>
-            </a:pPr>
-            <a:r>
-              <a:rPr lang="ru-RU" smtClean="0"/>
-              <a:t>Образец текста</a:t>
-            </a:r>
-          </a:p>
-        </p:txBody>
-      </p:sp>
-      <p:sp>
-        <p:nvSpPr>
-          <p:cNvPr id="3" name="Text Placeholder 2"/>
-          <p:cNvSpPr>
-            <a:spLocks noGrp="1"/>
-          </p:cNvSpPr>
-          <p:nvPr>
-            <p:ph type="body" idx="1"/>
-          </p:nvPr>
-        </p:nvSpPr>
-        <p:spPr>
-          <a:xfrm>
-            <a:off x="684211" y="4766732"/>
-            <a:ext cx="8534401" cy="1227667"/>
-          </a:xfrm>
-        </p:spPr>
-        <p:txBody>
-          <a:bodyPr anchor="t">
-            <a:normAutofit/>
-          </a:bodyPr>
-          <a:lstStyle>
-            <a:lvl1pPr marL="0" indent="0" algn="l">
-              <a:buNone/>
-              <a:defRPr sz="1800">
-                <a:solidFill>
-                  <a:schemeClr val="tx1"/>
-                </a:solidFill>
-              </a:defRPr>
-            </a:lvl1pPr>
-            <a:lvl2pPr marL="457200" indent="0">
-              <a:buNone/>
-              <a:defRPr sz="1800">
-                <a:solidFill>
-                  <a:schemeClr val="tx1">
-                    <a:tint val="75000"/>
-                  </a:schemeClr>
-                </a:solidFill>
-              </a:defRPr>
-            </a:lvl2pPr>
-            <a:lvl3pPr marL="914400" indent="0">
-              <a:buNone/>
-              <a:defRPr sz="1600">
-                <a:solidFill>
-                  <a:schemeClr val="tx1">
-                    <a:tint val="75000"/>
-                  </a:schemeClr>
-                </a:solidFill>
-              </a:defRPr>
-            </a:lvl3pPr>
-            <a:lvl4pPr marL="1371600" indent="0">
-              <a:buNone/>
-              <a:defRPr sz="1400">
-                <a:solidFill>
-                  <a:schemeClr val="tx1">
-                    <a:tint val="75000"/>
-                  </a:schemeClr>
-                </a:solidFill>
-              </a:defRPr>
-            </a:lvl4pPr>
-            <a:lvl5pPr marL="1828800" indent="0">
-              <a:buNone/>
-              <a:defRPr sz="1400">
-                <a:solidFill>
-                  <a:schemeClr val="tx1">
-                    <a:tint val="75000"/>
-                  </a:schemeClr>
-                </a:solidFill>
-              </a:defRPr>
-            </a:lvl5pPr>
-            <a:lvl6pPr marL="2286000" indent="0">
-              <a:buNone/>
-              <a:defRPr sz="1400">
-                <a:solidFill>
-                  <a:schemeClr val="tx1">
-                    <a:tint val="75000"/>
-                  </a:schemeClr>
-                </a:solidFill>
-              </a:defRPr>
-            </a:lvl6pPr>
-            <a:lvl7pPr marL="2743200" indent="0">
-              <a:buNone/>
-              <a:defRPr sz="1400">
-                <a:solidFill>
-                  <a:schemeClr val="tx1">
-                    <a:tint val="75000"/>
-                  </a:schemeClr>
-                </a:solidFill>
-              </a:defRPr>
-            </a:lvl7pPr>
-            <a:lvl8pPr marL="3200400" indent="0">
-              <a:buNone/>
-              <a:defRPr sz="1400">
-                <a:solidFill>
-                  <a:schemeClr val="tx1">
-                    <a:tint val="75000"/>
-                  </a:schemeClr>
-                </a:solidFill>
-              </a:defRPr>
-            </a:lvl8pPr>
-            <a:lvl9pPr marL="3657600" indent="0">
-              <a:buNone/>
-              <a:defRPr sz="1400">
-                <a:solidFill>
-                  <a:schemeClr val="tx1">
-                    <a:tint val="75000"/>
-                  </a:schemeClr>
-                </a:solidFill>
-              </a:defRPr>
-            </a:lvl9pPr>
-          </a:lstStyle>
-          <a:p>
-            <a:pPr lvl="0"/>
-            <a:r>
-              <a:rPr lang="ru-RU" smtClean="0"/>
-              <a:t>Образец текста</a:t>
-            </a:r>
-          </a:p>
-        </p:txBody>
-      </p:sp>
-      <p:sp>
-        <p:nvSpPr>
-          <p:cNvPr id="4" name="Date Placeholder 3"/>
-          <p:cNvSpPr>
-            <a:spLocks noGrp="1"/>
-          </p:cNvSpPr>
-          <p:nvPr>
-            <p:ph type="dt" sz="half" idx="10"/>
-          </p:nvPr>
-        </p:nvSpPr>
-        <p:spPr/>
-        <p:txBody>
-          <a:bodyPr/>
-          <a:lstStyle/>
-          <a:p>
-            <a:fld id="{67E61FDA-2067-495C-9275-88CBF639CEF9}" type="datetimeFigureOut">
-              <a:rPr lang="ru-RU" smtClean="0"/>
-              <a:t>09.04.2026</a:t>
-            </a:fld>
-            <a:endParaRPr lang="ru-RU"/>
-          </a:p>
-        </p:txBody>
-      </p:sp>
-      <p:sp>
-        <p:nvSpPr>
-          <p:cNvPr id="5" name="Footer Placeholder 4"/>
-          <p:cNvSpPr>
-            <a:spLocks noGrp="1"/>
-          </p:cNvSpPr>
-          <p:nvPr>
-            <p:ph type="ftr" sz="quarter" idx="11"/>
-          </p:nvPr>
-        </p:nvSpPr>
-        <p:spPr/>
-        <p:txBody>
-          <a:bodyPr/>
-          <a:lstStyle/>
-          <a:p>
-            <a:endParaRPr lang="ru-RU"/>
-          </a:p>
-        </p:txBody>
-      </p:sp>
-      <p:sp>
-        <p:nvSpPr>
-          <p:cNvPr id="6" name="Slide Number Placeholder 5"/>
-          <p:cNvSpPr>
-            <a:spLocks noGrp="1"/>
-          </p:cNvSpPr>
-          <p:nvPr>
-            <p:ph type="sldNum" sz="quarter" idx="12"/>
-          </p:nvPr>
-        </p:nvSpPr>
-        <p:spPr/>
-        <p:txBody>
-          <a:bodyPr/>
-          <a:lstStyle/>
-          <a:p>
-            <a:fld id="{5747A71D-55D4-4A3B-88E7-51FB5CB450FE}" type="slidenum">
-              <a:rPr lang="ru-RU" smtClean="0"/>
-              <a:t>‹#›</a:t>
-            </a:fld>
-            <a:endParaRPr lang="ru-RU"/>
-          </a:p>
-        </p:txBody>
-      </p:sp>
-    </p:spTree>
-    <p:extLst>
-      <p:ext uri="{BB962C8B-B14F-4D97-AF65-F5344CB8AC3E}">
-        <p14:creationId xmlns:p14="http://schemas.microsoft.com/office/powerpoint/2010/main" val="1901173627"/>
-      </p:ext>
-    </p:extLst>
-  </p:cSld>
-  <p:clrMapOvr>
-    <a:masterClrMapping/>
-  </p:clrMapOvr>
-</p:sldLayout>
-</file>
-
-<file path=ppt/slideLayouts/slideLayout16.xml><?xml version="1.0" encoding="utf-8"?>
 <p:sldLayout xmlns:a="http://schemas.openxmlformats.org/drawingml/2006/main" xmlns:r="http://schemas.openxmlformats.org/officeDocument/2006/relationships" xmlns:p="http://schemas.openxmlformats.org/presentationml/2006/main" type="vertTx" preserve="1">
   <p:cSld name="Заголовок и вертикальный текст">
     <p:spTree>
@@ -2374,11 +483,7 @@
         <p:spPr/>
         <p:txBody>
           <a:bodyPr/>
-          <a:lstStyle>
-            <a:lvl1pPr algn="l">
-              <a:defRPr/>
-            </a:lvl1pPr>
-          </a:lstStyle>
+          <a:lstStyle/>
           <a:p>
             <a:r>
               <a:rPr lang="ru-RU" smtClean="0"/>
@@ -2400,7 +505,7 @@
         </p:nvSpPr>
         <p:spPr/>
         <p:txBody>
-          <a:bodyPr vert="eaVert" anchor="t"/>
+          <a:bodyPr vert="eaVert" lIns="45720" tIns="0" rIns="45720" bIns="0"/>
           <a:lstStyle/>
           <a:p>
             <a:pPr lvl="0"/>
@@ -2508,7 +613,7 @@
     </p:spTree>
     <p:extLst>
       <p:ext uri="{BB962C8B-B14F-4D97-AF65-F5344CB8AC3E}">
-        <p14:creationId xmlns:p14="http://schemas.microsoft.com/office/powerpoint/2010/main" val="3392548402"/>
+        <p14:creationId xmlns:p14="http://schemas.microsoft.com/office/powerpoint/2010/main" val="267460109"/>
       </p:ext>
     </p:extLst>
   </p:cSld>
@@ -2518,8 +623,8 @@
 </p:sldLayout>
 </file>
 
-<file path=ppt/slideLayouts/slideLayout17.xml><?xml version="1.0" encoding="utf-8"?>
-<p:sldLayout xmlns:a="http://schemas.openxmlformats.org/drawingml/2006/main" xmlns:r="http://schemas.openxmlformats.org/officeDocument/2006/relationships" xmlns:p="http://schemas.openxmlformats.org/presentationml/2006/main" type="vertTitleAndTx" preserve="1">
+<file path=ppt/slideLayouts/slideLayout11.xml><?xml version="1.0" encoding="utf-8"?>
+<p:sldLayout xmlns:a="http://schemas.openxmlformats.org/drawingml/2006/main" xmlns:r="http://schemas.openxmlformats.org/officeDocument/2006/relationships" xmlns:p="http://schemas.openxmlformats.org/presentationml/2006/main" showMasterSp="0" type="vertTitleAndTx" preserve="1">
   <p:cSld name="Вертикальный заголовок и текст">
     <p:spTree>
       <p:nvGrpSpPr>
@@ -2537,18 +642,94 @@
       </p:grpSpPr>
       <p:sp>
         <p:nvSpPr>
-          <p:cNvPr id="2" name="Vertical Title 1"/>
-          <p:cNvSpPr>
-            <a:spLocks noGrp="1"/>
-          </p:cNvSpPr>
-          <p:nvPr>
-            <p:ph type="title" orient="vert"/>
-          </p:nvPr>
+          <p:cNvPr id="7" name="Rectangle 6"/>
+          <p:cNvSpPr/>
+          <p:nvPr/>
         </p:nvSpPr>
         <p:spPr>
           <a:xfrm>
-            <a:off x="8685212" y="685800"/>
-            <a:ext cx="2057400" cy="4572000"/>
+            <a:off x="3175" y="6400800"/>
+            <a:ext cx="12188825" cy="457200"/>
+          </a:xfrm>
+          <a:prstGeom prst="rect">
+            <a:avLst/>
+          </a:prstGeom>
+          <a:solidFill>
+            <a:schemeClr val="accent2"/>
+          </a:solidFill>
+          <a:ln>
+            <a:noFill/>
+          </a:ln>
+        </p:spPr>
+        <p:style>
+          <a:lnRef idx="2">
+            <a:schemeClr val="accent1">
+              <a:shade val="50000"/>
+            </a:schemeClr>
+          </a:lnRef>
+          <a:fillRef idx="1">
+            <a:schemeClr val="accent1"/>
+          </a:fillRef>
+          <a:effectRef idx="0">
+            <a:schemeClr val="accent1"/>
+          </a:effectRef>
+          <a:fontRef idx="minor">
+            <a:schemeClr val="lt1"/>
+          </a:fontRef>
+        </p:style>
+      </p:sp>
+      <p:sp>
+        <p:nvSpPr>
+          <p:cNvPr id="8" name="Rectangle 7"/>
+          <p:cNvSpPr/>
+          <p:nvPr/>
+        </p:nvSpPr>
+        <p:spPr>
+          <a:xfrm>
+            <a:off x="15" y="6334316"/>
+            <a:ext cx="12188825" cy="64008"/>
+          </a:xfrm>
+          <a:prstGeom prst="rect">
+            <a:avLst/>
+          </a:prstGeom>
+          <a:solidFill>
+            <a:schemeClr val="accent1"/>
+          </a:solidFill>
+          <a:ln>
+            <a:noFill/>
+          </a:ln>
+        </p:spPr>
+        <p:style>
+          <a:lnRef idx="2">
+            <a:schemeClr val="accent1">
+              <a:shade val="50000"/>
+            </a:schemeClr>
+          </a:lnRef>
+          <a:fillRef idx="1">
+            <a:schemeClr val="accent1"/>
+          </a:fillRef>
+          <a:effectRef idx="0">
+            <a:schemeClr val="accent1"/>
+          </a:effectRef>
+          <a:fontRef idx="minor">
+            <a:schemeClr val="lt1"/>
+          </a:fontRef>
+        </p:style>
+      </p:sp>
+      <p:sp>
+        <p:nvSpPr>
+          <p:cNvPr id="2" name="Vertical Title 1"/>
+          <p:cNvSpPr>
+            <a:spLocks noGrp="1"/>
+          </p:cNvSpPr>
+          <p:nvPr>
+            <p:ph type="title" orient="vert"/>
+          </p:nvPr>
+        </p:nvSpPr>
+        <p:spPr>
+          <a:xfrm>
+            <a:off x="8724900" y="414778"/>
+            <a:ext cx="2628900" cy="5757421"/>
           </a:xfrm>
         </p:spPr>
         <p:txBody>
@@ -2575,12 +756,12 @@
         </p:nvSpPr>
         <p:spPr>
           <a:xfrm>
-            <a:off x="685800" y="685800"/>
-            <a:ext cx="7823200" cy="5308600"/>
+            <a:off x="838200" y="414778"/>
+            <a:ext cx="7734300" cy="5757422"/>
           </a:xfrm>
         </p:spPr>
         <p:txBody>
-          <a:bodyPr vert="eaVert" anchor="t"/>
+          <a:bodyPr vert="eaVert" lIns="45720" tIns="0" rIns="45720" bIns="0"/>
           <a:lstStyle/>
           <a:p>
             <a:pPr lvl="0"/>
@@ -2688,7 +869,7 @@
     </p:spTree>
     <p:extLst>
       <p:ext uri="{BB962C8B-B14F-4D97-AF65-F5344CB8AC3E}">
-        <p14:creationId xmlns:p14="http://schemas.microsoft.com/office/powerpoint/2010/main" val="1501693509"/>
+        <p14:creationId xmlns:p14="http://schemas.microsoft.com/office/powerpoint/2010/main" val="1955348177"/>
       </p:ext>
     </p:extLst>
   </p:cSld>
@@ -2728,7 +909,11 @@
         <p:spPr/>
         <p:txBody>
           <a:bodyPr/>
-          <a:lstStyle/>
+          <a:lstStyle>
+            <a:lvl1pPr marL="0">
+              <a:defRPr/>
+            </a:lvl1pPr>
+          </a:lstStyle>
           <a:p>
             <a:r>
               <a:rPr lang="ru-RU" smtClean="0"/>
@@ -2750,7 +935,7 @@
         </p:nvSpPr>
         <p:spPr/>
         <p:txBody>
-          <a:bodyPr anchor="ctr"/>
+          <a:bodyPr/>
           <a:lstStyle/>
           <a:p>
             <a:pPr lvl="0"/>
@@ -2858,7 +1043,7 @@
     </p:spTree>
     <p:extLst>
       <p:ext uri="{BB962C8B-B14F-4D97-AF65-F5344CB8AC3E}">
-        <p14:creationId xmlns:p14="http://schemas.microsoft.com/office/powerpoint/2010/main" val="1489359840"/>
+        <p14:creationId xmlns:p14="http://schemas.microsoft.com/office/powerpoint/2010/main" val="1011442450"/>
       </p:ext>
     </p:extLst>
   </p:cSld>
@@ -2869,8 +1054,16 @@
 </file>
 
 <file path=ppt/slideLayouts/slideLayout3.xml><?xml version="1.0" encoding="utf-8"?>
-<p:sldLayout xmlns:a="http://schemas.openxmlformats.org/drawingml/2006/main" xmlns:r="http://schemas.openxmlformats.org/officeDocument/2006/relationships" xmlns:p="http://schemas.openxmlformats.org/presentationml/2006/main" type="secHead" preserve="1">
+<p:sldLayout xmlns:a="http://schemas.openxmlformats.org/drawingml/2006/main" xmlns:r="http://schemas.openxmlformats.org/officeDocument/2006/relationships" xmlns:p="http://schemas.openxmlformats.org/presentationml/2006/main" showMasterSp="0" type="secHead" preserve="1">
   <p:cSld name="Заголовок раздела">
+    <p:bg>
+      <p:bgPr>
+        <a:solidFill>
+          <a:schemeClr val="bg1"/>
+        </a:solidFill>
+        <a:effectLst/>
+      </p:bgPr>
+    </p:bg>
     <p:spTree>
       <p:nvGrpSpPr>
         <p:cNvPr id="1" name=""/>
@@ -2887,27 +1080,113 @@
       </p:grpSpPr>
       <p:sp>
         <p:nvSpPr>
-          <p:cNvPr id="2" name="Title 1"/>
-          <p:cNvSpPr>
-            <a:spLocks noGrp="1"/>
-          </p:cNvSpPr>
-          <p:nvPr>
-            <p:ph type="title"/>
-          </p:nvPr>
+          <p:cNvPr id="7" name="Rectangle 6"/>
+          <p:cNvSpPr/>
+          <p:nvPr/>
         </p:nvSpPr>
         <p:spPr>
           <a:xfrm>
-            <a:off x="684211" y="2006600"/>
-            <a:ext cx="8534401" cy="2281600"/>
+            <a:off x="3175" y="6400800"/>
+            <a:ext cx="12188825" cy="457200"/>
+          </a:xfrm>
+          <a:prstGeom prst="rect">
+            <a:avLst/>
+          </a:prstGeom>
+          <a:solidFill>
+            <a:schemeClr val="accent2"/>
+          </a:solidFill>
+          <a:ln>
+            <a:noFill/>
+          </a:ln>
+        </p:spPr>
+        <p:style>
+          <a:lnRef idx="2">
+            <a:schemeClr val="accent1">
+              <a:shade val="50000"/>
+            </a:schemeClr>
+          </a:lnRef>
+          <a:fillRef idx="1">
+            <a:schemeClr val="accent1"/>
+          </a:fillRef>
+          <a:effectRef idx="0">
+            <a:schemeClr val="accent1"/>
+          </a:effectRef>
+          <a:fontRef idx="minor">
+            <a:schemeClr val="lt1"/>
+          </a:fontRef>
+        </p:style>
+      </p:sp>
+      <p:sp>
+        <p:nvSpPr>
+          <p:cNvPr id="8" name="Rectangle 7"/>
+          <p:cNvSpPr/>
+          <p:nvPr/>
+        </p:nvSpPr>
+        <p:spPr>
+          <a:xfrm>
+            <a:off x="15" y="6334316"/>
+            <a:ext cx="12188825" cy="64008"/>
+          </a:xfrm>
+          <a:prstGeom prst="rect">
+            <a:avLst/>
+          </a:prstGeom>
+          <a:solidFill>
+            <a:schemeClr val="accent1"/>
+          </a:solidFill>
+          <a:ln>
+            <a:noFill/>
+          </a:ln>
+        </p:spPr>
+        <p:style>
+          <a:lnRef idx="2">
+            <a:schemeClr val="accent1">
+              <a:shade val="50000"/>
+            </a:schemeClr>
+          </a:lnRef>
+          <a:fillRef idx="1">
+            <a:schemeClr val="accent1"/>
+          </a:fillRef>
+          <a:effectRef idx="0">
+            <a:schemeClr val="accent1"/>
+          </a:effectRef>
+          <a:fontRef idx="minor">
+            <a:schemeClr val="lt1"/>
+          </a:fontRef>
+        </p:style>
+      </p:sp>
+      <p:sp>
+        <p:nvSpPr>
+          <p:cNvPr id="2" name="Title 1"/>
+          <p:cNvSpPr>
+            <a:spLocks noGrp="1"/>
+          </p:cNvSpPr>
+          <p:nvPr>
+            <p:ph type="title"/>
+          </p:nvPr>
+        </p:nvSpPr>
+        <p:spPr>
+          <a:xfrm>
+            <a:off x="1097280" y="758952"/>
+            <a:ext cx="10058400" cy="3566160"/>
           </a:xfrm>
         </p:spPr>
         <p:txBody>
-          <a:bodyPr anchor="b">
+          <a:bodyPr anchor="b" anchorCtr="0">
             <a:normAutofit/>
           </a:bodyPr>
           <a:lstStyle>
-            <a:lvl1pPr algn="l">
-              <a:defRPr sz="3600" b="0" cap="all"/>
+            <a:lvl1pPr>
+              <a:lnSpc>
+                <a:spcPct val="85000"/>
+              </a:lnSpc>
+              <a:defRPr sz="8000" b="0">
+                <a:solidFill>
+                  <a:schemeClr val="tx1">
+                    <a:lumMod val="85000"/>
+                    <a:lumOff val="15000"/>
+                  </a:schemeClr>
+                </a:solidFill>
+              </a:defRPr>
             </a:lvl1pPr>
           </a:lstStyle>
           <a:p>
@@ -2931,21 +1210,22 @@
         </p:nvSpPr>
         <p:spPr>
           <a:xfrm>
-            <a:off x="684213" y="4495800"/>
-            <a:ext cx="8534400" cy="1498600"/>
+            <a:off x="1097280" y="4453128"/>
+            <a:ext cx="10058400" cy="1143000"/>
           </a:xfrm>
         </p:spPr>
         <p:txBody>
-          <a:bodyPr anchor="t">
+          <a:bodyPr lIns="91440" rIns="91440" anchor="t" anchorCtr="0">
             <a:normAutofit/>
           </a:bodyPr>
           <a:lstStyle>
-            <a:lvl1pPr marL="0" indent="0" algn="l">
-              <a:buNone/>
-              <a:defRPr sz="1800">
+            <a:lvl1pPr marL="0" indent="0">
+              <a:buNone/>
+              <a:defRPr sz="2400" cap="all" spc="200" baseline="0">
                 <a:solidFill>
-                  <a:schemeClr val="tx1"/>
+                  <a:schemeClr val="tx2"/>
                 </a:solidFill>
+                <a:latin typeface="+mj-lt"/>
               </a:defRPr>
             </a:lvl1pPr>
             <a:lvl2pPr marL="457200" indent="0">
@@ -3103,10 +1383,48 @@
           </a:p>
         </p:txBody>
       </p:sp>
+      <p:cxnSp>
+        <p:nvCxnSpPr>
+          <p:cNvPr id="9" name="Straight Connector 8"/>
+          <p:cNvCxnSpPr/>
+          <p:nvPr/>
+        </p:nvCxnSpPr>
+        <p:spPr>
+          <a:xfrm>
+            <a:off x="1207658" y="4343400"/>
+            <a:ext cx="9875520" cy="0"/>
+          </a:xfrm>
+          <a:prstGeom prst="line">
+            <a:avLst/>
+          </a:prstGeom>
+          <a:ln w="6350">
+            <a:solidFill>
+              <a:schemeClr val="tx1">
+                <a:lumMod val="50000"/>
+                <a:lumOff val="50000"/>
+              </a:schemeClr>
+            </a:solidFill>
+          </a:ln>
+        </p:spPr>
+        <p:style>
+          <a:lnRef idx="1">
+            <a:schemeClr val="accent1"/>
+          </a:lnRef>
+          <a:fillRef idx="0">
+            <a:schemeClr val="accent1"/>
+          </a:fillRef>
+          <a:effectRef idx="0">
+            <a:schemeClr val="accent1"/>
+          </a:effectRef>
+          <a:fontRef idx="minor">
+            <a:schemeClr val="tx1"/>
+          </a:fontRef>
+        </p:style>
+      </p:cxnSp>
     </p:spTree>
     <p:extLst>
       <p:ext uri="{BB962C8B-B14F-4D97-AF65-F5344CB8AC3E}">
-        <p14:creationId xmlns:p14="http://schemas.microsoft.com/office/powerpoint/2010/main" val="1299603916"/>
+        <p14:creationId xmlns:p14="http://schemas.microsoft.com/office/powerpoint/2010/main" val="2583915842"/>
       </p:ext>
     </p:extLst>
   </p:cSld>
@@ -3135,81 +1453,27 @@
       </p:grpSpPr>
       <p:sp>
         <p:nvSpPr>
-          <p:cNvPr id="2" name="Title 1"/>
+          <p:cNvPr id="8" name="Title 7"/>
           <p:cNvSpPr>
             <a:spLocks noGrp="1"/>
           </p:cNvSpPr>
           <p:nvPr>
             <p:ph type="title"/>
-          </p:nvPr>
-        </p:nvSpPr>
-        <p:spPr/>
-        <p:txBody>
-          <a:bodyPr/>
-          <a:lstStyle/>
-          <a:p>
-            <a:r>
-              <a:rPr lang="ru-RU" smtClean="0"/>
-              <a:t>Образец заголовка</a:t>
-            </a:r>
-            <a:endParaRPr lang="en-US" dirty="0"/>
-          </a:p>
-        </p:txBody>
-      </p:sp>
-      <p:sp>
-        <p:nvSpPr>
-          <p:cNvPr id="3" name="Content Placeholder 2"/>
-          <p:cNvSpPr>
-            <a:spLocks noGrp="1"/>
-          </p:cNvSpPr>
-          <p:nvPr>
-            <p:ph sz="half" idx="1"/>
           </p:nvPr>
         </p:nvSpPr>
         <p:spPr>
           <a:xfrm>
-            <a:off x="684211" y="685800"/>
-            <a:ext cx="4937655" cy="3615267"/>
+            <a:off x="1097280" y="286603"/>
+            <a:ext cx="10058400" cy="1450757"/>
           </a:xfrm>
         </p:spPr>
         <p:txBody>
-          <a:bodyPr>
-            <a:normAutofit/>
-          </a:bodyPr>
-          <a:lstStyle/>
-          <a:p>
-            <a:pPr lvl="0"/>
-            <a:r>
-              <a:rPr lang="ru-RU" smtClean="0"/>
-              <a:t>Образец текста</a:t>
-            </a:r>
-          </a:p>
-          <a:p>
-            <a:pPr lvl="1"/>
-            <a:r>
-              <a:rPr lang="ru-RU" smtClean="0"/>
-              <a:t>Второй уровень</a:t>
-            </a:r>
-          </a:p>
-          <a:p>
-            <a:pPr lvl="2"/>
-            <a:r>
-              <a:rPr lang="ru-RU" smtClean="0"/>
-              <a:t>Третий уровень</a:t>
-            </a:r>
-          </a:p>
-          <a:p>
-            <a:pPr lvl="3"/>
-            <a:r>
-              <a:rPr lang="ru-RU" smtClean="0"/>
-              <a:t>Четвертый уровень</a:t>
-            </a:r>
-          </a:p>
-          <a:p>
-            <a:pPr lvl="4"/>
-            <a:r>
-              <a:rPr lang="ru-RU" smtClean="0"/>
-              <a:t>Пятый уровень</a:t>
+          <a:bodyPr/>
+          <a:lstStyle/>
+          <a:p>
+            <a:r>
+              <a:rPr lang="ru-RU" smtClean="0"/>
+              <a:t>Образец заголовка</a:t>
             </a:r>
             <a:endParaRPr lang="en-US" dirty="0"/>
           </a:p>
@@ -3217,24 +1481,79 @@
       </p:sp>
       <p:sp>
         <p:nvSpPr>
-          <p:cNvPr id="4" name="Content Placeholder 3"/>
-          <p:cNvSpPr>
-            <a:spLocks noGrp="1"/>
-          </p:cNvSpPr>
-          <p:nvPr>
-            <p:ph sz="half" idx="2"/>
+          <p:cNvPr id="3" name="Content Placeholder 2"/>
+          <p:cNvSpPr>
+            <a:spLocks noGrp="1"/>
+          </p:cNvSpPr>
+          <p:nvPr>
+            <p:ph sz="half" idx="1"/>
           </p:nvPr>
         </p:nvSpPr>
         <p:spPr>
           <a:xfrm>
-            <a:off x="5808133" y="685801"/>
-            <a:ext cx="4934479" cy="3615266"/>
+            <a:off x="1097279" y="1845734"/>
+            <a:ext cx="4937760" cy="4023360"/>
           </a:xfrm>
         </p:spPr>
         <p:txBody>
-          <a:bodyPr>
-            <a:normAutofit/>
-          </a:bodyPr>
+          <a:bodyPr/>
+          <a:lstStyle/>
+          <a:p>
+            <a:pPr lvl="0"/>
+            <a:r>
+              <a:rPr lang="ru-RU" smtClean="0"/>
+              <a:t>Образец текста</a:t>
+            </a:r>
+          </a:p>
+          <a:p>
+            <a:pPr lvl="1"/>
+            <a:r>
+              <a:rPr lang="ru-RU" smtClean="0"/>
+              <a:t>Второй уровень</a:t>
+            </a:r>
+          </a:p>
+          <a:p>
+            <a:pPr lvl="2"/>
+            <a:r>
+              <a:rPr lang="ru-RU" smtClean="0"/>
+              <a:t>Третий уровень</a:t>
+            </a:r>
+          </a:p>
+          <a:p>
+            <a:pPr lvl="3"/>
+            <a:r>
+              <a:rPr lang="ru-RU" smtClean="0"/>
+              <a:t>Четвертый уровень</a:t>
+            </a:r>
+          </a:p>
+          <a:p>
+            <a:pPr lvl="4"/>
+            <a:r>
+              <a:rPr lang="ru-RU" smtClean="0"/>
+              <a:t>Пятый уровень</a:t>
+            </a:r>
+            <a:endParaRPr lang="en-US" dirty="0"/>
+          </a:p>
+        </p:txBody>
+      </p:sp>
+      <p:sp>
+        <p:nvSpPr>
+          <p:cNvPr id="4" name="Content Placeholder 3"/>
+          <p:cNvSpPr>
+            <a:spLocks noGrp="1"/>
+          </p:cNvSpPr>
+          <p:nvPr>
+            <p:ph sz="half" idx="2"/>
+          </p:nvPr>
+        </p:nvSpPr>
+        <p:spPr>
+          <a:xfrm>
+            <a:off x="6217920" y="1845735"/>
+            <a:ext cx="4937760" cy="4023360"/>
+          </a:xfrm>
+        </p:spPr>
+        <p:txBody>
+          <a:bodyPr/>
           <a:lstStyle/>
           <a:p>
             <a:pPr lvl="0"/>
@@ -3342,7 +1661,7 @@
     </p:spTree>
     <p:extLst>
       <p:ext uri="{BB962C8B-B14F-4D97-AF65-F5344CB8AC3E}">
-        <p14:creationId xmlns:p14="http://schemas.microsoft.com/office/powerpoint/2010/main" val="141579209"/>
+        <p14:creationId xmlns:p14="http://schemas.microsoft.com/office/powerpoint/2010/main" val="1215343916"/>
       </p:ext>
     </p:extLst>
   </p:cSld>
@@ -3371,57 +1690,58 @@
       </p:grpSpPr>
       <p:sp>
         <p:nvSpPr>
-          <p:cNvPr id="2" name="Title 1"/>
+          <p:cNvPr id="10" name="Title 9"/>
           <p:cNvSpPr>
             <a:spLocks noGrp="1"/>
           </p:cNvSpPr>
           <p:nvPr>
             <p:ph type="title"/>
-          </p:nvPr>
-        </p:nvSpPr>
-        <p:spPr/>
-        <p:txBody>
-          <a:bodyPr/>
-          <a:lstStyle>
-            <a:lvl1pPr>
-              <a:defRPr/>
-            </a:lvl1pPr>
-          </a:lstStyle>
-          <a:p>
-            <a:r>
-              <a:rPr lang="ru-RU" smtClean="0"/>
-              <a:t>Образец заголовка</a:t>
-            </a:r>
-            <a:endParaRPr lang="en-US" dirty="0"/>
-          </a:p>
-        </p:txBody>
-      </p:sp>
-      <p:sp>
-        <p:nvSpPr>
-          <p:cNvPr id="3" name="Text Placeholder 2"/>
-          <p:cNvSpPr>
-            <a:spLocks noGrp="1"/>
-          </p:cNvSpPr>
-          <p:nvPr>
-            <p:ph type="body" idx="1"/>
           </p:nvPr>
         </p:nvSpPr>
         <p:spPr>
           <a:xfrm>
-            <a:off x="972080" y="685800"/>
-            <a:ext cx="4649787" cy="576262"/>
+            <a:off x="1097280" y="286603"/>
+            <a:ext cx="10058400" cy="1450757"/>
           </a:xfrm>
         </p:spPr>
         <p:txBody>
-          <a:bodyPr anchor="b">
-            <a:noAutofit/>
+          <a:bodyPr/>
+          <a:lstStyle/>
+          <a:p>
+            <a:r>
+              <a:rPr lang="ru-RU" smtClean="0"/>
+              <a:t>Образец заголовка</a:t>
+            </a:r>
+            <a:endParaRPr lang="en-US" dirty="0"/>
+          </a:p>
+        </p:txBody>
+      </p:sp>
+      <p:sp>
+        <p:nvSpPr>
+          <p:cNvPr id="3" name="Text Placeholder 2"/>
+          <p:cNvSpPr>
+            <a:spLocks noGrp="1"/>
+          </p:cNvSpPr>
+          <p:nvPr>
+            <p:ph type="body" idx="1"/>
+          </p:nvPr>
+        </p:nvSpPr>
+        <p:spPr>
+          <a:xfrm>
+            <a:off x="1097280" y="1846052"/>
+            <a:ext cx="4937760" cy="736282"/>
+          </a:xfrm>
+        </p:spPr>
+        <p:txBody>
+          <a:bodyPr lIns="91440" rIns="91440" anchor="ctr">
+            <a:normAutofit/>
           </a:bodyPr>
           <a:lstStyle>
             <a:lvl1pPr marL="0" indent="0">
               <a:buNone/>
-              <a:defRPr sz="2800" b="0">
+              <a:defRPr sz="2000" b="0" cap="all" baseline="0">
                 <a:solidFill>
-                  <a:schemeClr val="tx1"/>
+                  <a:schemeClr val="tx2"/>
                 </a:solidFill>
               </a:defRPr>
             </a:lvl1pPr>
@@ -3479,14 +1799,12 @@
         </p:nvSpPr>
         <p:spPr>
           <a:xfrm>
-            <a:off x="684211" y="1270529"/>
-            <a:ext cx="4937655" cy="3030538"/>
+            <a:off x="1097280" y="2582334"/>
+            <a:ext cx="4937760" cy="3378200"/>
           </a:xfrm>
         </p:spPr>
         <p:txBody>
-          <a:bodyPr anchor="t">
-            <a:normAutofit/>
-          </a:bodyPr>
+          <a:bodyPr/>
           <a:lstStyle/>
           <a:p>
             <a:pPr lvl="0"/>
@@ -3538,20 +1856,20 @@
         </p:nvSpPr>
         <p:spPr>
           <a:xfrm>
-            <a:off x="6079066" y="685800"/>
-            <a:ext cx="4665134" cy="576262"/>
+            <a:off x="6217920" y="1846052"/>
+            <a:ext cx="4937760" cy="736282"/>
           </a:xfrm>
         </p:spPr>
         <p:txBody>
-          <a:bodyPr anchor="b">
-            <a:noAutofit/>
+          <a:bodyPr lIns="91440" rIns="91440" anchor="ctr">
+            <a:normAutofit/>
           </a:bodyPr>
           <a:lstStyle>
             <a:lvl1pPr marL="0" indent="0">
               <a:buNone/>
-              <a:defRPr sz="2800" b="0">
+              <a:defRPr sz="2000" b="0" cap="all" baseline="0">
                 <a:solidFill>
-                  <a:schemeClr val="tx1"/>
+                  <a:schemeClr val="tx2"/>
                 </a:solidFill>
               </a:defRPr>
             </a:lvl1pPr>
@@ -3609,14 +1927,12 @@
         </p:nvSpPr>
         <p:spPr>
           <a:xfrm>
-            <a:off x="5806545" y="1262062"/>
-            <a:ext cx="4929188" cy="3030538"/>
+            <a:off x="6217920" y="2582334"/>
+            <a:ext cx="4937760" cy="3378200"/>
           </a:xfrm>
         </p:spPr>
         <p:txBody>
-          <a:bodyPr anchor="t">
-            <a:normAutofit/>
-          </a:bodyPr>
+          <a:bodyPr/>
           <a:lstStyle/>
           <a:p>
             <a:pPr lvl="0"/>
@@ -3724,7 +2040,7 @@
     </p:spTree>
     <p:extLst>
       <p:ext uri="{BB962C8B-B14F-4D97-AF65-F5344CB8AC3E}">
-        <p14:creationId xmlns:p14="http://schemas.microsoft.com/office/powerpoint/2010/main" val="995960926"/>
+        <p14:creationId xmlns:p14="http://schemas.microsoft.com/office/powerpoint/2010/main" val="3644126042"/>
       </p:ext>
     </p:extLst>
   </p:cSld>
@@ -3842,7 +2158,7 @@
     </p:spTree>
     <p:extLst>
       <p:ext uri="{BB962C8B-B14F-4D97-AF65-F5344CB8AC3E}">
-        <p14:creationId xmlns:p14="http://schemas.microsoft.com/office/powerpoint/2010/main" val="2311187891"/>
+        <p14:creationId xmlns:p14="http://schemas.microsoft.com/office/powerpoint/2010/main" val="140139328"/>
       </p:ext>
     </p:extLst>
   </p:cSld>
@@ -3853,7 +2169,7 @@
 </file>
 
 <file path=ppt/slideLayouts/slideLayout7.xml><?xml version="1.0" encoding="utf-8"?>
-<p:sldLayout xmlns:a="http://schemas.openxmlformats.org/drawingml/2006/main" xmlns:r="http://schemas.openxmlformats.org/officeDocument/2006/relationships" xmlns:p="http://schemas.openxmlformats.org/presentationml/2006/main" type="blank" preserve="1">
+<p:sldLayout xmlns:a="http://schemas.openxmlformats.org/drawingml/2006/main" xmlns:r="http://schemas.openxmlformats.org/officeDocument/2006/relationships" xmlns:p="http://schemas.openxmlformats.org/presentationml/2006/main" showMasterSp="0" type="blank" preserve="1">
   <p:cSld name="Пустой слайд">
     <p:spTree>
       <p:nvGrpSpPr>
@@ -3871,7 +2187,83 @@
       </p:grpSpPr>
       <p:sp>
         <p:nvSpPr>
-          <p:cNvPr id="2" name="Date Placeholder 1"/>
+          <p:cNvPr id="5" name="Rectangle 4"/>
+          <p:cNvSpPr/>
+          <p:nvPr/>
+        </p:nvSpPr>
+        <p:spPr>
+          <a:xfrm>
+            <a:off x="3175" y="6400800"/>
+            <a:ext cx="12188825" cy="457200"/>
+          </a:xfrm>
+          <a:prstGeom prst="rect">
+            <a:avLst/>
+          </a:prstGeom>
+          <a:solidFill>
+            <a:schemeClr val="accent2"/>
+          </a:solidFill>
+          <a:ln>
+            <a:noFill/>
+          </a:ln>
+        </p:spPr>
+        <p:style>
+          <a:lnRef idx="2">
+            <a:schemeClr val="accent1">
+              <a:shade val="50000"/>
+            </a:schemeClr>
+          </a:lnRef>
+          <a:fillRef idx="1">
+            <a:schemeClr val="accent1"/>
+          </a:fillRef>
+          <a:effectRef idx="0">
+            <a:schemeClr val="accent1"/>
+          </a:effectRef>
+          <a:fontRef idx="minor">
+            <a:schemeClr val="lt1"/>
+          </a:fontRef>
+        </p:style>
+      </p:sp>
+      <p:sp>
+        <p:nvSpPr>
+          <p:cNvPr id="6" name="Rectangle 5"/>
+          <p:cNvSpPr/>
+          <p:nvPr/>
+        </p:nvSpPr>
+        <p:spPr>
+          <a:xfrm>
+            <a:off x="15" y="6334316"/>
+            <a:ext cx="12188825" cy="64008"/>
+          </a:xfrm>
+          <a:prstGeom prst="rect">
+            <a:avLst/>
+          </a:prstGeom>
+          <a:solidFill>
+            <a:schemeClr val="accent1"/>
+          </a:solidFill>
+          <a:ln>
+            <a:noFill/>
+          </a:ln>
+        </p:spPr>
+        <p:style>
+          <a:lnRef idx="2">
+            <a:schemeClr val="accent1">
+              <a:shade val="50000"/>
+            </a:schemeClr>
+          </a:lnRef>
+          <a:fillRef idx="1">
+            <a:schemeClr val="accent1"/>
+          </a:fillRef>
+          <a:effectRef idx="0">
+            <a:schemeClr val="accent1"/>
+          </a:effectRef>
+          <a:fontRef idx="minor">
+            <a:schemeClr val="lt1"/>
+          </a:fontRef>
+        </p:style>
+      </p:sp>
+      <p:sp>
+        <p:nvSpPr>
+          <p:cNvPr id="7" name="Date Placeholder 6"/>
           <p:cNvSpPr>
             <a:spLocks noGrp="1"/>
           </p:cNvSpPr>
@@ -3894,7 +2286,7 @@
       </p:sp>
       <p:sp>
         <p:nvSpPr>
-          <p:cNvPr id="3" name="Footer Placeholder 2"/>
+          <p:cNvPr id="8" name="Footer Placeholder 7"/>
           <p:cNvSpPr>
             <a:spLocks noGrp="1"/>
           </p:cNvSpPr>
@@ -3905,7 +2297,15 @@
         <p:spPr/>
         <p:txBody>
           <a:bodyPr/>
-          <a:lstStyle/>
+          <a:lstStyle>
+            <a:lvl1pPr>
+              <a:defRPr>
+                <a:solidFill>
+                  <a:srgbClr val="FFFFFF"/>
+                </a:solidFill>
+              </a:defRPr>
+            </a:lvl1pPr>
+          </a:lstStyle>
           <a:p>
             <a:endParaRPr lang="ru-RU"/>
           </a:p>
@@ -3913,7 +2313,7 @@
       </p:sp>
       <p:sp>
         <p:nvSpPr>
-          <p:cNvPr id="4" name="Slide Number Placeholder 3"/>
+          <p:cNvPr id="9" name="Slide Number Placeholder 8"/>
           <p:cNvSpPr>
             <a:spLocks noGrp="1"/>
           </p:cNvSpPr>
@@ -3937,7 +2337,7 @@
     </p:spTree>
     <p:extLst>
       <p:ext uri="{BB962C8B-B14F-4D97-AF65-F5344CB8AC3E}">
-        <p14:creationId xmlns:p14="http://schemas.microsoft.com/office/powerpoint/2010/main" val="1883231080"/>
+        <p14:creationId xmlns:p14="http://schemas.microsoft.com/office/powerpoint/2010/main" val="685884870"/>
       </p:ext>
     </p:extLst>
   </p:cSld>
@@ -3948,7 +2348,7 @@
 </file>
 
 <file path=ppt/slideLayouts/slideLayout8.xml><?xml version="1.0" encoding="utf-8"?>
-<p:sldLayout xmlns:a="http://schemas.openxmlformats.org/drawingml/2006/main" xmlns:r="http://schemas.openxmlformats.org/officeDocument/2006/relationships" xmlns:p="http://schemas.openxmlformats.org/presentationml/2006/main" type="objTx" preserve="1">
+<p:sldLayout xmlns:a="http://schemas.openxmlformats.org/drawingml/2006/main" xmlns:r="http://schemas.openxmlformats.org/officeDocument/2006/relationships" xmlns:p="http://schemas.openxmlformats.org/presentationml/2006/main" showMasterSp="0" type="objTx" preserve="1">
   <p:cSld name="Объект с подписью">
     <p:spTree>
       <p:nvGrpSpPr>
@@ -3966,18 +2366,94 @@
       </p:grpSpPr>
       <p:sp>
         <p:nvSpPr>
-          <p:cNvPr id="2" name="Title 1"/>
-          <p:cNvSpPr>
-            <a:spLocks noGrp="1"/>
-          </p:cNvSpPr>
-          <p:nvPr>
-            <p:ph type="title"/>
-          </p:nvPr>
+          <p:cNvPr id="8" name="Rectangle 7"/>
+          <p:cNvSpPr/>
+          <p:nvPr/>
         </p:nvSpPr>
         <p:spPr>
           <a:xfrm>
-            <a:off x="7085012" y="685800"/>
-            <a:ext cx="3657600" cy="1371600"/>
+            <a:off x="16" y="0"/>
+            <a:ext cx="4050791" cy="6858000"/>
+          </a:xfrm>
+          <a:prstGeom prst="rect">
+            <a:avLst/>
+          </a:prstGeom>
+          <a:solidFill>
+            <a:schemeClr val="accent2"/>
+          </a:solidFill>
+          <a:ln>
+            <a:noFill/>
+          </a:ln>
+        </p:spPr>
+        <p:style>
+          <a:lnRef idx="2">
+            <a:schemeClr val="accent1">
+              <a:shade val="50000"/>
+            </a:schemeClr>
+          </a:lnRef>
+          <a:fillRef idx="1">
+            <a:schemeClr val="accent1"/>
+          </a:fillRef>
+          <a:effectRef idx="0">
+            <a:schemeClr val="accent1"/>
+          </a:effectRef>
+          <a:fontRef idx="minor">
+            <a:schemeClr val="lt1"/>
+          </a:fontRef>
+        </p:style>
+      </p:sp>
+      <p:sp>
+        <p:nvSpPr>
+          <p:cNvPr id="9" name="Rectangle 8"/>
+          <p:cNvSpPr/>
+          <p:nvPr/>
+        </p:nvSpPr>
+        <p:spPr>
+          <a:xfrm>
+            <a:off x="4040071" y="0"/>
+            <a:ext cx="64008" cy="6858000"/>
+          </a:xfrm>
+          <a:prstGeom prst="rect">
+            <a:avLst/>
+          </a:prstGeom>
+          <a:solidFill>
+            <a:schemeClr val="accent1"/>
+          </a:solidFill>
+          <a:ln>
+            <a:noFill/>
+          </a:ln>
+        </p:spPr>
+        <p:style>
+          <a:lnRef idx="2">
+            <a:schemeClr val="accent1">
+              <a:shade val="50000"/>
+            </a:schemeClr>
+          </a:lnRef>
+          <a:fillRef idx="1">
+            <a:schemeClr val="accent1"/>
+          </a:fillRef>
+          <a:effectRef idx="0">
+            <a:schemeClr val="accent1"/>
+          </a:effectRef>
+          <a:fontRef idx="minor">
+            <a:schemeClr val="lt1"/>
+          </a:fontRef>
+        </p:style>
+      </p:sp>
+      <p:sp>
+        <p:nvSpPr>
+          <p:cNvPr id="2" name="Title 1"/>
+          <p:cNvSpPr>
+            <a:spLocks noGrp="1"/>
+          </p:cNvSpPr>
+          <p:nvPr>
+            <p:ph type="title"/>
+          </p:nvPr>
+        </p:nvSpPr>
+        <p:spPr>
+          <a:xfrm>
+            <a:off x="457200" y="594359"/>
+            <a:ext cx="3200400" cy="2286000"/>
           </a:xfrm>
         </p:spPr>
         <p:txBody>
@@ -3985,8 +2461,12 @@
             <a:normAutofit/>
           </a:bodyPr>
           <a:lstStyle>
-            <a:lvl1pPr algn="l">
-              <a:defRPr sz="2400" b="0"/>
+            <a:lvl1pPr>
+              <a:defRPr sz="3600" b="0">
+                <a:solidFill>
+                  <a:srgbClr val="FFFFFF"/>
+                </a:solidFill>
+              </a:defRPr>
             </a:lvl1pPr>
           </a:lstStyle>
           <a:p>
@@ -4010,14 +2490,12 @@
         </p:nvSpPr>
         <p:spPr>
           <a:xfrm>
-            <a:off x="684212" y="685800"/>
-            <a:ext cx="5943601" cy="5308600"/>
+            <a:off x="4800600" y="731520"/>
+            <a:ext cx="6492240" cy="5257800"/>
           </a:xfrm>
         </p:spPr>
         <p:txBody>
-          <a:bodyPr anchor="ctr">
-            <a:normAutofit/>
-          </a:bodyPr>
+          <a:bodyPr/>
           <a:lstStyle/>
           <a:p>
             <a:pPr lvl="0"/>
@@ -4069,18 +2547,22 @@
         </p:nvSpPr>
         <p:spPr>
           <a:xfrm>
-            <a:off x="7085012" y="2209799"/>
-            <a:ext cx="3657600" cy="2091267"/>
+            <a:off x="457200" y="2926080"/>
+            <a:ext cx="3200400" cy="3379124"/>
           </a:xfrm>
         </p:spPr>
         <p:txBody>
-          <a:bodyPr anchor="t">
+          <a:bodyPr lIns="91440" rIns="91440">
             <a:normAutofit/>
           </a:bodyPr>
           <a:lstStyle>
             <a:lvl1pPr marL="0" indent="0">
               <a:buNone/>
-              <a:defRPr sz="1600"/>
+              <a:defRPr sz="1500">
+                <a:solidFill>
+                  <a:srgbClr val="FFFFFF"/>
+                </a:solidFill>
+              </a:defRPr>
             </a:lvl1pPr>
             <a:lvl2pPr marL="457200" indent="0">
               <a:buNone/>
@@ -4134,10 +2616,19 @@
             <p:ph type="dt" sz="half" idx="10"/>
           </p:nvPr>
         </p:nvSpPr>
-        <p:spPr/>
+        <p:spPr>
+          <a:xfrm>
+            <a:off x="465512" y="6459785"/>
+            <a:ext cx="2618510" cy="365125"/>
+          </a:xfrm>
+        </p:spPr>
         <p:txBody>
           <a:bodyPr/>
-          <a:lstStyle/>
+          <a:lstStyle>
+            <a:lvl1pPr algn="l">
+              <a:defRPr/>
+            </a:lvl1pPr>
+          </a:lstStyle>
           <a:p>
             <a:fld id="{67E61FDA-2067-495C-9275-88CBF639CEF9}" type="datetimeFigureOut">
               <a:rPr lang="ru-RU" smtClean="0"/>
@@ -4157,29 +2648,50 @@
             <p:ph type="ftr" sz="quarter" idx="11"/>
           </p:nvPr>
         </p:nvSpPr>
+        <p:spPr>
+          <a:xfrm>
+            <a:off x="4800600" y="6459785"/>
+            <a:ext cx="4648200" cy="365125"/>
+          </a:xfrm>
+        </p:spPr>
+        <p:txBody>
+          <a:bodyPr/>
+          <a:lstStyle>
+            <a:lvl1pPr algn="l">
+              <a:defRPr>
+                <a:solidFill>
+                  <a:schemeClr val="tx2"/>
+                </a:solidFill>
+              </a:defRPr>
+            </a:lvl1pPr>
+          </a:lstStyle>
+          <a:p>
+            <a:endParaRPr lang="ru-RU"/>
+          </a:p>
+        </p:txBody>
+      </p:sp>
+      <p:sp>
+        <p:nvSpPr>
+          <p:cNvPr id="7" name="Slide Number Placeholder 6"/>
+          <p:cNvSpPr>
+            <a:spLocks noGrp="1"/>
+          </p:cNvSpPr>
+          <p:nvPr>
+            <p:ph type="sldNum" sz="quarter" idx="12"/>
+          </p:nvPr>
+        </p:nvSpPr>
         <p:spPr/>
         <p:txBody>
           <a:bodyPr/>
-          <a:lstStyle/>
-          <a:p>
-            <a:endParaRPr lang="ru-RU"/>
-          </a:p>
-        </p:txBody>
-      </p:sp>
-      <p:sp>
-        <p:nvSpPr>
-          <p:cNvPr id="7" name="Slide Number Placeholder 6"/>
-          <p:cNvSpPr>
-            <a:spLocks noGrp="1"/>
-          </p:cNvSpPr>
-          <p:nvPr>
-            <p:ph type="sldNum" sz="quarter" idx="12"/>
-          </p:nvPr>
-        </p:nvSpPr>
-        <p:spPr/>
-        <p:txBody>
-          <a:bodyPr/>
-          <a:lstStyle/>
+          <a:lstStyle>
+            <a:lvl1pPr>
+              <a:defRPr>
+                <a:solidFill>
+                  <a:schemeClr val="tx2"/>
+                </a:solidFill>
+              </a:defRPr>
+            </a:lvl1pPr>
+          </a:lstStyle>
           <a:p>
             <a:fld id="{5747A71D-55D4-4A3B-88E7-51FB5CB450FE}" type="slidenum">
               <a:rPr lang="ru-RU" smtClean="0"/>
@@ -4192,7 +2704,7 @@
     </p:spTree>
     <p:extLst>
       <p:ext uri="{BB962C8B-B14F-4D97-AF65-F5344CB8AC3E}">
-        <p14:creationId xmlns:p14="http://schemas.microsoft.com/office/powerpoint/2010/main" val="3882947810"/>
+        <p14:creationId xmlns:p14="http://schemas.microsoft.com/office/powerpoint/2010/main" val="3704338186"/>
       </p:ext>
     </p:extLst>
   </p:cSld>
@@ -4203,7 +2715,7 @@
 </file>
 
 <file path=ppt/slideLayouts/slideLayout9.xml><?xml version="1.0" encoding="utf-8"?>
-<p:sldLayout xmlns:a="http://schemas.openxmlformats.org/drawingml/2006/main" xmlns:r="http://schemas.openxmlformats.org/officeDocument/2006/relationships" xmlns:p="http://schemas.openxmlformats.org/presentationml/2006/main" type="picTx" preserve="1">
+<p:sldLayout xmlns:a="http://schemas.openxmlformats.org/drawingml/2006/main" xmlns:r="http://schemas.openxmlformats.org/officeDocument/2006/relationships" xmlns:p="http://schemas.openxmlformats.org/presentationml/2006/main" showMasterSp="0" type="picTx" preserve="1">
   <p:cSld name="Рисунок с подписью">
     <p:spTree>
       <p:nvGrpSpPr>
@@ -4221,27 +2733,107 @@
       </p:grpSpPr>
       <p:sp>
         <p:nvSpPr>
-          <p:cNvPr id="2" name="Title 1"/>
-          <p:cNvSpPr>
-            <a:spLocks noGrp="1"/>
-          </p:cNvSpPr>
-          <p:nvPr>
-            <p:ph type="title"/>
-          </p:nvPr>
+          <p:cNvPr id="8" name="Rectangle 7"/>
+          <p:cNvSpPr/>
+          <p:nvPr/>
         </p:nvSpPr>
         <p:spPr>
           <a:xfrm>
-            <a:off x="4722812" y="1447800"/>
-            <a:ext cx="6019800" cy="1143000"/>
+            <a:off x="0" y="4953000"/>
+            <a:ext cx="12188825" cy="1905000"/>
+          </a:xfrm>
+          <a:prstGeom prst="rect">
+            <a:avLst/>
+          </a:prstGeom>
+          <a:solidFill>
+            <a:schemeClr val="accent2"/>
+          </a:solidFill>
+          <a:ln>
+            <a:noFill/>
+          </a:ln>
+        </p:spPr>
+        <p:style>
+          <a:lnRef idx="2">
+            <a:schemeClr val="accent1">
+              <a:shade val="50000"/>
+            </a:schemeClr>
+          </a:lnRef>
+          <a:fillRef idx="1">
+            <a:schemeClr val="accent1"/>
+          </a:fillRef>
+          <a:effectRef idx="0">
+            <a:schemeClr val="accent1"/>
+          </a:effectRef>
+          <a:fontRef idx="minor">
+            <a:schemeClr val="lt1"/>
+          </a:fontRef>
+        </p:style>
+      </p:sp>
+      <p:sp>
+        <p:nvSpPr>
+          <p:cNvPr id="9" name="Rectangle 8"/>
+          <p:cNvSpPr/>
+          <p:nvPr/>
+        </p:nvSpPr>
+        <p:spPr>
+          <a:xfrm>
+            <a:off x="15" y="4915076"/>
+            <a:ext cx="12188825" cy="64008"/>
+          </a:xfrm>
+          <a:prstGeom prst="rect">
+            <a:avLst/>
+          </a:prstGeom>
+          <a:solidFill>
+            <a:schemeClr val="accent1"/>
+          </a:solidFill>
+          <a:ln>
+            <a:noFill/>
+          </a:ln>
+        </p:spPr>
+        <p:style>
+          <a:lnRef idx="2">
+            <a:schemeClr val="accent1">
+              <a:shade val="50000"/>
+            </a:schemeClr>
+          </a:lnRef>
+          <a:fillRef idx="1">
+            <a:schemeClr val="accent1"/>
+          </a:fillRef>
+          <a:effectRef idx="0">
+            <a:schemeClr val="accent1"/>
+          </a:effectRef>
+          <a:fontRef idx="minor">
+            <a:schemeClr val="lt1"/>
+          </a:fontRef>
+        </p:style>
+      </p:sp>
+      <p:sp>
+        <p:nvSpPr>
+          <p:cNvPr id="2" name="Title 1"/>
+          <p:cNvSpPr>
+            <a:spLocks noGrp="1"/>
+          </p:cNvSpPr>
+          <p:nvPr>
+            <p:ph type="title"/>
+          </p:nvPr>
+        </p:nvSpPr>
+        <p:spPr>
+          <a:xfrm>
+            <a:off x="1097280" y="5074920"/>
+            <a:ext cx="10113264" cy="822960"/>
           </a:xfrm>
         </p:spPr>
         <p:txBody>
-          <a:bodyPr anchor="b">
-            <a:normAutofit/>
+          <a:bodyPr lIns="91440" tIns="0" rIns="91440" bIns="0" anchor="b">
+            <a:noAutofit/>
           </a:bodyPr>
           <a:lstStyle>
-            <a:lvl1pPr algn="l">
-              <a:defRPr sz="2800" b="0"/>
+            <a:lvl1pPr>
+              <a:defRPr sz="3600" b="0">
+                <a:solidFill>
+                  <a:srgbClr val="FFFFFF"/>
+                </a:solidFill>
+              </a:defRPr>
             </a:lvl1pPr>
           </a:lstStyle>
           <a:p>
@@ -4255,7 +2847,7 @@
       </p:sp>
       <p:sp>
         <p:nvSpPr>
-          <p:cNvPr id="14" name="Picture Placeholder 2"/>
+          <p:cNvPr id="3" name="Picture Placeholder 2"/>
           <p:cNvSpPr>
             <a:spLocks noGrp="1" noChangeAspect="1"/>
           </p:cNvSpPr>
@@ -4265,70 +2857,58 @@
         </p:nvSpPr>
         <p:spPr>
           <a:xfrm>
-            <a:off x="989012" y="914400"/>
-            <a:ext cx="3280974" cy="4572000"/>
+            <a:off x="15" y="0"/>
+            <a:ext cx="12191985" cy="4915076"/>
           </a:xfrm>
-          <a:prstGeom prst="snip2DiagRect">
-            <a:avLst>
-              <a:gd name="adj1" fmla="val 10815"/>
-              <a:gd name="adj2" fmla="val 0"/>
-            </a:avLst>
-          </a:prstGeom>
-          <a:ln w="15875">
-            <a:solidFill>
-              <a:schemeClr val="tx1">
-                <a:alpha val="40000"/>
-              </a:schemeClr>
-            </a:solidFill>
-          </a:ln>
-          <a:effectLst>
-            <a:innerShdw blurRad="57150" dist="38100" dir="14460000">
-              <a:srgbClr val="000000">
-                <a:alpha val="70000"/>
-              </a:srgbClr>
-            </a:innerShdw>
-          </a:effectLst>
+          <a:blipFill>
+            <a:blip r:embed="rId2"/>
+            <a:stretch>
+              <a:fillRect/>
+            </a:stretch>
+          </a:blipFill>
         </p:spPr>
         <p:txBody>
-          <a:bodyPr anchor="t">
-            <a:normAutofit/>
-          </a:bodyPr>
+          <a:bodyPr lIns="457200" tIns="457200" anchor="t"/>
           <a:lstStyle>
-            <a:lvl1pPr marL="0" indent="0" algn="ctr">
-              <a:buNone/>
-              <a:defRPr sz="1600"/>
+            <a:lvl1pPr marL="0" indent="0">
+              <a:buNone/>
+              <a:defRPr sz="3200">
+                <a:solidFill>
+                  <a:schemeClr val="bg1"/>
+                </a:solidFill>
+              </a:defRPr>
             </a:lvl1pPr>
             <a:lvl2pPr marL="457200" indent="0">
               <a:buNone/>
-              <a:defRPr sz="1600"/>
+              <a:defRPr sz="2800"/>
             </a:lvl2pPr>
             <a:lvl3pPr marL="914400" indent="0">
               <a:buNone/>
-              <a:defRPr sz="1600"/>
+              <a:defRPr sz="2400"/>
             </a:lvl3pPr>
             <a:lvl4pPr marL="1371600" indent="0">
               <a:buNone/>
-              <a:defRPr sz="1600"/>
+              <a:defRPr sz="2000"/>
             </a:lvl4pPr>
             <a:lvl5pPr marL="1828800" indent="0">
               <a:buNone/>
-              <a:defRPr sz="1600"/>
+              <a:defRPr sz="2000"/>
             </a:lvl5pPr>
             <a:lvl6pPr marL="2286000" indent="0">
               <a:buNone/>
-              <a:defRPr sz="1600"/>
+              <a:defRPr sz="2000"/>
             </a:lvl6pPr>
             <a:lvl7pPr marL="2743200" indent="0">
               <a:buNone/>
-              <a:defRPr sz="1600"/>
+              <a:defRPr sz="2000"/>
             </a:lvl7pPr>
             <a:lvl8pPr marL="3200400" indent="0">
               <a:buNone/>
-              <a:defRPr sz="1600"/>
+              <a:defRPr sz="2000"/>
             </a:lvl8pPr>
             <a:lvl9pPr marL="3657600" indent="0">
               <a:buNone/>
-              <a:defRPr sz="1600"/>
+              <a:defRPr sz="2000"/>
             </a:lvl9pPr>
           </a:lstStyle>
           <a:p>
@@ -4352,18 +2932,28 @@
         </p:nvSpPr>
         <p:spPr>
           <a:xfrm>
-            <a:off x="4722812" y="2777066"/>
-            <a:ext cx="6021388" cy="2048933"/>
+            <a:off x="1097280" y="5907023"/>
+            <a:ext cx="10113264" cy="594360"/>
           </a:xfrm>
         </p:spPr>
         <p:txBody>
-          <a:bodyPr anchor="t">
+          <a:bodyPr lIns="91440" tIns="0" rIns="91440" bIns="0">
             <a:normAutofit/>
           </a:bodyPr>
           <a:lstStyle>
             <a:lvl1pPr marL="0" indent="0">
-              <a:buNone/>
-              <a:defRPr sz="1800"/>
+              <a:spcBef>
+                <a:spcPts val="0"/>
+              </a:spcBef>
+              <a:spcAft>
+                <a:spcPts val="600"/>
+              </a:spcAft>
+              <a:buNone/>
+              <a:defRPr sz="1500">
+                <a:solidFill>
+                  <a:srgbClr val="FFFFFF"/>
+                </a:solidFill>
+              </a:defRPr>
             </a:lvl1pPr>
             <a:lvl2pPr marL="457200" indent="0">
               <a:buNone/>
@@ -4475,7 +3065,7 @@
     </p:spTree>
     <p:extLst>
       <p:ext uri="{BB962C8B-B14F-4D97-AF65-F5344CB8AC3E}">
-        <p14:creationId xmlns:p14="http://schemas.microsoft.com/office/powerpoint/2010/main" val="404081618"/>
+        <p14:creationId xmlns:p14="http://schemas.microsoft.com/office/powerpoint/2010/main" val="1670149436"/>
       </p:ext>
     </p:extLst>
   </p:cSld>
@@ -4489,8 +3079,8 @@
 <p:sldMaster xmlns:a="http://schemas.openxmlformats.org/drawingml/2006/main" xmlns:r="http://schemas.openxmlformats.org/officeDocument/2006/relationships" xmlns:p="http://schemas.openxmlformats.org/presentationml/2006/main">
   <p:cSld>
     <p:bg>
-      <p:bgRef idx="1002">
-        <a:schemeClr val="bg2"/>
+      <p:bgRef idx="1001">
+        <a:schemeClr val="bg1"/>
       </p:bgRef>
     </p:bg>
     <p:spTree>
@@ -4507,287 +3097,110 @@
           <a:chExt cx="0" cy="0"/>
         </a:xfrm>
       </p:grpSpPr>
-      <p:grpSp>
-        <p:nvGrpSpPr>
-          <p:cNvPr id="7" name="Group 6"/>
-          <p:cNvGrpSpPr/>
+      <p:sp>
+        <p:nvSpPr>
+          <p:cNvPr id="7" name="Rectangle 6"/>
+          <p:cNvSpPr/>
           <p:nvPr/>
-        </p:nvGrpSpPr>
-        <p:grpSpPr>
-          <a:xfrm>
-            <a:off x="9206969" y="2963333"/>
-            <a:ext cx="2981858" cy="3208867"/>
-            <a:chOff x="9206969" y="2963333"/>
-            <a:chExt cx="2981858" cy="3208867"/>
-          </a:xfrm>
-        </p:grpSpPr>
-        <p:cxnSp>
-          <p:nvCxnSpPr>
-            <p:cNvPr id="8" name="Straight Connector 7"/>
-            <p:cNvCxnSpPr/>
-            <p:nvPr/>
-          </p:nvCxnSpPr>
-          <p:spPr>
-            <a:xfrm flipH="1">
-              <a:off x="11276012" y="2963333"/>
-              <a:ext cx="912814" cy="912812"/>
-            </a:xfrm>
-            <a:prstGeom prst="line">
-              <a:avLst/>
-            </a:prstGeom>
-            <a:ln w="9525">
-              <a:solidFill>
-                <a:schemeClr val="tx1"/>
-              </a:solidFill>
-            </a:ln>
-          </p:spPr>
-          <p:style>
-            <a:lnRef idx="2">
-              <a:schemeClr val="accent1"/>
-            </a:lnRef>
-            <a:fillRef idx="0">
-              <a:schemeClr val="accent1"/>
-            </a:fillRef>
-            <a:effectRef idx="1">
-              <a:schemeClr val="accent1"/>
-            </a:effectRef>
-            <a:fontRef idx="minor">
-              <a:schemeClr val="tx1"/>
-            </a:fontRef>
-          </p:style>
-        </p:cxnSp>
-        <p:cxnSp>
-          <p:nvCxnSpPr>
-            <p:cNvPr id="9" name="Straight Connector 8"/>
-            <p:cNvCxnSpPr/>
-            <p:nvPr/>
-          </p:nvCxnSpPr>
-          <p:spPr>
-            <a:xfrm flipH="1">
-              <a:off x="9206969" y="3190344"/>
-              <a:ext cx="2981857" cy="2981856"/>
-            </a:xfrm>
-            <a:prstGeom prst="line">
-              <a:avLst/>
-            </a:prstGeom>
-            <a:ln w="9525">
-              <a:solidFill>
-                <a:schemeClr val="tx1"/>
-              </a:solidFill>
-            </a:ln>
-          </p:spPr>
-          <p:style>
-            <a:lnRef idx="2">
-              <a:schemeClr val="accent1"/>
-            </a:lnRef>
-            <a:fillRef idx="0">
-              <a:schemeClr val="accent1"/>
-            </a:fillRef>
-            <a:effectRef idx="1">
-              <a:schemeClr val="accent1"/>
-            </a:effectRef>
-            <a:fontRef idx="minor">
-              <a:schemeClr val="tx1"/>
-            </a:fontRef>
-          </p:style>
-        </p:cxnSp>
-        <p:cxnSp>
-          <p:nvCxnSpPr>
-            <p:cNvPr id="10" name="Straight Connector 9"/>
-            <p:cNvCxnSpPr/>
-            <p:nvPr/>
-          </p:nvCxnSpPr>
-          <p:spPr>
-            <a:xfrm flipH="1">
-              <a:off x="10292292" y="3285067"/>
-              <a:ext cx="1896534" cy="1896533"/>
-            </a:xfrm>
-            <a:prstGeom prst="line">
-              <a:avLst/>
-            </a:prstGeom>
-            <a:ln w="9525">
-              <a:solidFill>
-                <a:schemeClr val="tx1"/>
-              </a:solidFill>
-            </a:ln>
-          </p:spPr>
-          <p:style>
-            <a:lnRef idx="2">
-              <a:schemeClr val="accent1"/>
-            </a:lnRef>
-            <a:fillRef idx="0">
-              <a:schemeClr val="accent1"/>
-            </a:fillRef>
-            <a:effectRef idx="1">
-              <a:schemeClr val="accent1"/>
-            </a:effectRef>
-            <a:fontRef idx="minor">
-              <a:schemeClr val="tx1"/>
-            </a:fontRef>
-          </p:style>
-        </p:cxnSp>
-        <p:cxnSp>
-          <p:nvCxnSpPr>
-            <p:cNvPr id="11" name="Straight Connector 10"/>
-            <p:cNvCxnSpPr/>
-            <p:nvPr/>
-          </p:nvCxnSpPr>
-          <p:spPr>
-            <a:xfrm flipH="1">
-              <a:off x="10443103" y="3131080"/>
-              <a:ext cx="1745722" cy="1745720"/>
-            </a:xfrm>
-            <a:prstGeom prst="line">
-              <a:avLst/>
-            </a:prstGeom>
-            <a:ln w="28575">
-              <a:solidFill>
-                <a:schemeClr val="tx1"/>
-              </a:solidFill>
-            </a:ln>
-          </p:spPr>
-          <p:style>
-            <a:lnRef idx="2">
-              <a:schemeClr val="accent1"/>
-            </a:lnRef>
-            <a:fillRef idx="0">
-              <a:schemeClr val="accent1"/>
-            </a:fillRef>
-            <a:effectRef idx="1">
-              <a:schemeClr val="accent1"/>
-            </a:effectRef>
-            <a:fontRef idx="minor">
-              <a:schemeClr val="tx1"/>
-            </a:fontRef>
-          </p:style>
-        </p:cxnSp>
-        <p:cxnSp>
-          <p:nvCxnSpPr>
-            <p:cNvPr id="12" name="Straight Connector 11"/>
-            <p:cNvCxnSpPr/>
-            <p:nvPr/>
-          </p:nvCxnSpPr>
-          <p:spPr>
-            <a:xfrm flipH="1">
-              <a:off x="10918826" y="3683001"/>
-              <a:ext cx="1270001" cy="1269999"/>
-            </a:xfrm>
-            <a:prstGeom prst="line">
-              <a:avLst/>
-            </a:prstGeom>
-            <a:ln w="28575">
-              <a:solidFill>
-                <a:schemeClr val="tx1"/>
-              </a:solidFill>
-            </a:ln>
-          </p:spPr>
-          <p:style>
-            <a:lnRef idx="2">
-              <a:schemeClr val="accent1"/>
-            </a:lnRef>
-            <a:fillRef idx="0">
-              <a:schemeClr val="accent1"/>
-            </a:fillRef>
-            <a:effectRef idx="1">
-              <a:schemeClr val="accent1"/>
-            </a:effectRef>
-            <a:fontRef idx="minor">
-              <a:schemeClr val="tx1"/>
-            </a:fontRef>
-          </p:style>
-        </p:cxnSp>
-      </p:grpSp>
-      <p:sp>
-        <p:nvSpPr>
-          <p:cNvPr id="2" name="Title Placeholder 1"/>
-          <p:cNvSpPr>
-            <a:spLocks noGrp="1"/>
-          </p:cNvSpPr>
-          <p:nvPr>
-            <p:ph type="title"/>
-          </p:nvPr>
         </p:nvSpPr>
         <p:spPr>
           <a:xfrm>
-            <a:off x="684212" y="4487332"/>
-            <a:ext cx="8534400" cy="1507067"/>
+            <a:off x="1" y="6400800"/>
+            <a:ext cx="12192000" cy="457200"/>
           </a:xfrm>
           <a:prstGeom prst="rect">
             <a:avLst/>
           </a:prstGeom>
-          <a:effectLst/>
+          <a:solidFill>
+            <a:schemeClr val="accent2"/>
+          </a:solidFill>
+          <a:ln>
+            <a:noFill/>
+          </a:ln>
         </p:spPr>
-        <p:txBody>
-          <a:bodyPr vert="horz" lIns="91440" tIns="45720" rIns="91440" bIns="45720" rtlCol="0" anchor="ctr">
-            <a:normAutofit/>
-          </a:bodyPr>
-          <a:lstStyle/>
-          <a:p>
-            <a:r>
-              <a:rPr lang="ru-RU" smtClean="0"/>
-              <a:t>Образец заголовка</a:t>
-            </a:r>
-            <a:endParaRPr lang="en-US" dirty="0"/>
-          </a:p>
-        </p:txBody>
-      </p:sp>
-      <p:sp>
-        <p:nvSpPr>
-          <p:cNvPr id="3" name="Text Placeholder 2"/>
-          <p:cNvSpPr>
-            <a:spLocks noGrp="1"/>
-          </p:cNvSpPr>
-          <p:nvPr>
-            <p:ph type="body" idx="1"/>
-          </p:nvPr>
+        <p:style>
+          <a:lnRef idx="2">
+            <a:schemeClr val="accent1">
+              <a:shade val="50000"/>
+            </a:schemeClr>
+          </a:lnRef>
+          <a:fillRef idx="1">
+            <a:schemeClr val="accent1"/>
+          </a:fillRef>
+          <a:effectRef idx="0">
+            <a:schemeClr val="accent1"/>
+          </a:effectRef>
+          <a:fontRef idx="minor">
+            <a:schemeClr val="lt1"/>
+          </a:fontRef>
+        </p:style>
+      </p:sp>
+      <p:sp>
+        <p:nvSpPr>
+          <p:cNvPr id="9" name="Rectangle 8"/>
+          <p:cNvSpPr/>
+          <p:nvPr/>
         </p:nvSpPr>
         <p:spPr>
           <a:xfrm>
-            <a:off x="684212" y="685800"/>
-            <a:ext cx="8534400" cy="3615267"/>
+            <a:off x="0" y="6334316"/>
+            <a:ext cx="12192001" cy="65998"/>
+          </a:xfrm>
+          <a:prstGeom prst="rect">
+            <a:avLst/>
+          </a:prstGeom>
+          <a:solidFill>
+            <a:schemeClr val="accent1"/>
+          </a:solidFill>
+          <a:ln>
+            <a:noFill/>
+          </a:ln>
+        </p:spPr>
+        <p:style>
+          <a:lnRef idx="2">
+            <a:schemeClr val="accent1">
+              <a:shade val="50000"/>
+            </a:schemeClr>
+          </a:lnRef>
+          <a:fillRef idx="1">
+            <a:schemeClr val="accent1"/>
+          </a:fillRef>
+          <a:effectRef idx="0">
+            <a:schemeClr val="accent1"/>
+          </a:effectRef>
+          <a:fontRef idx="minor">
+            <a:schemeClr val="lt1"/>
+          </a:fontRef>
+        </p:style>
+      </p:sp>
+      <p:sp>
+        <p:nvSpPr>
+          <p:cNvPr id="2" name="Title Placeholder 1"/>
+          <p:cNvSpPr>
+            <a:spLocks noGrp="1"/>
+          </p:cNvSpPr>
+          <p:nvPr>
+            <p:ph type="title"/>
+          </p:nvPr>
+        </p:nvSpPr>
+        <p:spPr>
+          <a:xfrm>
+            <a:off x="1097280" y="286603"/>
+            <a:ext cx="10058400" cy="1450757"/>
           </a:xfrm>
           <a:prstGeom prst="rect">
             <a:avLst/>
           </a:prstGeom>
         </p:spPr>
         <p:txBody>
-          <a:bodyPr vert="horz" lIns="91440" tIns="45720" rIns="91440" bIns="45720" rtlCol="0" anchor="ctr">
+          <a:bodyPr vert="horz" lIns="91440" tIns="45720" rIns="91440" bIns="45720" rtlCol="0" anchor="b">
             <a:normAutofit/>
           </a:bodyPr>
           <a:lstStyle/>
           <a:p>
-            <a:pPr lvl="0"/>
-            <a:r>
-              <a:rPr lang="ru-RU" smtClean="0"/>
-              <a:t>Образец текста</a:t>
-            </a:r>
-          </a:p>
-          <a:p>
-            <a:pPr lvl="1"/>
-            <a:r>
-              <a:rPr lang="ru-RU" smtClean="0"/>
-              <a:t>Второй уровень</a:t>
-            </a:r>
-          </a:p>
-          <a:p>
-            <a:pPr lvl="2"/>
-            <a:r>
-              <a:rPr lang="ru-RU" smtClean="0"/>
-              <a:t>Третий уровень</a:t>
-            </a:r>
-          </a:p>
-          <a:p>
-            <a:pPr lvl="3"/>
-            <a:r>
-              <a:rPr lang="ru-RU" smtClean="0"/>
-              <a:t>Четвертый уровень</a:t>
-            </a:r>
-          </a:p>
-          <a:p>
-            <a:pPr lvl="4"/>
-            <a:r>
-              <a:rPr lang="ru-RU" smtClean="0"/>
-              <a:t>Пятый уровень</a:t>
+            <a:r>
+              <a:rPr lang="ru-RU" smtClean="0"/>
+              <a:t>Образец заголовка</a:t>
             </a:r>
             <a:endParaRPr lang="en-US" dirty="0"/>
           </a:p>
@@ -4795,121 +3208,171 @@
       </p:sp>
       <p:sp>
         <p:nvSpPr>
-          <p:cNvPr id="4" name="Date Placeholder 3"/>
-          <p:cNvSpPr>
-            <a:spLocks noGrp="1"/>
-          </p:cNvSpPr>
-          <p:nvPr>
-            <p:ph type="dt" sz="half" idx="2"/>
+          <p:cNvPr id="3" name="Text Placeholder 2"/>
+          <p:cNvSpPr>
+            <a:spLocks noGrp="1"/>
+          </p:cNvSpPr>
+          <p:nvPr>
+            <p:ph type="body" idx="1"/>
           </p:nvPr>
         </p:nvSpPr>
         <p:spPr>
           <a:xfrm>
-            <a:off x="9904412" y="6172200"/>
-            <a:ext cx="1600200" cy="365125"/>
+            <a:off x="1097280" y="1845734"/>
+            <a:ext cx="10058400" cy="4023360"/>
           </a:xfrm>
           <a:prstGeom prst="rect">
             <a:avLst/>
           </a:prstGeom>
         </p:spPr>
         <p:txBody>
-          <a:bodyPr vert="horz" lIns="91440" tIns="45720" rIns="91440" bIns="45720" rtlCol="0" anchor="t"/>
-          <a:lstStyle>
-            <a:lvl1pPr algn="r">
-              <a:defRPr sz="1000" b="0" i="0">
-                <a:solidFill>
-                  <a:schemeClr val="bg2">
-                    <a:lumMod val="50000"/>
-                  </a:schemeClr>
-                </a:solidFill>
-                <a:effectLst/>
-                <a:latin typeface="+mn-lt"/>
-              </a:defRPr>
-            </a:lvl1pPr>
-          </a:lstStyle>
-          <a:p>
-            <a:fld id="{67E61FDA-2067-495C-9275-88CBF639CEF9}" type="datetimeFigureOut">
-              <a:rPr lang="ru-RU" smtClean="0"/>
-              <a:t>09.04.2026</a:t>
-            </a:fld>
-            <a:endParaRPr lang="ru-RU"/>
-          </a:p>
-        </p:txBody>
-      </p:sp>
-      <p:sp>
-        <p:nvSpPr>
-          <p:cNvPr id="5" name="Footer Placeholder 4"/>
-          <p:cNvSpPr>
-            <a:spLocks noGrp="1"/>
-          </p:cNvSpPr>
-          <p:nvPr>
-            <p:ph type="ftr" sz="quarter" idx="3"/>
+          <a:bodyPr vert="horz" lIns="0" tIns="45720" rIns="0" bIns="45720" rtlCol="0">
+            <a:normAutofit/>
+          </a:bodyPr>
+          <a:lstStyle/>
+          <a:p>
+            <a:pPr lvl="0"/>
+            <a:r>
+              <a:rPr lang="ru-RU" smtClean="0"/>
+              <a:t>Образец текста</a:t>
+            </a:r>
+          </a:p>
+          <a:p>
+            <a:pPr lvl="1"/>
+            <a:r>
+              <a:rPr lang="ru-RU" smtClean="0"/>
+              <a:t>Второй уровень</a:t>
+            </a:r>
+          </a:p>
+          <a:p>
+            <a:pPr lvl="2"/>
+            <a:r>
+              <a:rPr lang="ru-RU" smtClean="0"/>
+              <a:t>Третий уровень</a:t>
+            </a:r>
+          </a:p>
+          <a:p>
+            <a:pPr lvl="3"/>
+            <a:r>
+              <a:rPr lang="ru-RU" smtClean="0"/>
+              <a:t>Четвертый уровень</a:t>
+            </a:r>
+          </a:p>
+          <a:p>
+            <a:pPr lvl="4"/>
+            <a:r>
+              <a:rPr lang="ru-RU" smtClean="0"/>
+              <a:t>Пятый уровень</a:t>
+            </a:r>
+            <a:endParaRPr lang="en-US" dirty="0"/>
+          </a:p>
+        </p:txBody>
+      </p:sp>
+      <p:sp>
+        <p:nvSpPr>
+          <p:cNvPr id="4" name="Date Placeholder 3"/>
+          <p:cNvSpPr>
+            <a:spLocks noGrp="1"/>
+          </p:cNvSpPr>
+          <p:nvPr>
+            <p:ph type="dt" sz="half" idx="2"/>
           </p:nvPr>
         </p:nvSpPr>
         <p:spPr>
           <a:xfrm>
-            <a:off x="684212" y="6172200"/>
-            <a:ext cx="7543800" cy="365125"/>
+            <a:off x="1097280" y="6459785"/>
+            <a:ext cx="2472271" cy="365125"/>
           </a:xfrm>
           <a:prstGeom prst="rect">
             <a:avLst/>
           </a:prstGeom>
         </p:spPr>
         <p:txBody>
-          <a:bodyPr vert="horz" lIns="91440" tIns="45720" rIns="91440" bIns="45720" rtlCol="0" anchor="t"/>
+          <a:bodyPr vert="horz" lIns="91440" tIns="45720" rIns="91440" bIns="45720" rtlCol="0" anchor="ctr"/>
           <a:lstStyle>
             <a:lvl1pPr algn="l">
-              <a:defRPr sz="1000" b="0" i="0">
+              <a:defRPr sz="900">
                 <a:solidFill>
-                  <a:schemeClr val="bg2">
-                    <a:lumMod val="50000"/>
-                  </a:schemeClr>
+                  <a:srgbClr val="FFFFFF"/>
                 </a:solidFill>
-                <a:effectLst/>
-                <a:latin typeface="+mn-lt"/>
               </a:defRPr>
             </a:lvl1pPr>
           </a:lstStyle>
           <a:p>
+            <a:fld id="{67E61FDA-2067-495C-9275-88CBF639CEF9}" type="datetimeFigureOut">
+              <a:rPr lang="ru-RU" smtClean="0"/>
+              <a:t>09.04.2026</a:t>
+            </a:fld>
             <a:endParaRPr lang="ru-RU"/>
           </a:p>
         </p:txBody>
       </p:sp>
       <p:sp>
         <p:nvSpPr>
-          <p:cNvPr id="6" name="Slide Number Placeholder 5"/>
-          <p:cNvSpPr>
-            <a:spLocks noGrp="1"/>
-          </p:cNvSpPr>
-          <p:nvPr>
-            <p:ph type="sldNum" sz="quarter" idx="4"/>
+          <p:cNvPr id="5" name="Footer Placeholder 4"/>
+          <p:cNvSpPr>
+            <a:spLocks noGrp="1"/>
+          </p:cNvSpPr>
+          <p:nvPr>
+            <p:ph type="ftr" sz="quarter" idx="3"/>
           </p:nvPr>
         </p:nvSpPr>
         <p:spPr>
           <a:xfrm>
-            <a:off x="10363200" y="5578475"/>
-            <a:ext cx="1142245" cy="669925"/>
+            <a:off x="3686185" y="6459785"/>
+            <a:ext cx="4822804" cy="365125"/>
           </a:xfrm>
           <a:prstGeom prst="rect">
             <a:avLst/>
           </a:prstGeom>
         </p:spPr>
         <p:txBody>
-          <a:bodyPr vert="horz" lIns="91440" tIns="45720" rIns="91440" bIns="45720" rtlCol="0" anchor="b"/>
+          <a:bodyPr vert="horz" lIns="91440" tIns="45720" rIns="91440" bIns="45720" rtlCol="0" anchor="ctr"/>
           <a:lstStyle>
-            <a:lvl1pPr algn="r">
-              <a:defRPr sz="3200" b="0" i="0">
+            <a:lvl1pPr algn="ctr">
+              <a:defRPr sz="900" cap="all" baseline="0">
                 <a:solidFill>
-                  <a:schemeClr val="bg2">
-                    <a:lumMod val="50000"/>
-                  </a:schemeClr>
+                  <a:srgbClr val="FFFFFF"/>
                 </a:solidFill>
-                <a:effectLst/>
-                <a:latin typeface="+mn-lt"/>
               </a:defRPr>
             </a:lvl1pPr>
           </a:lstStyle>
           <a:p>
+            <a:endParaRPr lang="ru-RU"/>
+          </a:p>
+        </p:txBody>
+      </p:sp>
+      <p:sp>
+        <p:nvSpPr>
+          <p:cNvPr id="6" name="Slide Number Placeholder 5"/>
+          <p:cNvSpPr>
+            <a:spLocks noGrp="1"/>
+          </p:cNvSpPr>
+          <p:nvPr>
+            <p:ph type="sldNum" sz="quarter" idx="4"/>
+          </p:nvPr>
+        </p:nvSpPr>
+        <p:spPr>
+          <a:xfrm>
+            <a:off x="9900458" y="6459785"/>
+            <a:ext cx="1312025" cy="365125"/>
+          </a:xfrm>
+          <a:prstGeom prst="rect">
+            <a:avLst/>
+          </a:prstGeom>
+        </p:spPr>
+        <p:txBody>
+          <a:bodyPr vert="horz" lIns="91440" tIns="45720" rIns="91440" bIns="45720" rtlCol="0" anchor="ctr"/>
+          <a:lstStyle>
+            <a:lvl1pPr algn="r">
+              <a:defRPr sz="1050">
+                <a:solidFill>
+                  <a:srgbClr val="FFFFFF"/>
+                </a:solidFill>
+              </a:defRPr>
+            </a:lvl1pPr>
+          </a:lstStyle>
+          <a:p>
             <a:fld id="{5747A71D-55D4-4A3B-88E7-51FB5CB450FE}" type="slidenum">
               <a:rPr lang="ru-RU" smtClean="0"/>
               <a:t>‹#›</a:t>
@@ -4918,313 +3381,328 @@
           </a:p>
         </p:txBody>
       </p:sp>
+      <p:cxnSp>
+        <p:nvCxnSpPr>
+          <p:cNvPr id="10" name="Straight Connector 9"/>
+          <p:cNvCxnSpPr/>
+          <p:nvPr/>
+        </p:nvCxnSpPr>
+        <p:spPr>
+          <a:xfrm>
+            <a:off x="1193532" y="1737845"/>
+            <a:ext cx="9966960" cy="0"/>
+          </a:xfrm>
+          <a:prstGeom prst="line">
+            <a:avLst/>
+          </a:prstGeom>
+          <a:ln w="6350">
+            <a:solidFill>
+              <a:schemeClr val="tx1">
+                <a:lumMod val="50000"/>
+                <a:lumOff val="50000"/>
+              </a:schemeClr>
+            </a:solidFill>
+          </a:ln>
+        </p:spPr>
+        <p:style>
+          <a:lnRef idx="1">
+            <a:schemeClr val="accent1"/>
+          </a:lnRef>
+          <a:fillRef idx="0">
+            <a:schemeClr val="accent1"/>
+          </a:fillRef>
+          <a:effectRef idx="0">
+            <a:schemeClr val="accent1"/>
+          </a:effectRef>
+          <a:fontRef idx="minor">
+            <a:schemeClr val="tx1"/>
+          </a:fontRef>
+        </p:style>
+      </p:cxnSp>
     </p:spTree>
     <p:extLst>
       <p:ext uri="{BB962C8B-B14F-4D97-AF65-F5344CB8AC3E}">
-        <p14:creationId xmlns:p14="http://schemas.microsoft.com/office/powerpoint/2010/main" val="3539563377"/>
+        <p14:creationId xmlns:p14="http://schemas.microsoft.com/office/powerpoint/2010/main" val="3636822208"/>
       </p:ext>
     </p:extLst>
   </p:cSld>
-  <p:clrMap bg1="dk1" tx1="lt1" bg2="dk2" tx2="lt2" accent1="accent1" accent2="accent2" accent3="accent3" accent4="accent4" accent5="accent5" accent6="accent6" hlink="hlink" folHlink="folHlink"/>
+  <p:clrMap bg1="lt1" tx1="dk1" bg2="lt2" tx2="dk2" accent1="accent1" accent2="accent2" accent3="accent3" accent4="accent4" accent5="accent5" accent6="accent6" hlink="hlink" folHlink="folHlink"/>
   <p:sldLayoutIdLst>
-    <p:sldLayoutId id="2147483847" r:id="rId1"/>
-    <p:sldLayoutId id="2147483848" r:id="rId2"/>
-    <p:sldLayoutId id="2147483849" r:id="rId3"/>
-    <p:sldLayoutId id="2147483850" r:id="rId4"/>
-    <p:sldLayoutId id="2147483851" r:id="rId5"/>
-    <p:sldLayoutId id="2147483852" r:id="rId6"/>
-    <p:sldLayoutId id="2147483853" r:id="rId7"/>
-    <p:sldLayoutId id="2147483854" r:id="rId8"/>
-    <p:sldLayoutId id="2147483855" r:id="rId9"/>
-    <p:sldLayoutId id="2147483856" r:id="rId10"/>
-    <p:sldLayoutId id="2147483857" r:id="rId11"/>
-    <p:sldLayoutId id="2147483858" r:id="rId12"/>
-    <p:sldLayoutId id="2147483859" r:id="rId13"/>
-    <p:sldLayoutId id="2147483860" r:id="rId14"/>
-    <p:sldLayoutId id="2147483861" r:id="rId15"/>
-    <p:sldLayoutId id="2147483862" r:id="rId16"/>
-    <p:sldLayoutId id="2147483863" r:id="rId17"/>
+    <p:sldLayoutId id="2147483972" r:id="rId1"/>
+    <p:sldLayoutId id="2147483973" r:id="rId2"/>
+    <p:sldLayoutId id="2147483974" r:id="rId3"/>
+    <p:sldLayoutId id="2147483975" r:id="rId4"/>
+    <p:sldLayoutId id="2147483976" r:id="rId5"/>
+    <p:sldLayoutId id="2147483977" r:id="rId6"/>
+    <p:sldLayoutId id="2147483978" r:id="rId7"/>
+    <p:sldLayoutId id="2147483979" r:id="rId8"/>
+    <p:sldLayoutId id="2147483980" r:id="rId9"/>
+    <p:sldLayoutId id="2147483981" r:id="rId10"/>
+    <p:sldLayoutId id="2147483982" r:id="rId11"/>
   </p:sldLayoutIdLst>
   <p:txStyles>
     <p:titleStyle>
-      <a:lvl1pPr algn="l" defTabSz="457200" rtl="0" eaLnBrk="1" latinLnBrk="0" hangingPunct="1">
+      <a:lvl1pPr algn="l" defTabSz="914400" rtl="0" eaLnBrk="1" latinLnBrk="0" hangingPunct="1">
+        <a:lnSpc>
+          <a:spcPct val="85000"/>
+        </a:lnSpc>
         <a:spcBef>
           <a:spcPct val="0"/>
         </a:spcBef>
         <a:buNone/>
-        <a:defRPr sz="3600" kern="1200" cap="all">
-          <a:ln w="3175" cmpd="sng">
-            <a:noFill/>
-          </a:ln>
+        <a:defRPr sz="4800" kern="1200" spc="-50" baseline="0">
           <a:solidFill>
-            <a:schemeClr val="tx1"/>
+            <a:schemeClr val="tx1">
+              <a:lumMod val="75000"/>
+              <a:lumOff val="25000"/>
+            </a:schemeClr>
           </a:solidFill>
-          <a:effectLst/>
           <a:latin typeface="+mj-lt"/>
           <a:ea typeface="+mj-ea"/>
           <a:cs typeface="+mj-cs"/>
         </a:defRPr>
       </a:lvl1pPr>
-      <a:lvl2pPr eaLnBrk="1" hangingPunct="1">
-        <a:defRPr>
-          <a:solidFill>
-            <a:schemeClr val="tx2"/>
-          </a:solidFill>
-        </a:defRPr>
-      </a:lvl2pPr>
-      <a:lvl3pPr eaLnBrk="1" hangingPunct="1">
-        <a:defRPr>
-          <a:solidFill>
-            <a:schemeClr val="tx2"/>
-          </a:solidFill>
-        </a:defRPr>
-      </a:lvl3pPr>
-      <a:lvl4pPr eaLnBrk="1" hangingPunct="1">
-        <a:defRPr>
-          <a:solidFill>
-            <a:schemeClr val="tx2"/>
-          </a:solidFill>
-        </a:defRPr>
-      </a:lvl4pPr>
-      <a:lvl5pPr eaLnBrk="1" hangingPunct="1">
-        <a:defRPr>
-          <a:solidFill>
-            <a:schemeClr val="tx2"/>
-          </a:solidFill>
-        </a:defRPr>
-      </a:lvl5pPr>
-      <a:lvl6pPr eaLnBrk="1" hangingPunct="1">
-        <a:defRPr>
-          <a:solidFill>
-            <a:schemeClr val="tx2"/>
-          </a:solidFill>
-        </a:defRPr>
-      </a:lvl6pPr>
-      <a:lvl7pPr eaLnBrk="1" hangingPunct="1">
-        <a:defRPr>
-          <a:solidFill>
-            <a:schemeClr val="tx2"/>
-          </a:solidFill>
-        </a:defRPr>
-      </a:lvl7pPr>
-      <a:lvl8pPr eaLnBrk="1" hangingPunct="1">
-        <a:defRPr>
-          <a:solidFill>
-            <a:schemeClr val="tx2"/>
-          </a:solidFill>
-        </a:defRPr>
-      </a:lvl8pPr>
-      <a:lvl9pPr eaLnBrk="1" hangingPunct="1">
-        <a:defRPr>
-          <a:solidFill>
-            <a:schemeClr val="tx2"/>
-          </a:solidFill>
-        </a:defRPr>
-      </a:lvl9pPr>
     </p:titleStyle>
     <p:bodyStyle>
-      <a:lvl1pPr marL="285750" indent="-285750" algn="l" defTabSz="457200" rtl="0" eaLnBrk="1" latinLnBrk="0" hangingPunct="1">
+      <a:lvl1pPr marL="91440" indent="-91440" algn="l" defTabSz="914400" rtl="0" eaLnBrk="1" latinLnBrk="0" hangingPunct="1">
+        <a:lnSpc>
+          <a:spcPct val="90000"/>
+        </a:lnSpc>
         <a:spcBef>
-          <a:spcPct val="20000"/>
+          <a:spcPts val="1200"/>
         </a:spcBef>
         <a:spcAft>
-          <a:spcPts val="600"/>
+          <a:spcPts val="200"/>
         </a:spcAft>
         <a:buClr>
-          <a:schemeClr val="tx1"/>
+          <a:schemeClr val="accent1"/>
         </a:buClr>
-        <a:buSzPct val="80000"/>
-        <a:buFont typeface="Wingdings 3" panose="05040102010807070707" pitchFamily="18" charset="2"/>
-        <a:buChar char=""/>
-        <a:defRPr sz="2000" kern="1200" cap="none">
+        <a:buSzPct val="100000"/>
+        <a:buFont typeface="Calibri" panose="020F0502020204030204" pitchFamily="34" charset="0"/>
+        <a:buChar char=" "/>
+        <a:defRPr sz="2000" kern="1200">
           <a:solidFill>
-            <a:schemeClr val="tx1"/>
+            <a:schemeClr val="tx1">
+              <a:lumMod val="75000"/>
+              <a:lumOff val="25000"/>
+            </a:schemeClr>
           </a:solidFill>
-          <a:effectLst/>
           <a:latin typeface="+mn-lt"/>
           <a:ea typeface="+mn-ea"/>
           <a:cs typeface="+mn-cs"/>
         </a:defRPr>
       </a:lvl1pPr>
-      <a:lvl2pPr marL="742950" indent="-285750" algn="l" defTabSz="457200" rtl="0" eaLnBrk="1" latinLnBrk="0" hangingPunct="1">
+      <a:lvl2pPr marL="384048" indent="-182880" algn="l" defTabSz="914400" rtl="0" eaLnBrk="1" latinLnBrk="0" hangingPunct="1">
+        <a:lnSpc>
+          <a:spcPct val="90000"/>
+        </a:lnSpc>
         <a:spcBef>
-          <a:spcPct val="20000"/>
+          <a:spcPts val="200"/>
         </a:spcBef>
         <a:spcAft>
-          <a:spcPts val="600"/>
+          <a:spcPts val="400"/>
         </a:spcAft>
         <a:buClr>
-          <a:schemeClr val="tx1"/>
+          <a:schemeClr val="accent1"/>
         </a:buClr>
-        <a:buSzPct val="80000"/>
-        <a:buFont typeface="Wingdings 3" panose="05040102010807070707" pitchFamily="18" charset="2"/>
-        <a:buChar char=""/>
-        <a:defRPr sz="1800" kern="1200" cap="none">
+        <a:buFont typeface="Calibri" pitchFamily="34" charset="0"/>
+        <a:buChar char="◦"/>
+        <a:defRPr sz="1800" kern="1200">
           <a:solidFill>
-            <a:schemeClr val="tx1"/>
+            <a:schemeClr val="tx1">
+              <a:lumMod val="75000"/>
+              <a:lumOff val="25000"/>
+            </a:schemeClr>
           </a:solidFill>
-          <a:effectLst/>
           <a:latin typeface="+mn-lt"/>
           <a:ea typeface="+mn-ea"/>
           <a:cs typeface="+mn-cs"/>
         </a:defRPr>
       </a:lvl2pPr>
-      <a:lvl3pPr marL="1200150" indent="-285750" algn="l" defTabSz="457200" rtl="0" eaLnBrk="1" latinLnBrk="0" hangingPunct="1">
+      <a:lvl3pPr marL="566928" indent="-182880" algn="l" defTabSz="914400" rtl="0" eaLnBrk="1" latinLnBrk="0" hangingPunct="1">
+        <a:lnSpc>
+          <a:spcPct val="90000"/>
+        </a:lnSpc>
         <a:spcBef>
-          <a:spcPct val="20000"/>
+          <a:spcPts val="200"/>
         </a:spcBef>
         <a:spcAft>
-          <a:spcPts val="600"/>
+          <a:spcPts val="400"/>
         </a:spcAft>
         <a:buClr>
-          <a:schemeClr val="tx1"/>
+          <a:schemeClr val="accent1"/>
         </a:buClr>
-        <a:buSzPct val="80000"/>
-        <a:buFont typeface="Wingdings 3" panose="05040102010807070707" pitchFamily="18" charset="2"/>
-        <a:buChar char=""/>
-        <a:defRPr sz="1600" kern="1200" cap="none">
+        <a:buFont typeface="Calibri" pitchFamily="34" charset="0"/>
+        <a:buChar char="◦"/>
+        <a:defRPr sz="1400" kern="1200">
           <a:solidFill>
-            <a:schemeClr val="tx1"/>
+            <a:schemeClr val="tx1">
+              <a:lumMod val="75000"/>
+              <a:lumOff val="25000"/>
+            </a:schemeClr>
           </a:solidFill>
-          <a:effectLst/>
           <a:latin typeface="+mn-lt"/>
           <a:ea typeface="+mn-ea"/>
           <a:cs typeface="+mn-cs"/>
         </a:defRPr>
       </a:lvl3pPr>
-      <a:lvl4pPr marL="1543050" indent="-171450" algn="l" defTabSz="457200" rtl="0" eaLnBrk="1" latinLnBrk="0" hangingPunct="1">
+      <a:lvl4pPr marL="749808" indent="-182880" algn="l" defTabSz="914400" rtl="0" eaLnBrk="1" latinLnBrk="0" hangingPunct="1">
+        <a:lnSpc>
+          <a:spcPct val="90000"/>
+        </a:lnSpc>
         <a:spcBef>
-          <a:spcPct val="20000"/>
+          <a:spcPts val="200"/>
         </a:spcBef>
         <a:spcAft>
-          <a:spcPts val="600"/>
+          <a:spcPts val="400"/>
         </a:spcAft>
         <a:buClr>
-          <a:schemeClr val="tx1"/>
+          <a:schemeClr val="accent1"/>
         </a:buClr>
-        <a:buSzPct val="80000"/>
-        <a:buFont typeface="Wingdings 3" panose="05040102010807070707" pitchFamily="18" charset="2"/>
-        <a:buChar char=""/>
-        <a:defRPr sz="1400" kern="1200" cap="none">
+        <a:buFont typeface="Calibri" pitchFamily="34" charset="0"/>
+        <a:buChar char="◦"/>
+        <a:defRPr sz="1400" kern="1200">
           <a:solidFill>
-            <a:schemeClr val="tx1"/>
+            <a:schemeClr val="tx1">
+              <a:lumMod val="75000"/>
+              <a:lumOff val="25000"/>
+            </a:schemeClr>
           </a:solidFill>
-          <a:effectLst/>
           <a:latin typeface="+mn-lt"/>
           <a:ea typeface="+mn-ea"/>
           <a:cs typeface="+mn-cs"/>
         </a:defRPr>
       </a:lvl4pPr>
-      <a:lvl5pPr marL="2000250" indent="-171450" algn="l" defTabSz="457200" rtl="0" eaLnBrk="1" latinLnBrk="0" hangingPunct="1">
+      <a:lvl5pPr marL="932688" indent="-182880" algn="l" defTabSz="914400" rtl="0" eaLnBrk="1" latinLnBrk="0" hangingPunct="1">
+        <a:lnSpc>
+          <a:spcPct val="90000"/>
+        </a:lnSpc>
         <a:spcBef>
-          <a:spcPct val="20000"/>
+          <a:spcPts val="200"/>
         </a:spcBef>
         <a:spcAft>
-          <a:spcPts val="600"/>
+          <a:spcPts val="400"/>
         </a:spcAft>
         <a:buClr>
-          <a:schemeClr val="tx1"/>
+          <a:schemeClr val="accent1"/>
         </a:buClr>
-        <a:buSzPct val="80000"/>
-        <a:buFont typeface="Wingdings 3" panose="05040102010807070707" pitchFamily="18" charset="2"/>
-        <a:buChar char=""/>
-        <a:defRPr sz="1400" kern="1200" cap="none">
+        <a:buFont typeface="Calibri" pitchFamily="34" charset="0"/>
+        <a:buChar char="◦"/>
+        <a:defRPr sz="1400" kern="1200">
           <a:solidFill>
-            <a:schemeClr val="tx1"/>
+            <a:schemeClr val="tx1">
+              <a:lumMod val="75000"/>
+              <a:lumOff val="25000"/>
+            </a:schemeClr>
           </a:solidFill>
-          <a:effectLst/>
           <a:latin typeface="+mn-lt"/>
           <a:ea typeface="+mn-ea"/>
           <a:cs typeface="+mn-cs"/>
         </a:defRPr>
       </a:lvl5pPr>
-      <a:lvl6pPr marL="2514600" indent="-228600" algn="l" defTabSz="457200" rtl="0" eaLnBrk="1" latinLnBrk="0" hangingPunct="1">
+      <a:lvl6pPr marL="1100000" indent="-228600" algn="l" defTabSz="914400" rtl="0" eaLnBrk="1" latinLnBrk="0" hangingPunct="1">
+        <a:lnSpc>
+          <a:spcPct val="90000"/>
+        </a:lnSpc>
         <a:spcBef>
-          <a:spcPct val="20000"/>
+          <a:spcPts val="200"/>
         </a:spcBef>
         <a:spcAft>
-          <a:spcPts val="600"/>
+          <a:spcPts val="400"/>
         </a:spcAft>
         <a:buClr>
-          <a:schemeClr val="tx1"/>
+          <a:schemeClr val="accent1"/>
         </a:buClr>
-        <a:buSzPct val="80000"/>
-        <a:buFont typeface="Wingdings 3" panose="05040102010807070707" pitchFamily="18" charset="2"/>
-        <a:buChar char=""/>
-        <a:defRPr sz="1400" kern="1200" cap="none">
+        <a:buFont typeface="Calibri" pitchFamily="34" charset="0"/>
+        <a:buChar char="◦"/>
+        <a:defRPr sz="1400" kern="1200">
           <a:solidFill>
-            <a:schemeClr val="tx1"/>
+            <a:schemeClr val="tx1">
+              <a:lumMod val="75000"/>
+              <a:lumOff val="25000"/>
+            </a:schemeClr>
           </a:solidFill>
-          <a:effectLst/>
           <a:latin typeface="+mn-lt"/>
           <a:ea typeface="+mn-ea"/>
           <a:cs typeface="+mn-cs"/>
         </a:defRPr>
       </a:lvl6pPr>
-      <a:lvl7pPr marL="2971800" indent="-228600" algn="l" defTabSz="457200" rtl="0" eaLnBrk="1" latinLnBrk="0" hangingPunct="1">
+      <a:lvl7pPr marL="1300000" indent="-228600" algn="l" defTabSz="914400" rtl="0" eaLnBrk="1" latinLnBrk="0" hangingPunct="1">
+        <a:lnSpc>
+          <a:spcPct val="90000"/>
+        </a:lnSpc>
         <a:spcBef>
-          <a:spcPct val="20000"/>
+          <a:spcPts val="200"/>
         </a:spcBef>
         <a:spcAft>
-          <a:spcPts val="600"/>
+          <a:spcPts val="400"/>
         </a:spcAft>
         <a:buClr>
-          <a:schemeClr val="tx1"/>
+          <a:schemeClr val="accent1"/>
         </a:buClr>
-        <a:buSzPct val="80000"/>
-        <a:buFont typeface="Wingdings 3" panose="05040102010807070707" pitchFamily="18" charset="2"/>
-        <a:buChar char=""/>
-        <a:defRPr sz="1400" kern="1200" cap="none">
+        <a:buFont typeface="Calibri" pitchFamily="34" charset="0"/>
+        <a:buChar char="◦"/>
+        <a:defRPr sz="1400" kern="1200">
           <a:solidFill>
-            <a:schemeClr val="tx1"/>
+            <a:schemeClr val="tx1">
+              <a:lumMod val="75000"/>
+              <a:lumOff val="25000"/>
+            </a:schemeClr>
           </a:solidFill>
-          <a:effectLst/>
           <a:latin typeface="+mn-lt"/>
           <a:ea typeface="+mn-ea"/>
           <a:cs typeface="+mn-cs"/>
         </a:defRPr>
       </a:lvl7pPr>
-      <a:lvl8pPr marL="3429000" indent="-228600" algn="l" defTabSz="457200" rtl="0" eaLnBrk="1" latinLnBrk="0" hangingPunct="1">
+      <a:lvl8pPr marL="1500000" indent="-228600" algn="l" defTabSz="914400" rtl="0" eaLnBrk="1" latinLnBrk="0" hangingPunct="1">
+        <a:lnSpc>
+          <a:spcPct val="90000"/>
+        </a:lnSpc>
         <a:spcBef>
-          <a:spcPct val="20000"/>
+          <a:spcPts val="200"/>
         </a:spcBef>
         <a:spcAft>
-          <a:spcPts val="600"/>
+          <a:spcPts val="400"/>
         </a:spcAft>
         <a:buClr>
-          <a:schemeClr val="tx1"/>
+          <a:schemeClr val="accent1"/>
         </a:buClr>
-        <a:buSzPct val="80000"/>
-        <a:buFont typeface="Wingdings 3" panose="05040102010807070707" pitchFamily="18" charset="2"/>
-        <a:buChar char=""/>
-        <a:defRPr sz="1400" kern="1200" cap="none">
+        <a:buFont typeface="Calibri" pitchFamily="34" charset="0"/>
+        <a:buChar char="◦"/>
+        <a:defRPr sz="1400" kern="1200">
           <a:solidFill>
-            <a:schemeClr val="tx1"/>
+            <a:schemeClr val="tx1">
+              <a:lumMod val="75000"/>
+              <a:lumOff val="25000"/>
+            </a:schemeClr>
           </a:solidFill>
-          <a:effectLst/>
           <a:latin typeface="+mn-lt"/>
           <a:ea typeface="+mn-ea"/>
           <a:cs typeface="+mn-cs"/>
         </a:defRPr>
       </a:lvl8pPr>
-      <a:lvl9pPr marL="3886200" indent="-228600" algn="l" defTabSz="457200" rtl="0" eaLnBrk="1" latinLnBrk="0" hangingPunct="1">
+      <a:lvl9pPr marL="1700000" indent="-228600" algn="l" defTabSz="914400" rtl="0" eaLnBrk="1" latinLnBrk="0" hangingPunct="1">
+        <a:lnSpc>
+          <a:spcPct val="90000"/>
+        </a:lnSpc>
         <a:spcBef>
-          <a:spcPct val="20000"/>
+          <a:spcPts val="200"/>
         </a:spcBef>
         <a:spcAft>
-          <a:spcPts val="600"/>
+          <a:spcPts val="400"/>
         </a:spcAft>
         <a:buClr>
-          <a:schemeClr val="tx1"/>
+          <a:schemeClr val="accent1"/>
         </a:buClr>
-        <a:buSzPct val="80000"/>
-        <a:buFont typeface="Wingdings 3" panose="05040102010807070707" pitchFamily="18" charset="2"/>
-        <a:buChar char=""/>
-        <a:defRPr sz="1400" kern="1200" cap="none">
+        <a:buFont typeface="Calibri" pitchFamily="34" charset="0"/>
+        <a:buChar char="◦"/>
+        <a:defRPr sz="1400" kern="1200">
           <a:solidFill>
-            <a:schemeClr val="tx1"/>
+            <a:schemeClr val="tx1">
+              <a:lumMod val="75000"/>
+              <a:lumOff val="25000"/>
+            </a:schemeClr>
           </a:solidFill>
-          <a:effectLst/>
           <a:latin typeface="+mn-lt"/>
           <a:ea typeface="+mn-ea"/>
           <a:cs typeface="+mn-cs"/>
@@ -5235,7 +3713,7 @@
       <a:defPPr>
         <a:defRPr lang="en-US"/>
       </a:defPPr>
-      <a:lvl1pPr marL="0" algn="l" defTabSz="457200" rtl="0" eaLnBrk="1" latinLnBrk="0" hangingPunct="1">
+      <a:lvl1pPr marL="0" algn="l" defTabSz="914400" rtl="0" eaLnBrk="1" latinLnBrk="0" hangingPunct="1">
         <a:defRPr sz="1800" kern="1200">
           <a:solidFill>
             <a:schemeClr val="tx1"/>
@@ -5245,7 +3723,7 @@
           <a:cs typeface="+mn-cs"/>
         </a:defRPr>
       </a:lvl1pPr>
-      <a:lvl2pPr marL="457200" algn="l" defTabSz="457200" rtl="0" eaLnBrk="1" latinLnBrk="0" hangingPunct="1">
+      <a:lvl2pPr marL="457200" algn="l" defTabSz="914400" rtl="0" eaLnBrk="1" latinLnBrk="0" hangingPunct="1">
         <a:defRPr sz="1800" kern="1200">
           <a:solidFill>
             <a:schemeClr val="tx1"/>
@@ -5255,7 +3733,7 @@
           <a:cs typeface="+mn-cs"/>
         </a:defRPr>
       </a:lvl2pPr>
-      <a:lvl3pPr marL="914400" algn="l" defTabSz="457200" rtl="0" eaLnBrk="1" latinLnBrk="0" hangingPunct="1">
+      <a:lvl3pPr marL="914400" algn="l" defTabSz="914400" rtl="0" eaLnBrk="1" latinLnBrk="0" hangingPunct="1">
         <a:defRPr sz="1800" kern="1200">
           <a:solidFill>
             <a:schemeClr val="tx1"/>
@@ -5265,7 +3743,7 @@
           <a:cs typeface="+mn-cs"/>
         </a:defRPr>
       </a:lvl3pPr>
-      <a:lvl4pPr marL="1371600" algn="l" defTabSz="457200" rtl="0" eaLnBrk="1" latinLnBrk="0" hangingPunct="1">
+      <a:lvl4pPr marL="1371600" algn="l" defTabSz="914400" rtl="0" eaLnBrk="1" latinLnBrk="0" hangingPunct="1">
         <a:defRPr sz="1800" kern="1200">
           <a:solidFill>
             <a:schemeClr val="tx1"/>
@@ -5275,7 +3753,7 @@
           <a:cs typeface="+mn-cs"/>
         </a:defRPr>
       </a:lvl4pPr>
-      <a:lvl5pPr marL="1828800" algn="l" defTabSz="457200" rtl="0" eaLnBrk="1" latinLnBrk="0" hangingPunct="1">
+      <a:lvl5pPr marL="1828800" algn="l" defTabSz="914400" rtl="0" eaLnBrk="1" latinLnBrk="0" hangingPunct="1">
         <a:defRPr sz="1800" kern="1200">
           <a:solidFill>
             <a:schemeClr val="tx1"/>
@@ -5285,7 +3763,7 @@
           <a:cs typeface="+mn-cs"/>
         </a:defRPr>
       </a:lvl5pPr>
-      <a:lvl6pPr marL="2286000" algn="l" defTabSz="457200" rtl="0" eaLnBrk="1" latinLnBrk="0" hangingPunct="1">
+      <a:lvl6pPr marL="2286000" algn="l" defTabSz="914400" rtl="0" eaLnBrk="1" latinLnBrk="0" hangingPunct="1">
         <a:defRPr sz="1800" kern="1200">
           <a:solidFill>
             <a:schemeClr val="tx1"/>
@@ -5295,7 +3773,7 @@
           <a:cs typeface="+mn-cs"/>
         </a:defRPr>
       </a:lvl6pPr>
-      <a:lvl7pPr marL="2743200" algn="l" defTabSz="457200" rtl="0" eaLnBrk="1" latinLnBrk="0" hangingPunct="1">
+      <a:lvl7pPr marL="2743200" algn="l" defTabSz="914400" rtl="0" eaLnBrk="1" latinLnBrk="0" hangingPunct="1">
         <a:defRPr sz="1800" kern="1200">
           <a:solidFill>
             <a:schemeClr val="tx1"/>
@@ -5305,7 +3783,7 @@
           <a:cs typeface="+mn-cs"/>
         </a:defRPr>
       </a:lvl7pPr>
-      <a:lvl8pPr marL="3200400" algn="l" defTabSz="457200" rtl="0" eaLnBrk="1" latinLnBrk="0" hangingPunct="1">
+      <a:lvl8pPr marL="3200400" algn="l" defTabSz="914400" rtl="0" eaLnBrk="1" latinLnBrk="0" hangingPunct="1">
         <a:defRPr sz="1800" kern="1200">
           <a:solidFill>
             <a:schemeClr val="tx1"/>
@@ -5315,7 +3793,7 @@
           <a:cs typeface="+mn-cs"/>
         </a:defRPr>
       </a:lvl8pPr>
-      <a:lvl9pPr marL="3657600" algn="l" defTabSz="457200" rtl="0" eaLnBrk="1" latinLnBrk="0" hangingPunct="1">
+      <a:lvl9pPr marL="3657600" algn="l" defTabSz="914400" rtl="0" eaLnBrk="1" latinLnBrk="0" hangingPunct="1">
         <a:defRPr sz="1800" kern="1200">
           <a:solidFill>
             <a:schemeClr val="tx1"/>
@@ -5375,11 +3853,7 @@
             </a:r>
             <a:r>
               <a:rPr lang="ru-RU" sz="4000" dirty="0" smtClean="0"/>
-              <a:t>)</a:t>
-            </a:r>
-            <a:r>
-              <a:rPr lang="ru-RU" sz="4000" dirty="0" smtClean="0"/>
-              <a:t> Этапы и методологии</a:t>
+              <a:t>) Этапы и методологии</a:t>
             </a:r>
             <a:r>
               <a:rPr lang="ru-RU" dirty="0" smtClean="0"/>
@@ -5441,7 +3915,9 @@
         </p:nvSpPr>
         <p:spPr/>
         <p:txBody>
-          <a:bodyPr/>
+          <a:bodyPr>
+            <a:normAutofit/>
+          </a:bodyPr>
           <a:lstStyle/>
           <a:p>
             <a:r>
@@ -5718,7 +4194,9 @@
         </p:nvSpPr>
         <p:spPr/>
         <p:txBody>
-          <a:bodyPr/>
+          <a:bodyPr>
+            <a:normAutofit/>
+          </a:bodyPr>
           <a:lstStyle/>
           <a:p>
             <a:r>
@@ -5872,7 +4350,9 @@
         </p:nvSpPr>
         <p:spPr/>
         <p:txBody>
-          <a:bodyPr/>
+          <a:bodyPr>
+            <a:normAutofit/>
+          </a:bodyPr>
           <a:lstStyle/>
           <a:p>
             <a:r>
@@ -5903,7 +4383,7 @@
         <p:spPr/>
         <p:txBody>
           <a:bodyPr>
-            <a:normAutofit lnSpcReduction="10000"/>
+            <a:normAutofit/>
           </a:bodyPr>
           <a:lstStyle/>
           <a:p>
@@ -6054,7 +4534,9 @@
         </p:nvSpPr>
         <p:spPr/>
         <p:txBody>
-          <a:bodyPr/>
+          <a:bodyPr>
+            <a:normAutofit/>
+          </a:bodyPr>
           <a:lstStyle/>
           <a:p>
             <a:r>
@@ -6214,7 +4696,7 @@
         <p:spPr/>
         <p:txBody>
           <a:bodyPr>
-            <a:normAutofit fontScale="90000"/>
+            <a:normAutofit/>
           </a:bodyPr>
           <a:lstStyle/>
           <a:p>
@@ -6242,7 +4724,7 @@
         <p:spPr/>
         <p:txBody>
           <a:bodyPr>
-            <a:normAutofit fontScale="92500" lnSpcReduction="20000"/>
+            <a:normAutofit/>
           </a:bodyPr>
           <a:lstStyle/>
           <a:p>
@@ -6380,7 +4862,9 @@
         </p:nvSpPr>
         <p:spPr/>
         <p:txBody>
-          <a:bodyPr/>
+          <a:bodyPr>
+            <a:normAutofit/>
+          </a:bodyPr>
           <a:lstStyle/>
           <a:p>
             <a:r>
@@ -6561,7 +5045,9 @@
         </p:nvSpPr>
         <p:spPr/>
         <p:txBody>
-          <a:bodyPr/>
+          <a:bodyPr>
+            <a:normAutofit/>
+          </a:bodyPr>
           <a:lstStyle/>
           <a:p>
             <a:r>
@@ -6685,7 +5171,9 @@
         </p:nvSpPr>
         <p:spPr/>
         <p:txBody>
-          <a:bodyPr/>
+          <a:bodyPr>
+            <a:normAutofit/>
+          </a:bodyPr>
           <a:lstStyle/>
           <a:p>
             <a:r>
@@ -6757,6 +5245,70 @@
           </a:p>
         </p:txBody>
       </p:sp>
+      <p:pic>
+        <p:nvPicPr>
+          <p:cNvPr id="1026" name="Picture 2" descr="Picture background"/>
+          <p:cNvPicPr>
+            <a:picLocks noChangeAspect="1" noChangeArrowheads="1"/>
+          </p:cNvPicPr>
+          <p:nvPr/>
+        </p:nvPicPr>
+        <p:blipFill>
+          <a:blip r:embed="rId2">
+            <a:extLst>
+              <a:ext uri="{28A0092B-C50C-407E-A947-70E740481C1C}">
+                <a14:useLocalDpi xmlns:a14="http://schemas.microsoft.com/office/drawing/2010/main" val="0"/>
+              </a:ext>
+            </a:extLst>
+          </a:blip>
+          <a:srcRect/>
+          <a:stretch>
+            <a:fillRect/>
+          </a:stretch>
+        </p:blipFill>
+        <p:spPr bwMode="auto">
+          <a:xfrm>
+            <a:off x="5696125" y="2625661"/>
+            <a:ext cx="6495875" cy="3652876"/>
+          </a:xfrm>
+          <a:prstGeom prst="ellipse">
+            <a:avLst/>
+          </a:prstGeom>
+          <a:ln w="63500" cap="rnd">
+            <a:solidFill>
+              <a:srgbClr val="333333"/>
+            </a:solidFill>
+          </a:ln>
+          <a:effectLst>
+            <a:outerShdw blurRad="381000" dist="292100" dir="5400000" sx="-80000" sy="-18000" rotWithShape="0">
+              <a:srgbClr val="000000">
+                <a:alpha val="22000"/>
+              </a:srgbClr>
+            </a:outerShdw>
+          </a:effectLst>
+          <a:scene3d>
+            <a:camera prst="orthographicFront"/>
+            <a:lightRig rig="contrasting" dir="t">
+              <a:rot lat="0" lon="0" rev="3000000"/>
+            </a:lightRig>
+          </a:scene3d>
+          <a:sp3d contourW="7620">
+            <a:bevelT w="95250" h="31750"/>
+            <a:contourClr>
+              <a:srgbClr val="333333"/>
+            </a:contourClr>
+          </a:sp3d>
+          <a:extLst>
+            <a:ext uri="{909E8E84-426E-40DD-AFC4-6F175D3DCCD1}">
+              <a14:hiddenFill xmlns:a14="http://schemas.microsoft.com/office/drawing/2010/main">
+                <a:solidFill>
+                  <a:srgbClr val="FFFFFF"/>
+                </a:solidFill>
+              </a14:hiddenFill>
+            </a:ext>
+          </a:extLst>
+        </p:spPr>
+      </p:pic>
     </p:spTree>
     <p:extLst>
       <p:ext uri="{BB962C8B-B14F-4D97-AF65-F5344CB8AC3E}">
@@ -6864,6 +5416,47 @@
           </a:p>
         </p:txBody>
       </p:sp>
+      <p:pic>
+        <p:nvPicPr>
+          <p:cNvPr id="3074" name="Picture 2" descr="https://avatars.mds.yandex.net/i?id=07e0da9e1840ff08fc90e5f9a24d508b59e34b95-4012375-images-thumbs&amp;n=13"/>
+          <p:cNvPicPr>
+            <a:picLocks noChangeAspect="1" noChangeArrowheads="1"/>
+          </p:cNvPicPr>
+          <p:nvPr/>
+        </p:nvPicPr>
+        <p:blipFill>
+          <a:blip r:embed="rId2">
+            <a:extLst>
+              <a:ext uri="{28A0092B-C50C-407E-A947-70E740481C1C}">
+                <a14:useLocalDpi xmlns:a14="http://schemas.microsoft.com/office/drawing/2010/main" val="0"/>
+              </a:ext>
+            </a:extLst>
+          </a:blip>
+          <a:srcRect/>
+          <a:stretch>
+            <a:fillRect/>
+          </a:stretch>
+        </p:blipFill>
+        <p:spPr bwMode="auto">
+          <a:xfrm>
+            <a:off x="5964573" y="2628952"/>
+            <a:ext cx="6227428" cy="3708931"/>
+          </a:xfrm>
+          <a:prstGeom prst="rect">
+            <a:avLst/>
+          </a:prstGeom>
+          <a:noFill/>
+          <a:extLst>
+            <a:ext uri="{909E8E84-426E-40DD-AFC4-6F175D3DCCD1}">
+              <a14:hiddenFill xmlns:a14="http://schemas.microsoft.com/office/drawing/2010/main">
+                <a:solidFill>
+                  <a:srgbClr val="FFFFFF"/>
+                </a:solidFill>
+              </a14:hiddenFill>
+            </a:ext>
+          </a:extLst>
+        </p:spPr>
+      </p:pic>
     </p:spTree>
     <p:extLst>
       <p:ext uri="{BB962C8B-B14F-4D97-AF65-F5344CB8AC3E}">
@@ -6913,7 +5506,9 @@
         </p:nvSpPr>
         <p:spPr/>
         <p:txBody>
-          <a:bodyPr/>
+          <a:bodyPr>
+            <a:normAutofit/>
+          </a:bodyPr>
           <a:lstStyle/>
           <a:p>
             <a:r>
@@ -6996,6 +5591,60 @@
           </a:p>
         </p:txBody>
       </p:sp>
+      <p:pic>
+        <p:nvPicPr>
+          <p:cNvPr id="4098" name="Picture 2" descr="Picture background"/>
+          <p:cNvPicPr>
+            <a:picLocks noChangeAspect="1" noChangeArrowheads="1"/>
+          </p:cNvPicPr>
+          <p:nvPr/>
+        </p:nvPicPr>
+        <p:blipFill>
+          <a:blip r:embed="rId2" cstate="print">
+            <a:extLst>
+              <a:ext uri="{28A0092B-C50C-407E-A947-70E740481C1C}">
+                <a14:useLocalDpi xmlns:a14="http://schemas.microsoft.com/office/drawing/2010/main" val="0"/>
+              </a:ext>
+            </a:extLst>
+          </a:blip>
+          <a:srcRect/>
+          <a:stretch>
+            <a:fillRect/>
+          </a:stretch>
+        </p:blipFill>
+        <p:spPr bwMode="auto">
+          <a:xfrm>
+            <a:off x="6449227" y="2483141"/>
+            <a:ext cx="5742773" cy="3733100"/>
+          </a:xfrm>
+          <a:prstGeom prst="rect">
+            <a:avLst/>
+          </a:prstGeom>
+          <a:ln w="38100" cap="sq">
+            <a:solidFill>
+              <a:srgbClr val="000000"/>
+            </a:solidFill>
+            <a:prstDash val="solid"/>
+            <a:miter lim="800000"/>
+          </a:ln>
+          <a:effectLst>
+            <a:outerShdw blurRad="50800" dist="38100" dir="2700000" algn="tl" rotWithShape="0">
+              <a:srgbClr val="000000">
+                <a:alpha val="43000"/>
+              </a:srgbClr>
+            </a:outerShdw>
+          </a:effectLst>
+          <a:extLst>
+            <a:ext uri="{909E8E84-426E-40DD-AFC4-6F175D3DCCD1}">
+              <a14:hiddenFill xmlns:a14="http://schemas.microsoft.com/office/drawing/2010/main">
+                <a:solidFill>
+                  <a:srgbClr val="FFFFFF"/>
+                </a:solidFill>
+              </a14:hiddenFill>
+            </a:ext>
+          </a:extLst>
+        </p:spPr>
+      </p:pic>
     </p:spTree>
     <p:extLst>
       <p:ext uri="{BB962C8B-B14F-4D97-AF65-F5344CB8AC3E}">
@@ -7046,7 +5695,7 @@
         <p:spPr/>
         <p:txBody>
           <a:bodyPr>
-            <a:normAutofit fontScale="90000"/>
+            <a:normAutofit/>
           </a:bodyPr>
           <a:lstStyle/>
           <a:p>
@@ -7335,7 +5984,9 @@
         </p:nvSpPr>
         <p:spPr/>
         <p:txBody>
-          <a:bodyPr/>
+          <a:bodyPr>
+            <a:normAutofit/>
+          </a:bodyPr>
           <a:lstStyle/>
           <a:p>
             <a:r>
@@ -7395,6 +6046,47 @@
           </a:p>
         </p:txBody>
       </p:sp>
+      <p:pic>
+        <p:nvPicPr>
+          <p:cNvPr id="4" name="Picture 2" descr="Picture background"/>
+          <p:cNvPicPr>
+            <a:picLocks noChangeAspect="1" noChangeArrowheads="1"/>
+          </p:cNvPicPr>
+          <p:nvPr/>
+        </p:nvPicPr>
+        <p:blipFill>
+          <a:blip r:embed="rId2">
+            <a:extLst>
+              <a:ext uri="{28A0092B-C50C-407E-A947-70E740481C1C}">
+                <a14:useLocalDpi xmlns:a14="http://schemas.microsoft.com/office/drawing/2010/main" val="0"/>
+              </a:ext>
+            </a:extLst>
+          </a:blip>
+          <a:srcRect/>
+          <a:stretch>
+            <a:fillRect/>
+          </a:stretch>
+        </p:blipFill>
+        <p:spPr bwMode="auto">
+          <a:xfrm>
+            <a:off x="7029973" y="1845734"/>
+            <a:ext cx="4537423" cy="4385723"/>
+          </a:xfrm>
+          <a:prstGeom prst="rect">
+            <a:avLst/>
+          </a:prstGeom>
+          <a:noFill/>
+          <a:extLst>
+            <a:ext uri="{909E8E84-426E-40DD-AFC4-6F175D3DCCD1}">
+              <a14:hiddenFill xmlns:a14="http://schemas.microsoft.com/office/drawing/2010/main">
+                <a:solidFill>
+                  <a:srgbClr val="FFFFFF"/>
+                </a:solidFill>
+              </a14:hiddenFill>
+            </a:ext>
+          </a:extLst>
+        </p:spPr>
+      </p:pic>
     </p:spTree>
     <p:extLst>
       <p:ext uri="{BB962C8B-B14F-4D97-AF65-F5344CB8AC3E}">
@@ -7650,7 +6342,7 @@
         <p:spPr/>
         <p:txBody>
           <a:bodyPr>
-            <a:normAutofit fontScale="92500" lnSpcReduction="10000"/>
+            <a:normAutofit/>
           </a:bodyPr>
           <a:lstStyle/>
           <a:p>
@@ -7747,6 +6439,47 @@
           </a:p>
         </p:txBody>
       </p:sp>
+      <p:pic>
+        <p:nvPicPr>
+          <p:cNvPr id="5122" name="Picture 2" descr="Picture background"/>
+          <p:cNvPicPr>
+            <a:picLocks noChangeAspect="1" noChangeArrowheads="1"/>
+          </p:cNvPicPr>
+          <p:nvPr/>
+        </p:nvPicPr>
+        <p:blipFill>
+          <a:blip r:embed="rId2" cstate="print">
+            <a:extLst>
+              <a:ext uri="{28A0092B-C50C-407E-A947-70E740481C1C}">
+                <a14:useLocalDpi xmlns:a14="http://schemas.microsoft.com/office/drawing/2010/main" val="0"/>
+              </a:ext>
+            </a:extLst>
+          </a:blip>
+          <a:srcRect/>
+          <a:stretch>
+            <a:fillRect/>
+          </a:stretch>
+        </p:blipFill>
+        <p:spPr bwMode="auto">
+          <a:xfrm>
+            <a:off x="6308521" y="2625754"/>
+            <a:ext cx="5942202" cy="3120705"/>
+          </a:xfrm>
+          <a:prstGeom prst="rect">
+            <a:avLst/>
+          </a:prstGeom>
+          <a:noFill/>
+          <a:extLst>
+            <a:ext uri="{909E8E84-426E-40DD-AFC4-6F175D3DCCD1}">
+              <a14:hiddenFill xmlns:a14="http://schemas.microsoft.com/office/drawing/2010/main">
+                <a:solidFill>
+                  <a:srgbClr val="FFFFFF"/>
+                </a:solidFill>
+              </a14:hiddenFill>
+            </a:ext>
+          </a:extLst>
+        </p:spPr>
+      </p:pic>
     </p:spTree>
     <p:extLst>
       <p:ext uri="{BB962C8B-B14F-4D97-AF65-F5344CB8AC3E}">
@@ -7768,9 +6501,9 @@
 </file>
 
 <file path=ppt/theme/theme1.xml><?xml version="1.0" encoding="utf-8"?>
-<a:theme xmlns:a="http://schemas.openxmlformats.org/drawingml/2006/main" name="Сектор">
+<a:theme xmlns:a="http://schemas.openxmlformats.org/drawingml/2006/main" name="Ретро">
   <a:themeElements>
-    <a:clrScheme name="Office 2007-2010">
+    <a:clrScheme name="Фиолетовый II">
       <a:dk1>
         <a:sysClr val="windowText" lastClr="000000"/>
       </a:dk1>
@@ -7778,48 +6511,83 @@
         <a:sysClr val="window" lastClr="FFFFFF"/>
       </a:lt1>
       <a:dk2>
-        <a:srgbClr val="1F497D"/>
+        <a:srgbClr val="632E62"/>
       </a:dk2>
       <a:lt2>
-        <a:srgbClr val="EEECE1"/>
+        <a:srgbClr val="EAE5EB"/>
       </a:lt2>
       <a:accent1>
-        <a:srgbClr val="4F81BD"/>
+        <a:srgbClr val="92278F"/>
       </a:accent1>
       <a:accent2>
-        <a:srgbClr val="C0504D"/>
+        <a:srgbClr val="9B57D3"/>
       </a:accent2>
       <a:accent3>
-        <a:srgbClr val="9BBB59"/>
+        <a:srgbClr val="755DD9"/>
       </a:accent3>
       <a:accent4>
-        <a:srgbClr val="8064A2"/>
+        <a:srgbClr val="665EB8"/>
       </a:accent4>
       <a:accent5>
-        <a:srgbClr val="4BACC6"/>
+        <a:srgbClr val="45A5ED"/>
       </a:accent5>
       <a:accent6>
-        <a:srgbClr val="F79646"/>
+        <a:srgbClr val="5982DB"/>
       </a:accent6>
       <a:hlink>
-        <a:srgbClr val="0000FF"/>
+        <a:srgbClr val="0066FF"/>
       </a:hlink>
       <a:folHlink>
-        <a:srgbClr val="800080"/>
+        <a:srgbClr val="666699"/>
       </a:folHlink>
     </a:clrScheme>
-    <a:fontScheme name="Сектор">
+    <a:fontScheme name="Ретро">
       <a:majorFont>
-        <a:latin typeface="Century Gothic" panose="020B0502020202020204"/>
+        <a:latin typeface="Calibri Light" panose="020F0302020204030204"/>
         <a:ea typeface=""/>
         <a:cs typeface=""/>
-        <a:font script="Jpan" typeface="メイリオ"/>
-        <a:font script="Hang" typeface="HY중고딕"/>
-        <a:font script="Hans" typeface="幼圆"/>
-        <a:font script="Hant" typeface="微軟正黑體"/>
-        <a:font script="Arab" typeface="Tahoma"/>
-        <a:font script="Hebr" typeface="Gisha"/>
-        <a:font script="Thai" typeface="DilleniaUPC"/>
+        <a:font script="Jpan" typeface="ＭＳ Ｐゴシック"/>
+        <a:font script="Hang" typeface="맑은 고딕"/>
+        <a:font script="Hans" typeface="宋体"/>
+        <a:font script="Hant" typeface="新細明體"/>
+        <a:font script="Arab" typeface="Times New Roman"/>
+        <a:font script="Hebr" typeface="Times New Roman"/>
+        <a:font script="Thai" typeface="Angsana New"/>
+        <a:font script="Ethi" typeface="Nyala"/>
+        <a:font script="Beng" typeface="Vrinda"/>
+        <a:font script="Gujr" typeface="Shruti"/>
+        <a:font script="Khmr" typeface="MoolBoran"/>
+        <a:font script="Knda" typeface="Tunga"/>
+        <a:font script="Guru" typeface="Raavi"/>
+        <a:font script="Cans" typeface="Euphemia"/>
+        <a:font script="Cher" typeface="Plantagenet Cherokee"/>
+        <a:font script="Yiii" typeface="Microsoft Yi Baiti"/>
+        <a:font script="Tibt" typeface="Microsoft Himalaya"/>
+        <a:font script="Thaa" typeface="MV Boli"/>
+        <a:font script="Deva" typeface="Mangal"/>
+        <a:font script="Telu" typeface="Gautami"/>
+        <a:font script="Taml" typeface="Latha"/>
+        <a:font script="Syrc" typeface="Estrangelo Edessa"/>
+        <a:font script="Orya" typeface="Kalinga"/>
+        <a:font script="Mlym" typeface="Kartika"/>
+        <a:font script="Laoo" typeface="DokChampa"/>
+        <a:font script="Sinh" typeface="Iskoola Pota"/>
+        <a:font script="Mong" typeface="Mongolian Baiti"/>
+        <a:font script="Viet" typeface="Times New Roman"/>
+        <a:font script="Uigh" typeface="Microsoft Uighur"/>
+        <a:font script="Geor" typeface="Sylfaen"/>
+      </a:majorFont>
+      <a:minorFont>
+        <a:latin typeface="Calibri" panose="020F0502020204030204"/>
+        <a:ea typeface=""/>
+        <a:cs typeface=""/>
+        <a:font script="Jpan" typeface="ＭＳ Ｐゴシック"/>
+        <a:font script="Hang" typeface="맑은 고딕"/>
+        <a:font script="Hans" typeface="宋体"/>
+        <a:font script="Hant" typeface="新細明體"/>
+        <a:font script="Arab" typeface="Arial"/>
+        <a:font script="Hebr" typeface="Arial"/>
+        <a:font script="Thai" typeface="Cordia New"/>
         <a:font script="Ethi" typeface="Nyala"/>
         <a:font script="Beng" typeface="Vrinda"/>
         <a:font script="Gujr" typeface="Shruti"/>
@@ -7840,47 +6608,12 @@
         <a:font script="Laoo" typeface="DokChampa"/>
         <a:font script="Sinh" typeface="Iskoola Pota"/>
         <a:font script="Mong" typeface="Mongolian Baiti"/>
-        <a:font script="Viet" typeface="Tahoma"/>
-        <a:font script="Uigh" typeface="Microsoft Uighur"/>
-        <a:font script="Geor" typeface="Sylfaen"/>
-      </a:majorFont>
-      <a:minorFont>
-        <a:latin typeface="Century Gothic" panose="020B0502020202020204"/>
-        <a:ea typeface=""/>
-        <a:cs typeface=""/>
-        <a:font script="Jpan" typeface="メイリオ"/>
-        <a:font script="Hang" typeface="HY중고딕"/>
-        <a:font script="Hans" typeface="幼圆"/>
-        <a:font script="Hant" typeface="微軟正黑體"/>
-        <a:font script="Arab" typeface="Tahoma"/>
-        <a:font script="Hebr" typeface="Gisha"/>
-        <a:font script="Thai" typeface="DilleniaUPC"/>
-        <a:font script="Ethi" typeface="Nyala"/>
-        <a:font script="Beng" typeface="Vrinda"/>
-        <a:font script="Gujr" typeface="Shruti"/>
-        <a:font script="Khmr" typeface="DaunPenh"/>
-        <a:font script="Knda" typeface="Tunga"/>
-        <a:font script="Guru" typeface="Raavi"/>
-        <a:font script="Cans" typeface="Euphemia"/>
-        <a:font script="Cher" typeface="Plantagenet Cherokee"/>
-        <a:font script="Yiii" typeface="Microsoft Yi Baiti"/>
-        <a:font script="Tibt" typeface="Microsoft Himalaya"/>
-        <a:font script="Thaa" typeface="MV Boli"/>
-        <a:font script="Deva" typeface="Mangal"/>
-        <a:font script="Telu" typeface="Gautami"/>
-        <a:font script="Taml" typeface="Latha"/>
-        <a:font script="Syrc" typeface="Estrangelo Edessa"/>
-        <a:font script="Orya" typeface="Kalinga"/>
-        <a:font script="Mlym" typeface="Kartika"/>
-        <a:font script="Laoo" typeface="DokChampa"/>
-        <a:font script="Sinh" typeface="Iskoola Pota"/>
-        <a:font script="Mong" typeface="Mongolian Baiti"/>
-        <a:font script="Viet" typeface="Tahoma"/>
+        <a:font script="Viet" typeface="Arial"/>
         <a:font script="Uigh" typeface="Microsoft Uighur"/>
         <a:font script="Geor" typeface="Sylfaen"/>
       </a:minorFont>
     </a:fontScheme>
-    <a:fmtScheme name="Сектор">
+    <a:fmtScheme name="Ретро">
       <a:fillStyleLst>
         <a:solidFill>
           <a:schemeClr val="phClr"/>
@@ -7889,61 +6622,77 @@
           <a:gsLst>
             <a:gs pos="0">
               <a:schemeClr val="phClr">
-                <a:tint val="62000"/>
-                <a:hueMod val="94000"/>
-                <a:satMod val="140000"/>
-                <a:lumMod val="110000"/>
+                <a:tint val="65000"/>
+                <a:shade val="92000"/>
+                <a:satMod val="130000"/>
+              </a:schemeClr>
+            </a:gs>
+            <a:gs pos="45000">
+              <a:schemeClr val="phClr">
+                <a:tint val="60000"/>
+                <a:shade val="99000"/>
+                <a:satMod val="120000"/>
               </a:schemeClr>
             </a:gs>
             <a:gs pos="100000">
               <a:schemeClr val="phClr">
-                <a:tint val="84000"/>
-                <a:satMod val="160000"/>
+                <a:tint val="55000"/>
+                <a:satMod val="140000"/>
               </a:schemeClr>
             </a:gs>
           </a:gsLst>
-          <a:lin ang="5400000" scaled="0"/>
+          <a:path path="circle">
+            <a:fillToRect l="100000" t="100000" r="100000" b="100000"/>
+          </a:path>
         </a:gradFill>
         <a:gradFill rotWithShape="1">
           <a:gsLst>
             <a:gs pos="0">
               <a:schemeClr val="phClr">
-                <a:tint val="98000"/>
-                <a:hueMod val="94000"/>
+                <a:shade val="85000"/>
                 <a:satMod val="130000"/>
-                <a:lumMod val="128000"/>
+              </a:schemeClr>
+            </a:gs>
+            <a:gs pos="34000">
+              <a:schemeClr val="phClr">
+                <a:shade val="87000"/>
+                <a:satMod val="125000"/>
+              </a:schemeClr>
+            </a:gs>
+            <a:gs pos="70000">
+              <a:schemeClr val="phClr">
+                <a:tint val="100000"/>
+                <a:shade val="90000"/>
+                <a:satMod val="130000"/>
               </a:schemeClr>
             </a:gs>
             <a:gs pos="100000">
               <a:schemeClr val="phClr">
-                <a:shade val="94000"/>
-                <a:lumMod val="88000"/>
+                <a:tint val="100000"/>
+                <a:shade val="100000"/>
+                <a:satMod val="110000"/>
               </a:schemeClr>
             </a:gs>
           </a:gsLst>
-          <a:lin ang="5400000" scaled="0"/>
+          <a:path path="circle">
+            <a:fillToRect l="100000" t="100000" r="100000" b="100000"/>
+          </a:path>
         </a:gradFill>
       </a:fillStyleLst>
       <a:lnStyleLst>
-        <a:ln w="9525" cap="rnd" cmpd="sng" algn="ctr">
+        <a:ln w="12700" cap="flat" cmpd="sng" algn="ctr">
           <a:solidFill>
-            <a:schemeClr val="phClr">
-              <a:tint val="76000"/>
-              <a:alpha val="60000"/>
-              <a:hueMod val="94000"/>
-            </a:schemeClr>
+            <a:schemeClr val="phClr"/>
           </a:solidFill>
           <a:prstDash val="solid"/>
         </a:ln>
-        <a:ln w="15875" cap="rnd" cmpd="sng" algn="ctr">
+        <a:ln w="15875" cap="flat" cmpd="sng" algn="ctr">
           <a:solidFill>
-            <a:schemeClr val="phClr">
-              <a:hueMod val="94000"/>
-            </a:schemeClr>
+            <a:schemeClr val="phClr"/>
           </a:solidFill>
           <a:prstDash val="solid"/>
         </a:ln>
-        <a:ln w="28575" cap="rnd" cmpd="sng" algn="ctr">
+        <a:ln w="25400" cap="flat" cmpd="sng" algn="ctr">
           <a:solidFill>
             <a:schemeClr val="phClr"/>
           </a:solidFill>
@@ -7956,18 +6705,18 @@
         </a:effectStyle>
         <a:effectStyle>
           <a:effectLst>
-            <a:innerShdw blurRad="25400" dist="12700" dir="13500000">
+            <a:outerShdw blurRad="38100" dist="25400" dir="2700000" algn="br" rotWithShape="0">
               <a:srgbClr val="000000">
-                <a:alpha val="45000"/>
+                <a:alpha val="60000"/>
               </a:srgbClr>
-            </a:innerShdw>
+            </a:outerShdw>
           </a:effectLst>
         </a:effectStyle>
         <a:effectStyle>
           <a:effectLst>
-            <a:outerShdw blurRad="50800" dist="38100" dir="5400000" rotWithShape="0">
+            <a:outerShdw blurRad="44450" dist="25400" dir="2700000" algn="br" rotWithShape="0">
               <a:srgbClr val="000000">
-                <a:alpha val="46000"/>
+                <a:alpha val="60000"/>
               </a:srgbClr>
             </a:outerShdw>
           </a:effectLst>
@@ -7975,10 +6724,12 @@
             <a:camera prst="orthographicFront">
               <a:rot lat="0" lon="0" rev="0"/>
             </a:camera>
-            <a:lightRig rig="threePt" dir="t"/>
+            <a:lightRig rig="threePt" dir="t">
+              <a:rot lat="0" lon="0" rev="19800000"/>
+            </a:lightRig>
           </a:scene3d>
-          <a:sp3d prstMaterial="plastic">
-            <a:bevelT w="25400" h="25400"/>
+          <a:sp3d prstMaterial="flat">
+            <a:bevelT w="25400" h="31750"/>
           </a:sp3d>
         </a:effectStyle>
       </a:effectStyleLst>
@@ -7986,49 +6737,38 @@
         <a:solidFill>
           <a:schemeClr val="phClr"/>
         </a:solidFill>
+        <a:solidFill>
+          <a:schemeClr val="phClr">
+            <a:tint val="90000"/>
+            <a:shade val="97000"/>
+            <a:satMod val="130000"/>
+          </a:schemeClr>
+        </a:solidFill>
         <a:gradFill rotWithShape="1">
           <a:gsLst>
-            <a:gs pos="10000">
+            <a:gs pos="0">
               <a:schemeClr val="phClr">
-                <a:tint val="97000"/>
-                <a:hueMod val="142000"/>
-                <a:satMod val="200000"/>
-                <a:lumMod val="118000"/>
+                <a:tint val="96000"/>
+                <a:shade val="99000"/>
+                <a:satMod val="140000"/>
+              </a:schemeClr>
+            </a:gs>
+            <a:gs pos="65000">
+              <a:schemeClr val="phClr">
+                <a:tint val="100000"/>
+                <a:shade val="80000"/>
+                <a:satMod val="130000"/>
               </a:schemeClr>
             </a:gs>
             <a:gs pos="100000">
               <a:schemeClr val="phClr">
-                <a:shade val="94000"/>
-                <a:hueMod val="22000"/>
-                <a:satMod val="220000"/>
-                <a:lumMod val="62000"/>
+                <a:tint val="100000"/>
+                <a:shade val="48000"/>
+                <a:satMod val="120000"/>
               </a:schemeClr>
             </a:gs>
           </a:gsLst>
-          <a:lin ang="6120000" scaled="1"/>
-        </a:gradFill>
-        <a:gradFill rotWithShape="1">
-          <a:gsLst>
-            <a:gs pos="0">
-              <a:schemeClr val="phClr">
-                <a:tint val="97000"/>
-                <a:hueMod val="142000"/>
-                <a:satMod val="200000"/>
-                <a:lumMod val="118000"/>
-              </a:schemeClr>
-            </a:gs>
-            <a:gs pos="100000">
-              <a:schemeClr val="phClr">
-                <a:shade val="92000"/>
-                <a:hueMod val="22000"/>
-                <a:satMod val="220000"/>
-                <a:lumMod val="62000"/>
-              </a:schemeClr>
-            </a:gs>
-          </a:gsLst>
-          <a:path path="circle">
-            <a:fillToRect b="100000"/>
-          </a:path>
+          <a:lin ang="16200000" scaled="0"/>
         </a:gradFill>
       </a:bgFillStyleLst>
     </a:fmtScheme>
@@ -8037,7 +6777,7 @@
   <a:extraClrSchemeLst/>
   <a:extLst>
     <a:ext uri="{05A4C25C-085E-4340-85A3-A5531E510DB2}">
-      <thm15:themeFamily xmlns:thm15="http://schemas.microsoft.com/office/thememl/2012/main" name="Slice" id="{0507925B-6AC9-4358-8E18-C330545D08F8}" vid="{2903AAAE-3EA5-424A-B142-CC51DC1F897D}"/>
+      <thm15:themeFamily xmlns:thm15="http://schemas.microsoft.com/office/thememl/2012/main" name="Retrospect" id="{5F128B03-DCCA-4EEB-AB3B-CF2899314A46}" vid="{3F1AAB62-24C6-49D2-8E01-B56FAC9A3DCD}"/>
     </a:ext>
   </a:extLst>
 </a:theme>

--- a/Жизненный.pptx
+++ b/Жизненный.pptx
@@ -5777,6 +5777,47 @@
           </a:p>
         </p:txBody>
       </p:sp>
+      <p:pic>
+        <p:nvPicPr>
+          <p:cNvPr id="1026" name="Picture 2" descr="Этап 1 - Планирование и анализ требований"/>
+          <p:cNvPicPr>
+            <a:picLocks noChangeAspect="1" noChangeArrowheads="1"/>
+          </p:cNvPicPr>
+          <p:nvPr/>
+        </p:nvPicPr>
+        <p:blipFill>
+          <a:blip r:embed="rId2">
+            <a:extLst>
+              <a:ext uri="{28A0092B-C50C-407E-A947-70E740481C1C}">
+                <a14:useLocalDpi xmlns:a14="http://schemas.microsoft.com/office/drawing/2010/main" val="0"/>
+              </a:ext>
+            </a:extLst>
+          </a:blip>
+          <a:srcRect/>
+          <a:stretch>
+            <a:fillRect/>
+          </a:stretch>
+        </p:blipFill>
+        <p:spPr bwMode="auto">
+          <a:xfrm>
+            <a:off x="1097280" y="3654795"/>
+            <a:ext cx="6393664" cy="2398174"/>
+          </a:xfrm>
+          <a:prstGeom prst="rect">
+            <a:avLst/>
+          </a:prstGeom>
+          <a:noFill/>
+          <a:extLst>
+            <a:ext uri="{909E8E84-426E-40DD-AFC4-6F175D3DCCD1}">
+              <a14:hiddenFill xmlns:a14="http://schemas.microsoft.com/office/drawing/2010/main">
+                <a:solidFill>
+                  <a:srgbClr val="FFFFFF"/>
+                </a:solidFill>
+              </a14:hiddenFill>
+            </a:ext>
+          </a:extLst>
+        </p:spPr>
+      </p:pic>
     </p:spTree>
     <p:extLst>
       <p:ext uri="{BB962C8B-B14F-4D97-AF65-F5344CB8AC3E}">
@@ -5846,7 +5887,12 @@
             <p:ph idx="1"/>
           </p:nvPr>
         </p:nvSpPr>
-        <p:spPr/>
+        <p:spPr>
+          <a:xfrm>
+            <a:off x="417771" y="1912846"/>
+            <a:ext cx="10058400" cy="4023360"/>
+          </a:xfrm>
+        </p:spPr>
         <p:txBody>
           <a:bodyPr/>
           <a:lstStyle/>
@@ -5935,6 +5981,47 @@
           </a:p>
         </p:txBody>
       </p:sp>
+      <p:pic>
+        <p:nvPicPr>
+          <p:cNvPr id="3074" name="Picture 2" descr="Этап 3 - Проектирование архитектуры"/>
+          <p:cNvPicPr>
+            <a:picLocks noChangeAspect="1" noChangeArrowheads="1"/>
+          </p:cNvPicPr>
+          <p:nvPr/>
+        </p:nvPicPr>
+        <p:blipFill>
+          <a:blip r:embed="rId2">
+            <a:extLst>
+              <a:ext uri="{28A0092B-C50C-407E-A947-70E740481C1C}">
+                <a14:useLocalDpi xmlns:a14="http://schemas.microsoft.com/office/drawing/2010/main" val="0"/>
+              </a:ext>
+            </a:extLst>
+          </a:blip>
+          <a:srcRect/>
+          <a:stretch>
+            <a:fillRect/>
+          </a:stretch>
+        </p:blipFill>
+        <p:spPr bwMode="auto">
+          <a:xfrm>
+            <a:off x="7007603" y="1845734"/>
+            <a:ext cx="4823670" cy="1893248"/>
+          </a:xfrm>
+          <a:prstGeom prst="rect">
+            <a:avLst/>
+          </a:prstGeom>
+          <a:noFill/>
+          <a:extLst>
+            <a:ext uri="{909E8E84-426E-40DD-AFC4-6F175D3DCCD1}">
+              <a14:hiddenFill xmlns:a14="http://schemas.microsoft.com/office/drawing/2010/main">
+                <a:solidFill>
+                  <a:srgbClr val="FFFFFF"/>
+                </a:solidFill>
+              </a14:hiddenFill>
+            </a:ext>
+          </a:extLst>
+        </p:spPr>
+      </p:pic>
     </p:spTree>
     <p:extLst>
       <p:ext uri="{BB962C8B-B14F-4D97-AF65-F5344CB8AC3E}">
@@ -6253,6 +6340,47 @@
           </a:p>
         </p:txBody>
       </p:sp>
+      <p:pic>
+        <p:nvPicPr>
+          <p:cNvPr id="2050" name="Picture 2" descr="Этап 5 - Тестирование продукта"/>
+          <p:cNvPicPr>
+            <a:picLocks noChangeAspect="1" noChangeArrowheads="1"/>
+          </p:cNvPicPr>
+          <p:nvPr/>
+        </p:nvPicPr>
+        <p:blipFill>
+          <a:blip r:embed="rId2">
+            <a:extLst>
+              <a:ext uri="{28A0092B-C50C-407E-A947-70E740481C1C}">
+                <a14:useLocalDpi xmlns:a14="http://schemas.microsoft.com/office/drawing/2010/main" val="0"/>
+              </a:ext>
+            </a:extLst>
+          </a:blip>
+          <a:srcRect/>
+          <a:stretch>
+            <a:fillRect/>
+          </a:stretch>
+        </p:blipFill>
+        <p:spPr bwMode="auto">
+          <a:xfrm>
+            <a:off x="6929307" y="1845734"/>
+            <a:ext cx="4741294" cy="2367746"/>
+          </a:xfrm>
+          <a:prstGeom prst="rect">
+            <a:avLst/>
+          </a:prstGeom>
+          <a:noFill/>
+          <a:extLst>
+            <a:ext uri="{909E8E84-426E-40DD-AFC4-6F175D3DCCD1}">
+              <a14:hiddenFill xmlns:a14="http://schemas.microsoft.com/office/drawing/2010/main">
+                <a:solidFill>
+                  <a:srgbClr val="FFFFFF"/>
+                </a:solidFill>
+              </a14:hiddenFill>
+            </a:ext>
+          </a:extLst>
+        </p:spPr>
+      </p:pic>
     </p:spTree>
     <p:extLst>
       <p:ext uri="{BB962C8B-B14F-4D97-AF65-F5344CB8AC3E}">
